--- a/Van_Dyck_Presentation.pptx
+++ b/Van_Dyck_Presentation.pptx
@@ -3096,10 +3096,10 @@
         <a:gradFill rotWithShape="1">
           <a:gsLst>
             <a:gs pos="0">
-              <a:srgbClr val="0F071A"/>
+              <a:srgbClr val="080512"/>
             </a:gs>
             <a:gs pos="100000">
-              <a:srgbClr val="2D1B4E"/>
+              <a:srgbClr val="22153A"/>
             </a:gs>
           </a:gsLst>
           <a:lin scaled="0"/>
@@ -3122,7 +3122,7 @@
         </p:nvSpPr>
         <p:spPr>
           <a:xfrm>
-            <a:off x="7315200" y="-1371600"/>
+            <a:off x="7132320" y="-1371600"/>
             <a:ext cx="3657600" cy="3657600"/>
           </a:xfrm>
           <a:prstGeom prst="ellipse">
@@ -3200,16 +3200,157 @@
           </a:p>
         </p:txBody>
       </p:sp>
-      <p:sp>
-        <p:nvSpPr>
-          <p:cNvPr id="4" name="Rectangle 3"/>
+      <p:pic>
+        <p:nvPicPr>
+          <p:cNvPr id="4" name="Picture 3" descr="self_portrait.jpg"/>
+          <p:cNvPicPr>
+            <a:picLocks noChangeAspect="1"/>
+          </p:cNvPicPr>
+          <p:nvPr/>
+        </p:nvPicPr>
+        <p:blipFill>
+          <a:blip r:embed="rId2"/>
+          <a:stretch>
+            <a:fillRect/>
+          </a:stretch>
+        </p:blipFill>
+        <p:spPr>
+          <a:xfrm>
+            <a:off x="5943600" y="1371600"/>
+            <a:ext cx="3373887" cy="5029200"/>
+          </a:xfrm>
+          <a:prstGeom prst="rect">
+            <a:avLst/>
+          </a:prstGeom>
+        </p:spPr>
+      </p:pic>
+      <p:sp>
+        <p:nvSpPr>
+          <p:cNvPr id="5" name="Rectangle 4"/>
           <p:cNvSpPr/>
           <p:nvPr/>
         </p:nvSpPr>
         <p:spPr>
           <a:xfrm>
-            <a:off x="1097280" y="2194560"/>
-            <a:ext cx="2743200" cy="50800"/>
+            <a:off x="5943600" y="1371600"/>
+            <a:ext cx="3200400" cy="5029200"/>
+          </a:xfrm>
+          <a:prstGeom prst="rect">
+            <a:avLst/>
+          </a:prstGeom>
+          <a:solidFill>
+            <a:srgbClr val="22153A">
+              <a:alpha val="55000"/>
+            </a:srgbClr>
+          </a:solidFill>
+          <a:ln>
+            <a:noFill/>
+          </a:ln>
+        </p:spPr>
+        <p:style>
+          <a:lnRef idx="1">
+            <a:schemeClr val="accent1"/>
+          </a:lnRef>
+          <a:fillRef idx="3">
+            <a:schemeClr val="accent1"/>
+          </a:fillRef>
+          <a:effectRef idx="2">
+            <a:schemeClr val="accent1"/>
+          </a:effectRef>
+          <a:fontRef idx="minor">
+            <a:schemeClr val="lt1"/>
+          </a:fontRef>
+        </p:style>
+        <p:txBody>
+          <a:bodyPr rtlCol="0" anchor="ctr"/>
+          <a:lstStyle/>
+          <a:p>
+            <a:pPr algn="ctr"/>
+          </a:p>
+        </p:txBody>
+      </p:sp>
+      <p:sp>
+        <p:nvSpPr>
+          <p:cNvPr id="6" name="TextBox 5"/>
+          <p:cNvSpPr txBox="1"/>
+          <p:nvPr/>
+        </p:nvSpPr>
+        <p:spPr>
+          <a:xfrm>
+            <a:off x="731520" y="457200"/>
+            <a:ext cx="5486400" cy="365760"/>
+          </a:xfrm>
+          <a:prstGeom prst="rect">
+            <a:avLst/>
+          </a:prstGeom>
+          <a:noFill/>
+        </p:spPr>
+        <p:txBody>
+          <a:bodyPr wrap="square">
+            <a:spAutoFit/>
+          </a:bodyPr>
+          <a:lstStyle/>
+          <a:p>
+            <a:pPr algn="l">
+              <a:defRPr sz="1000" b="0" i="0">
+                <a:solidFill>
+                  <a:srgbClr val="8A7A6A"/>
+                </a:solidFill>
+                <a:latin typeface="Calibri"/>
+              </a:defRPr>
+            </a:pPr>
+            <a:r>
+              <a:t>Тверской филиал РГУ им. А.Н. Косыгина</a:t>
+            </a:r>
+          </a:p>
+        </p:txBody>
+      </p:sp>
+      <p:sp>
+        <p:nvSpPr>
+          <p:cNvPr id="7" name="TextBox 6"/>
+          <p:cNvSpPr txBox="1"/>
+          <p:nvPr/>
+        </p:nvSpPr>
+        <p:spPr>
+          <a:xfrm>
+            <a:off x="731520" y="1828800"/>
+            <a:ext cx="4572000" cy="365760"/>
+          </a:xfrm>
+          <a:prstGeom prst="rect">
+            <a:avLst/>
+          </a:prstGeom>
+          <a:noFill/>
+        </p:spPr>
+        <p:txBody>
+          <a:bodyPr wrap="square">
+            <a:spAutoFit/>
+          </a:bodyPr>
+          <a:lstStyle/>
+          <a:p>
+            <a:pPr algn="l">
+              <a:defRPr sz="1200" b="0" i="1">
+                <a:solidFill>
+                  <a:srgbClr val="E8C56D"/>
+                </a:solidFill>
+                <a:latin typeface="Calibri"/>
+              </a:defRPr>
+            </a:pPr>
+            <a:r>
+              <a:t>ИСТОРИЯ ИСКУССТВ</a:t>
+            </a:r>
+          </a:p>
+        </p:txBody>
+      </p:sp>
+      <p:sp>
+        <p:nvSpPr>
+          <p:cNvPr id="8" name="Rectangle 7"/>
+          <p:cNvSpPr/>
+          <p:nvPr/>
+        </p:nvSpPr>
+        <p:spPr>
+          <a:xfrm>
+            <a:off x="731520" y="2377440"/>
+            <a:ext cx="3200400" cy="50800"/>
           </a:xfrm>
           <a:prstGeom prst="rect">
             <a:avLst/>
@@ -3245,14 +3386,14 @@
       </p:sp>
       <p:sp>
         <p:nvSpPr>
-          <p:cNvPr id="5" name="TextBox 4"/>
+          <p:cNvPr id="9" name="TextBox 8"/>
           <p:cNvSpPr txBox="1"/>
           <p:nvPr/>
         </p:nvSpPr>
         <p:spPr>
           <a:xfrm>
-            <a:off x="1097280" y="365760"/>
-            <a:ext cx="7315200" cy="457200"/>
+            <a:off x="731520" y="2651760"/>
+            <a:ext cx="5029200" cy="1645920"/>
           </a:xfrm>
           <a:prstGeom prst="rect">
             <a:avLst/>
@@ -3266,29 +3407,33 @@
           <a:lstStyle/>
           <a:p>
             <a:pPr algn="l">
-              <a:defRPr sz="1000" b="0" i="0">
-                <a:solidFill>
-                  <a:srgbClr val="9A8A7A"/>
-                </a:solidFill>
-                <a:latin typeface="Palatino Linotype"/>
-              </a:defRPr>
-            </a:pPr>
-            <a:r>
-              <a:t>Тверской филиал РГУ им. А.Н. Косыгина</a:t>
-            </a:r>
-          </a:p>
-        </p:txBody>
-      </p:sp>
-      <p:sp>
-        <p:nvSpPr>
-          <p:cNvPr id="6" name="TextBox 5"/>
+              <a:defRPr sz="4200" b="1" i="0">
+                <a:solidFill>
+                  <a:srgbClr val="FFFFFF"/>
+                </a:solidFill>
+                <a:latin typeface="Georgia"/>
+              </a:defRPr>
+            </a:pPr>
+            <a:r>
+              <a:t>АНТОНИС</a:t>
+            </a:r>
+            <a:br/>
+            <a:r>
+              <a:t>ВАН ДЕЙК</a:t>
+            </a:r>
+          </a:p>
+        </p:txBody>
+      </p:sp>
+      <p:sp>
+        <p:nvSpPr>
+          <p:cNvPr id="10" name="TextBox 9"/>
           <p:cNvSpPr txBox="1"/>
           <p:nvPr/>
         </p:nvSpPr>
         <p:spPr>
           <a:xfrm>
-            <a:off x="1097280" y="1645920"/>
-            <a:ext cx="6400800" cy="457200"/>
+            <a:off x="731520" y="4389120"/>
+            <a:ext cx="4572000" cy="548640"/>
           </a:xfrm>
           <a:prstGeom prst="rect">
             <a:avLst/>
@@ -3302,29 +3447,29 @@
           <a:lstStyle/>
           <a:p>
             <a:pPr algn="l">
-              <a:defRPr sz="1400" b="0" i="1">
-                <a:solidFill>
-                  <a:srgbClr val="E8C56D"/>
-                </a:solidFill>
-                <a:latin typeface="Palatino Linotype"/>
-              </a:defRPr>
-            </a:pPr>
-            <a:r>
-              <a:t>История искусств</a:t>
-            </a:r>
-          </a:p>
-        </p:txBody>
-      </p:sp>
-      <p:sp>
-        <p:nvSpPr>
-          <p:cNvPr id="7" name="TextBox 6"/>
+              <a:defRPr sz="1600" b="0" i="0">
+                <a:solidFill>
+                  <a:srgbClr val="E8E0D0"/>
+                </a:solidFill>
+                <a:latin typeface="Calibri"/>
+              </a:defRPr>
+            </a:pPr>
+            <a:r>
+              <a:t>Избранные произведения</a:t>
+            </a:r>
+          </a:p>
+        </p:txBody>
+      </p:sp>
+      <p:sp>
+        <p:nvSpPr>
+          <p:cNvPr id="11" name="TextBox 10"/>
           <p:cNvSpPr txBox="1"/>
           <p:nvPr/>
         </p:nvSpPr>
         <p:spPr>
           <a:xfrm>
-            <a:off x="1097280" y="2468880"/>
-            <a:ext cx="6858000" cy="1645920"/>
+            <a:off x="731520" y="5029200"/>
+            <a:ext cx="4572000" cy="365760"/>
           </a:xfrm>
           <a:prstGeom prst="rect">
             <a:avLst/>
@@ -3338,29 +3483,29 @@
           <a:lstStyle/>
           <a:p>
             <a:pPr algn="l">
-              <a:defRPr sz="3800" b="1" i="0">
-                <a:solidFill>
-                  <a:srgbClr val="FFFFFF"/>
-                </a:solidFill>
-                <a:latin typeface="Georgia"/>
-              </a:defRPr>
-            </a:pPr>
-            <a:r>
-              <a:t>АНТОНИС ВАН ДЕЙК</a:t>
-            </a:r>
-          </a:p>
-        </p:txBody>
-      </p:sp>
-      <p:sp>
-        <p:nvSpPr>
-          <p:cNvPr id="8" name="TextBox 7"/>
+              <a:defRPr sz="1400" b="0" i="0">
+                <a:solidFill>
+                  <a:srgbClr val="E8C56D"/>
+                </a:solidFill>
+                <a:latin typeface="Calibri"/>
+              </a:defRPr>
+            </a:pPr>
+            <a:r>
+              <a:t>1599 – 1641</a:t>
+            </a:r>
+          </a:p>
+        </p:txBody>
+      </p:sp>
+      <p:sp>
+        <p:nvSpPr>
+          <p:cNvPr id="12" name="TextBox 11"/>
           <p:cNvSpPr txBox="1"/>
           <p:nvPr/>
         </p:nvSpPr>
         <p:spPr>
           <a:xfrm>
-            <a:off x="1097280" y="3931920"/>
-            <a:ext cx="6858000" cy="731520"/>
+            <a:off x="731520" y="5943600"/>
+            <a:ext cx="4572000" cy="365760"/>
           </a:xfrm>
           <a:prstGeom prst="rect">
             <a:avLst/>
@@ -3374,47 +3519,11 @@
           <a:lstStyle/>
           <a:p>
             <a:pPr algn="l">
-              <a:defRPr sz="1600" b="0" i="0">
-                <a:solidFill>
-                  <a:srgbClr val="E8E0D0"/>
-                </a:solidFill>
-                <a:latin typeface="Palatino Linotype"/>
-              </a:defRPr>
-            </a:pPr>
-            <a:r>
-              <a:t>Избранные произведения великого фламандского портретиста</a:t>
-            </a:r>
-          </a:p>
-        </p:txBody>
-      </p:sp>
-      <p:sp>
-        <p:nvSpPr>
-          <p:cNvPr id="9" name="TextBox 8"/>
-          <p:cNvSpPr txBox="1"/>
-          <p:nvPr/>
-        </p:nvSpPr>
-        <p:spPr>
-          <a:xfrm>
-            <a:off x="1097280" y="5760720"/>
-            <a:ext cx="6858000" cy="457200"/>
-          </a:xfrm>
-          <a:prstGeom prst="rect">
-            <a:avLst/>
-          </a:prstGeom>
-          <a:noFill/>
-        </p:spPr>
-        <p:txBody>
-          <a:bodyPr wrap="square">
-            <a:spAutoFit/>
-          </a:bodyPr>
-          <a:lstStyle/>
-          <a:p>
-            <a:pPr algn="l">
-              <a:defRPr sz="1100" b="0" i="0">
-                <a:solidFill>
-                  <a:srgbClr val="9A8A7A"/>
-                </a:solidFill>
-                <a:latin typeface="Palatino Linotype"/>
+              <a:defRPr sz="1000" b="0" i="0">
+                <a:solidFill>
+                  <a:srgbClr val="8A7A6A"/>
+                </a:solidFill>
+                <a:latin typeface="Calibri"/>
               </a:defRPr>
             </a:pPr>
             <a:r>
@@ -3437,7 +3546,7 @@
     <p:bg>
       <p:bgPr>
         <a:solidFill>
-          <a:srgbClr val="1A0A2E"/>
+          <a:srgbClr val="120B1E"/>
         </a:solidFill>
         <a:effectLst/>
       </p:bgPr>
@@ -3451,50 +3560,14 @@
       <p:grpSpPr/>
       <p:sp>
         <p:nvSpPr>
-          <p:cNvPr id="2" name="TextBox 1"/>
-          <p:cNvSpPr txBox="1"/>
-          <p:nvPr/>
-        </p:nvSpPr>
-        <p:spPr>
-          <a:xfrm>
-            <a:off x="731520" y="274320"/>
-            <a:ext cx="7680960" cy="822960"/>
-          </a:xfrm>
-          <a:prstGeom prst="rect">
-            <a:avLst/>
-          </a:prstGeom>
-          <a:noFill/>
-        </p:spPr>
-        <p:txBody>
-          <a:bodyPr wrap="square">
-            <a:spAutoFit/>
-          </a:bodyPr>
-          <a:lstStyle/>
-          <a:p>
-            <a:pPr algn="l">
-              <a:defRPr sz="2200" b="1" i="0">
-                <a:solidFill>
-                  <a:srgbClr val="FFFFFF"/>
-                </a:solidFill>
-                <a:latin typeface="Georgia"/>
-              </a:defRPr>
-            </a:pPr>
-            <a:r>
-              <a:t>Портрет Джорджа Дигби и Уильяма Рассела (ок. 1637)</a:t>
-            </a:r>
-          </a:p>
-        </p:txBody>
-      </p:sp>
-      <p:sp>
-        <p:nvSpPr>
-          <p:cNvPr id="3" name="Rectangle 2"/>
+          <p:cNvPr id="2" name="Rectangle 1"/>
           <p:cNvSpPr/>
           <p:nvPr/>
         </p:nvSpPr>
         <p:spPr>
           <a:xfrm>
-            <a:off x="731520" y="960120"/>
-            <a:ext cx="1828800" cy="38100"/>
+            <a:off x="0" y="0"/>
+            <a:ext cx="9144000" cy="38100"/>
           </a:xfrm>
           <a:prstGeom prst="rect">
             <a:avLst/>
@@ -3530,14 +3603,81 @@
       </p:sp>
       <p:sp>
         <p:nvSpPr>
-          <p:cNvPr id="4" name="TextBox 3"/>
+          <p:cNvPr id="3" name="Rectangle 2"/>
+          <p:cNvSpPr/>
+          <p:nvPr/>
+        </p:nvSpPr>
+        <p:spPr>
+          <a:xfrm>
+            <a:off x="274320" y="548640"/>
+            <a:ext cx="3840480" cy="5943600"/>
+          </a:xfrm>
+          <a:prstGeom prst="rect">
+            <a:avLst/>
+          </a:prstGeom>
+          <a:solidFill>
+            <a:srgbClr val="1E1435"/>
+          </a:solidFill>
+          <a:ln>
+            <a:noFill/>
+          </a:ln>
+        </p:spPr>
+        <p:style>
+          <a:lnRef idx="1">
+            <a:schemeClr val="accent1"/>
+          </a:lnRef>
+          <a:fillRef idx="3">
+            <a:schemeClr val="accent1"/>
+          </a:fillRef>
+          <a:effectRef idx="2">
+            <a:schemeClr val="accent1"/>
+          </a:effectRef>
+          <a:fontRef idx="minor">
+            <a:schemeClr val="lt1"/>
+          </a:fontRef>
+        </p:style>
+        <p:txBody>
+          <a:bodyPr rtlCol="0" anchor="ctr"/>
+          <a:lstStyle/>
+          <a:p>
+            <a:pPr algn="ctr"/>
+          </a:p>
+        </p:txBody>
+      </p:sp>
+      <p:pic>
+        <p:nvPicPr>
+          <p:cNvPr id="4" name="Picture 3" descr="digby_russell.jpg"/>
+          <p:cNvPicPr>
+            <a:picLocks noChangeAspect="1"/>
+          </p:cNvPicPr>
+          <p:nvPr/>
+        </p:nvPicPr>
+        <p:blipFill>
+          <a:blip r:embed="rId2"/>
+          <a:stretch>
+            <a:fillRect/>
+          </a:stretch>
+        </p:blipFill>
+        <p:spPr>
+          <a:xfrm>
+            <a:off x="457200" y="731520"/>
+            <a:ext cx="5589412" cy="5577840"/>
+          </a:xfrm>
+          <a:prstGeom prst="rect">
+            <a:avLst/>
+          </a:prstGeom>
+        </p:spPr>
+      </p:pic>
+      <p:sp>
+        <p:nvSpPr>
+          <p:cNvPr id="5" name="TextBox 4"/>
           <p:cNvSpPr txBox="1"/>
           <p:nvPr/>
         </p:nvSpPr>
         <p:spPr>
           <a:xfrm>
-            <a:off x="731520" y="1280160"/>
-            <a:ext cx="7680960" cy="5029200"/>
+            <a:off x="4389120" y="640080"/>
+            <a:ext cx="4480560" cy="822960"/>
           </a:xfrm>
           <a:prstGeom prst="rect">
             <a:avLst/>
@@ -3550,177 +3690,30 @@
           </a:bodyPr>
           <a:lstStyle/>
           <a:p>
-            <a:pPr>
-              <a:spcBef>
-                <a:spcPts val="1000"/>
-              </a:spcBef>
-              <a:defRPr sz="1300">
-                <a:solidFill>
-                  <a:srgbClr val="E8E0D0"/>
-                </a:solidFill>
-                <a:latin typeface="Palatino Linotype"/>
-              </a:defRPr>
-            </a:pPr>
-            <a:r>
-              <a:t>• Холст, масло. Коллекция Спенсеров, Олторп, Англия</a:t>
-            </a:r>
-          </a:p>
-          <a:p>
-            <a:pPr>
-              <a:spcBef>
-                <a:spcPts val="1000"/>
-              </a:spcBef>
-              <a:defRPr sz="1300">
-                <a:solidFill>
-                  <a:srgbClr val="E8E0D0"/>
-                </a:solidFill>
-                <a:latin typeface="Palatino Linotype"/>
-              </a:defRPr>
-            </a:pPr>
-            <a:r>
-              <a:t>• Двойной парадный портрет двух молодых английских аристократов</a:t>
-            </a:r>
-          </a:p>
-          <a:p>
-            <a:pPr>
-              <a:spcBef>
-                <a:spcPts val="1000"/>
-              </a:spcBef>
-              <a:defRPr sz="1300">
-                <a:solidFill>
-                  <a:srgbClr val="E8E0D0"/>
-                </a:solidFill>
-                <a:latin typeface="Palatino Linotype"/>
-              </a:defRPr>
-            </a:pPr>
-            <a:r>
-              <a:t>• Джордж Дигби (1612–1677) — 2-й граф Бристоль, политик-роялист,</a:t>
-            </a:r>
-          </a:p>
-          <a:p>
-            <a:pPr>
-              <a:spcBef>
-                <a:spcPts val="1000"/>
-              </a:spcBef>
-              <a:defRPr sz="1300">
-                <a:solidFill>
-                  <a:srgbClr val="E8E0D0"/>
-                </a:solidFill>
-                <a:latin typeface="Palatino Linotype"/>
-              </a:defRPr>
-            </a:pPr>
-            <a:r>
-              <a:t>  государственный секретарь Карла I, поэт и драматург</a:t>
-            </a:r>
-          </a:p>
-          <a:p>
-            <a:pPr>
-              <a:spcBef>
-                <a:spcPts val="1000"/>
-              </a:spcBef>
-              <a:defRPr sz="1300">
-                <a:solidFill>
-                  <a:srgbClr val="E8E0D0"/>
-                </a:solidFill>
-                <a:latin typeface="Palatino Linotype"/>
-              </a:defRPr>
-            </a:pPr>
-            <a:r>
-              <a:t>• Уильям Рассел (1616–1700) — впоследствии 1-й герцог Бедфорд</a:t>
-            </a:r>
-          </a:p>
-          <a:p>
-            <a:pPr>
-              <a:spcBef>
-                <a:spcPts val="1000"/>
-              </a:spcBef>
-              <a:defRPr sz="1300">
-                <a:solidFill>
-                  <a:srgbClr val="E8E0D0"/>
-                </a:solidFill>
-                <a:latin typeface="Palatino Linotype"/>
-              </a:defRPr>
-            </a:pPr>
-            <a:r>
-              <a:t>• Оба — молодые придворные, им около 21–25 лет на портрете</a:t>
-            </a:r>
-          </a:p>
-          <a:p>
-            <a:pPr>
-              <a:spcBef>
-                <a:spcPts val="1000"/>
-              </a:spcBef>
-              <a:defRPr sz="1300">
-                <a:solidFill>
-                  <a:srgbClr val="E8E0D0"/>
-                </a:solidFill>
-                <a:latin typeface="Palatino Linotype"/>
-              </a:defRPr>
-            </a:pPr>
-            <a:r>
-              <a:t>• Элегантная непринуждённость поз передаёт светскость</a:t>
-            </a:r>
-          </a:p>
-          <a:p>
-            <a:pPr>
-              <a:spcBef>
-                <a:spcPts val="1000"/>
-              </a:spcBef>
-              <a:defRPr sz="1300">
-                <a:solidFill>
-                  <a:srgbClr val="E8E0D0"/>
-                </a:solidFill>
-                <a:latin typeface="Palatino Linotype"/>
-              </a:defRPr>
-            </a:pPr>
-            <a:r>
-              <a:t>  и уверенность представителей высшей аристократии</a:t>
-            </a:r>
-          </a:p>
-          <a:p>
-            <a:pPr>
-              <a:spcBef>
-                <a:spcPts val="1000"/>
-              </a:spcBef>
-              <a:defRPr sz="1300">
-                <a:solidFill>
-                  <a:srgbClr val="E8E0D0"/>
-                </a:solidFill>
-                <a:latin typeface="Palatino Linotype"/>
-              </a:defRPr>
-            </a:pPr>
-            <a:r>
-              <a:t>• Типичный пример «friendship portrait» — жанра, в котором</a:t>
-            </a:r>
-          </a:p>
-          <a:p>
-            <a:pPr>
-              <a:spcBef>
-                <a:spcPts val="1000"/>
-              </a:spcBef>
-              <a:defRPr sz="1300">
-                <a:solidFill>
-                  <a:srgbClr val="E8E0D0"/>
-                </a:solidFill>
-                <a:latin typeface="Palatino Linotype"/>
-              </a:defRPr>
-            </a:pPr>
-            <a:r>
-              <a:t>  Ван Дейк был непревзойдённым мастером</a:t>
-            </a:r>
-          </a:p>
-        </p:txBody>
-      </p:sp>
-      <p:sp>
-        <p:nvSpPr>
-          <p:cNvPr id="5" name="TextBox 4"/>
+            <a:pPr algn="l">
+              <a:defRPr sz="2000" b="1" i="0">
+                <a:solidFill>
+                  <a:srgbClr val="FFFFFF"/>
+                </a:solidFill>
+                <a:latin typeface="Georgia"/>
+              </a:defRPr>
+            </a:pPr>
+            <a:r>
+              <a:t>Портрет Дигби и Рассела</a:t>
+            </a:r>
+          </a:p>
+        </p:txBody>
+      </p:sp>
+      <p:sp>
+        <p:nvSpPr>
+          <p:cNvPr id="6" name="TextBox 5"/>
           <p:cNvSpPr txBox="1"/>
           <p:nvPr/>
         </p:nvSpPr>
         <p:spPr>
           <a:xfrm>
-            <a:off x="8412480" y="6400800"/>
-            <a:ext cx="548640" cy="365760"/>
+            <a:off x="4389120" y="1371600"/>
+            <a:ext cx="4480560" cy="365760"/>
           </a:xfrm>
           <a:prstGeom prst="rect">
             <a:avLst/>
@@ -3733,12 +3726,326 @@
           </a:bodyPr>
           <a:lstStyle/>
           <a:p>
+            <a:pPr algn="l">
+              <a:defRPr sz="1300" b="0" i="1">
+                <a:solidFill>
+                  <a:srgbClr val="E8C56D"/>
+                </a:solidFill>
+                <a:latin typeface="Calibri"/>
+              </a:defRPr>
+            </a:pPr>
+            <a:r>
+              <a:t>Ок. 1637 • Холст, масло</a:t>
+            </a:r>
+          </a:p>
+        </p:txBody>
+      </p:sp>
+      <p:sp>
+        <p:nvSpPr>
+          <p:cNvPr id="7" name="Rectangle 6"/>
+          <p:cNvSpPr/>
+          <p:nvPr/>
+        </p:nvSpPr>
+        <p:spPr>
+          <a:xfrm>
+            <a:off x="4389120" y="1783080"/>
+            <a:ext cx="1371600" cy="25400"/>
+          </a:xfrm>
+          <a:prstGeom prst="rect">
+            <a:avLst/>
+          </a:prstGeom>
+          <a:solidFill>
+            <a:srgbClr val="C99A2E"/>
+          </a:solidFill>
+          <a:ln>
+            <a:noFill/>
+          </a:ln>
+        </p:spPr>
+        <p:style>
+          <a:lnRef idx="1">
+            <a:schemeClr val="accent1"/>
+          </a:lnRef>
+          <a:fillRef idx="3">
+            <a:schemeClr val="accent1"/>
+          </a:fillRef>
+          <a:effectRef idx="2">
+            <a:schemeClr val="accent1"/>
+          </a:effectRef>
+          <a:fontRef idx="minor">
+            <a:schemeClr val="lt1"/>
+          </a:fontRef>
+        </p:style>
+        <p:txBody>
+          <a:bodyPr rtlCol="0" anchor="ctr"/>
+          <a:lstStyle/>
+          <a:p>
+            <a:pPr algn="ctr"/>
+          </a:p>
+        </p:txBody>
+      </p:sp>
+      <p:sp>
+        <p:nvSpPr>
+          <p:cNvPr id="8" name="TextBox 7"/>
+          <p:cNvSpPr txBox="1"/>
+          <p:nvPr/>
+        </p:nvSpPr>
+        <p:spPr>
+          <a:xfrm>
+            <a:off x="4389120" y="2011680"/>
+            <a:ext cx="4480560" cy="4389120"/>
+          </a:xfrm>
+          <a:prstGeom prst="rect">
+            <a:avLst/>
+          </a:prstGeom>
+          <a:noFill/>
+        </p:spPr>
+        <p:txBody>
+          <a:bodyPr wrap="square">
+            <a:spAutoFit/>
+          </a:bodyPr>
+          <a:lstStyle/>
+          <a:p>
+            <a:pPr>
+              <a:spcBef>
+                <a:spcPts val="1000"/>
+              </a:spcBef>
+              <a:defRPr sz="1200">
+                <a:solidFill>
+                  <a:srgbClr val="E8E0D0"/>
+                </a:solidFill>
+                <a:latin typeface="Calibri"/>
+              </a:defRPr>
+            </a:pPr>
+            <a:r>
+              <a:t>Коллекция Спенсеров, Олторп, Англия</a:t>
+            </a:r>
+          </a:p>
+          <a:p>
+            <a:pPr>
+              <a:spcBef>
+                <a:spcPts val="1000"/>
+              </a:spcBef>
+              <a:defRPr sz="1200">
+                <a:solidFill>
+                  <a:srgbClr val="E8E0D0"/>
+                </a:solidFill>
+                <a:latin typeface="Calibri"/>
+              </a:defRPr>
+            </a:pPr>
+          </a:p>
+          <a:p>
+            <a:pPr>
+              <a:spcBef>
+                <a:spcPts val="1000"/>
+              </a:spcBef>
+              <a:defRPr sz="1200">
+                <a:solidFill>
+                  <a:srgbClr val="E8E0D0"/>
+                </a:solidFill>
+                <a:latin typeface="Calibri"/>
+              </a:defRPr>
+            </a:pPr>
+            <a:r>
+              <a:t>Двойной парадный портрет молодых</a:t>
+            </a:r>
+          </a:p>
+          <a:p>
+            <a:pPr>
+              <a:spcBef>
+                <a:spcPts val="1000"/>
+              </a:spcBef>
+              <a:defRPr sz="1200">
+                <a:solidFill>
+                  <a:srgbClr val="E8E0D0"/>
+                </a:solidFill>
+                <a:latin typeface="Calibri"/>
+              </a:defRPr>
+            </a:pPr>
+            <a:r>
+              <a:t>английских аристократов:</a:t>
+            </a:r>
+          </a:p>
+          <a:p>
+            <a:pPr>
+              <a:spcBef>
+                <a:spcPts val="1000"/>
+              </a:spcBef>
+              <a:defRPr sz="1200">
+                <a:solidFill>
+                  <a:srgbClr val="E8E0D0"/>
+                </a:solidFill>
+                <a:latin typeface="Calibri"/>
+              </a:defRPr>
+            </a:pPr>
+          </a:p>
+          <a:p>
+            <a:pPr>
+              <a:spcBef>
+                <a:spcPts val="1000"/>
+              </a:spcBef>
+              <a:defRPr sz="1200">
+                <a:solidFill>
+                  <a:srgbClr val="E8E0D0"/>
+                </a:solidFill>
+                <a:latin typeface="Calibri"/>
+              </a:defRPr>
+            </a:pPr>
+            <a:r>
+              <a:t>Джордж Дигби (1612–1677) — 2-й граф</a:t>
+            </a:r>
+          </a:p>
+          <a:p>
+            <a:pPr>
+              <a:spcBef>
+                <a:spcPts val="1000"/>
+              </a:spcBef>
+              <a:defRPr sz="1200">
+                <a:solidFill>
+                  <a:srgbClr val="E8E0D0"/>
+                </a:solidFill>
+                <a:latin typeface="Calibri"/>
+              </a:defRPr>
+            </a:pPr>
+            <a:r>
+              <a:t>Бристоль, политик, поэт, драматург.</a:t>
+            </a:r>
+          </a:p>
+          <a:p>
+            <a:pPr>
+              <a:spcBef>
+                <a:spcPts val="1000"/>
+              </a:spcBef>
+              <a:defRPr sz="1200">
+                <a:solidFill>
+                  <a:srgbClr val="E8E0D0"/>
+                </a:solidFill>
+                <a:latin typeface="Calibri"/>
+              </a:defRPr>
+            </a:pPr>
+          </a:p>
+          <a:p>
+            <a:pPr>
+              <a:spcBef>
+                <a:spcPts val="1000"/>
+              </a:spcBef>
+              <a:defRPr sz="1200">
+                <a:solidFill>
+                  <a:srgbClr val="E8E0D0"/>
+                </a:solidFill>
+                <a:latin typeface="Calibri"/>
+              </a:defRPr>
+            </a:pPr>
+            <a:r>
+              <a:t>Уильям Рассел (1616–1700) — будущий</a:t>
+            </a:r>
+          </a:p>
+          <a:p>
+            <a:pPr>
+              <a:spcBef>
+                <a:spcPts val="1000"/>
+              </a:spcBef>
+              <a:defRPr sz="1200">
+                <a:solidFill>
+                  <a:srgbClr val="E8E0D0"/>
+                </a:solidFill>
+                <a:latin typeface="Calibri"/>
+              </a:defRPr>
+            </a:pPr>
+            <a:r>
+              <a:t>1-й герцог Бедфорд.</a:t>
+            </a:r>
+          </a:p>
+          <a:p>
+            <a:pPr>
+              <a:spcBef>
+                <a:spcPts val="1000"/>
+              </a:spcBef>
+              <a:defRPr sz="1200">
+                <a:solidFill>
+                  <a:srgbClr val="E8E0D0"/>
+                </a:solidFill>
+                <a:latin typeface="Calibri"/>
+              </a:defRPr>
+            </a:pPr>
+          </a:p>
+          <a:p>
+            <a:pPr>
+              <a:spcBef>
+                <a:spcPts val="1000"/>
+              </a:spcBef>
+              <a:defRPr sz="1200">
+                <a:solidFill>
+                  <a:srgbClr val="E8E0D0"/>
+                </a:solidFill>
+                <a:latin typeface="Calibri"/>
+              </a:defRPr>
+            </a:pPr>
+            <a:r>
+              <a:t>Элегантная непринуждённость поз —</a:t>
+            </a:r>
+          </a:p>
+          <a:p>
+            <a:pPr>
+              <a:spcBef>
+                <a:spcPts val="1000"/>
+              </a:spcBef>
+              <a:defRPr sz="1200">
+                <a:solidFill>
+                  <a:srgbClr val="E8E0D0"/>
+                </a:solidFill>
+                <a:latin typeface="Calibri"/>
+              </a:defRPr>
+            </a:pPr>
+            <a:r>
+              <a:t>типичный «friendship portrait», жанр,</a:t>
+            </a:r>
+          </a:p>
+          <a:p>
+            <a:pPr>
+              <a:spcBef>
+                <a:spcPts val="1000"/>
+              </a:spcBef>
+              <a:defRPr sz="1200">
+                <a:solidFill>
+                  <a:srgbClr val="E8E0D0"/>
+                </a:solidFill>
+                <a:latin typeface="Calibri"/>
+              </a:defRPr>
+            </a:pPr>
+            <a:r>
+              <a:t>в котором Ван Дейк непревзойдён.</a:t>
+            </a:r>
+          </a:p>
+        </p:txBody>
+      </p:sp>
+      <p:sp>
+        <p:nvSpPr>
+          <p:cNvPr id="9" name="TextBox 8"/>
+          <p:cNvSpPr txBox="1"/>
+          <p:nvPr/>
+        </p:nvSpPr>
+        <p:spPr>
+          <a:xfrm>
+            <a:off x="8503920" y="6446520"/>
+            <a:ext cx="457200" cy="274320"/>
+          </a:xfrm>
+          <a:prstGeom prst="rect">
+            <a:avLst/>
+          </a:prstGeom>
+          <a:noFill/>
+        </p:spPr>
+        <p:txBody>
+          <a:bodyPr wrap="square">
+            <a:spAutoFit/>
+          </a:bodyPr>
+          <a:lstStyle/>
+          <a:p>
             <a:pPr algn="r">
               <a:defRPr sz="900" b="0" i="0">
                 <a:solidFill>
-                  <a:srgbClr val="9A8A7A"/>
-                </a:solidFill>
-                <a:latin typeface="Palatino Linotype"/>
+                  <a:srgbClr val="8A7A6A"/>
+                </a:solidFill>
+                <a:latin typeface="Calibri"/>
               </a:defRPr>
             </a:pPr>
             <a:r>
@@ -3763,10 +4070,10 @@
         <a:gradFill rotWithShape="1">
           <a:gsLst>
             <a:gs pos="0">
-              <a:srgbClr val="0F071A"/>
+              <a:srgbClr val="080512"/>
             </a:gs>
             <a:gs pos="100000">
-              <a:srgbClr val="2D1B4E"/>
+              <a:srgbClr val="22153A"/>
             </a:gs>
           </a:gsLst>
           <a:lin scaled="0"/>
@@ -3789,8 +4096,8 @@
         </p:nvSpPr>
         <p:spPr>
           <a:xfrm>
-            <a:off x="6400800" y="3657600"/>
-            <a:ext cx="3657600" cy="3657600"/>
+            <a:off x="6583680" y="3840480"/>
+            <a:ext cx="3474720" cy="3474720"/>
           </a:xfrm>
           <a:prstGeom prst="ellipse">
             <a:avLst/>
@@ -3867,16 +4174,136 @@
           </a:p>
         </p:txBody>
       </p:sp>
-      <p:sp>
-        <p:nvSpPr>
-          <p:cNvPr id="4" name="TextBox 3"/>
+      <p:pic>
+        <p:nvPicPr>
+          <p:cNvPr id="4" name="Picture 3" descr="family_portrait.jpg"/>
+          <p:cNvPicPr>
+            <a:picLocks noChangeAspect="1"/>
+          </p:cNvPicPr>
+          <p:nvPr/>
+        </p:nvPicPr>
+        <p:blipFill>
+          <a:blip r:embed="rId2"/>
+          <a:stretch>
+            <a:fillRect/>
+          </a:stretch>
+        </p:blipFill>
+        <p:spPr>
+          <a:xfrm>
+            <a:off x="274320" y="4572000"/>
+            <a:ext cx="1504411" cy="1828800"/>
+          </a:xfrm>
+          <a:prstGeom prst="rect">
+            <a:avLst/>
+          </a:prstGeom>
+        </p:spPr>
+      </p:pic>
+      <p:pic>
+        <p:nvPicPr>
+          <p:cNvPr id="5" name="Picture 4" descr="st_martin.jpg"/>
+          <p:cNvPicPr>
+            <a:picLocks noChangeAspect="1"/>
+          </p:cNvPicPr>
+          <p:nvPr/>
+        </p:nvPicPr>
+        <p:blipFill>
+          <a:blip r:embed="rId3"/>
+          <a:stretch>
+            <a:fillRect/>
+          </a:stretch>
+        </p:blipFill>
+        <p:spPr>
+          <a:xfrm>
+            <a:off x="2057400" y="4572000"/>
+            <a:ext cx="1452149" cy="1828800"/>
+          </a:xfrm>
+          <a:prstGeom prst="rect">
+            <a:avLst/>
+          </a:prstGeom>
+        </p:spPr>
+      </p:pic>
+      <p:pic>
+        <p:nvPicPr>
+          <p:cNvPr id="6" name="Picture 5" descr="bentivoglio.jpg"/>
+          <p:cNvPicPr>
+            <a:picLocks noChangeAspect="1"/>
+          </p:cNvPicPr>
+          <p:nvPr/>
+        </p:nvPicPr>
+        <p:blipFill>
+          <a:blip r:embed="rId4"/>
+          <a:stretch>
+            <a:fillRect/>
+          </a:stretch>
+        </p:blipFill>
+        <p:spPr>
+          <a:xfrm>
+            <a:off x="3840480" y="4572000"/>
+            <a:ext cx="1654711" cy="1828800"/>
+          </a:xfrm>
+          <a:prstGeom prst="rect">
+            <a:avLst/>
+          </a:prstGeom>
+        </p:spPr>
+      </p:pic>
+      <p:pic>
+        <p:nvPicPr>
+          <p:cNvPr id="7" name="Picture 6" descr="charles_hunt.jpg"/>
+          <p:cNvPicPr>
+            <a:picLocks noChangeAspect="1"/>
+          </p:cNvPicPr>
+          <p:nvPr/>
+        </p:nvPicPr>
+        <p:blipFill>
+          <a:blip r:embed="rId5"/>
+          <a:stretch>
+            <a:fillRect/>
+          </a:stretch>
+        </p:blipFill>
+        <p:spPr>
+          <a:xfrm>
+            <a:off x="5623559" y="4572000"/>
+            <a:ext cx="1425039" cy="1828800"/>
+          </a:xfrm>
+          <a:prstGeom prst="rect">
+            <a:avLst/>
+          </a:prstGeom>
+        </p:spPr>
+      </p:pic>
+      <p:pic>
+        <p:nvPicPr>
+          <p:cNvPr id="8" name="Picture 7" descr="maria_de_tassis.jpg"/>
+          <p:cNvPicPr>
+            <a:picLocks noChangeAspect="1"/>
+          </p:cNvPicPr>
+          <p:nvPr/>
+        </p:nvPicPr>
+        <p:blipFill>
+          <a:blip r:embed="rId6"/>
+          <a:stretch>
+            <a:fillRect/>
+          </a:stretch>
+        </p:blipFill>
+        <p:spPr>
+          <a:xfrm>
+            <a:off x="7406640" y="4572000"/>
+            <a:ext cx="1300480" cy="1828800"/>
+          </a:xfrm>
+          <a:prstGeom prst="rect">
+            <a:avLst/>
+          </a:prstGeom>
+        </p:spPr>
+      </p:pic>
+      <p:sp>
+        <p:nvSpPr>
+          <p:cNvPr id="9" name="TextBox 8"/>
           <p:cNvSpPr txBox="1"/>
           <p:nvPr/>
         </p:nvSpPr>
         <p:spPr>
           <a:xfrm>
-            <a:off x="1097280" y="2286000"/>
-            <a:ext cx="6400800" cy="1371600"/>
+            <a:off x="914400" y="1371600"/>
+            <a:ext cx="7315200" cy="1371600"/>
           </a:xfrm>
           <a:prstGeom prst="rect">
             <a:avLst/>
@@ -3890,7 +4317,7 @@
           <a:lstStyle/>
           <a:p>
             <a:pPr algn="l">
-              <a:defRPr sz="3400" b="1" i="0">
+              <a:defRPr sz="3600" b="1" i="0">
                 <a:solidFill>
                   <a:srgbClr val="FFFFFF"/>
                 </a:solidFill>
@@ -3905,14 +4332,57 @@
       </p:sp>
       <p:sp>
         <p:nvSpPr>
-          <p:cNvPr id="5" name="TextBox 4"/>
+          <p:cNvPr id="10" name="Rectangle 9"/>
+          <p:cNvSpPr/>
+          <p:nvPr/>
+        </p:nvSpPr>
+        <p:spPr>
+          <a:xfrm>
+            <a:off x="914400" y="2743200"/>
+            <a:ext cx="2286000" cy="38100"/>
+          </a:xfrm>
+          <a:prstGeom prst="rect">
+            <a:avLst/>
+          </a:prstGeom>
+          <a:solidFill>
+            <a:srgbClr val="C99A2E"/>
+          </a:solidFill>
+          <a:ln>
+            <a:noFill/>
+          </a:ln>
+        </p:spPr>
+        <p:style>
+          <a:lnRef idx="1">
+            <a:schemeClr val="accent1"/>
+          </a:lnRef>
+          <a:fillRef idx="3">
+            <a:schemeClr val="accent1"/>
+          </a:fillRef>
+          <a:effectRef idx="2">
+            <a:schemeClr val="accent1"/>
+          </a:effectRef>
+          <a:fontRef idx="minor">
+            <a:schemeClr val="lt1"/>
+          </a:fontRef>
+        </p:style>
+        <p:txBody>
+          <a:bodyPr rtlCol="0" anchor="ctr"/>
+          <a:lstStyle/>
+          <a:p>
+            <a:pPr algn="ctr"/>
+          </a:p>
+        </p:txBody>
+      </p:sp>
+      <p:sp>
+        <p:nvSpPr>
+          <p:cNvPr id="11" name="TextBox 10"/>
           <p:cNvSpPr txBox="1"/>
           <p:nvPr/>
         </p:nvSpPr>
         <p:spPr>
           <a:xfrm>
-            <a:off x="1097280" y="3840480"/>
-            <a:ext cx="5486400" cy="731520"/>
+            <a:off x="914400" y="3017520"/>
+            <a:ext cx="5486400" cy="548640"/>
           </a:xfrm>
           <a:prstGeom prst="rect">
             <a:avLst/>
@@ -3930,7 +4400,7 @@
                 <a:solidFill>
                   <a:srgbClr val="E8C56D"/>
                 </a:solidFill>
-                <a:latin typeface="Palatino Linotype"/>
+                <a:latin typeface="Calibri"/>
               </a:defRPr>
             </a:pPr>
             <a:r>
@@ -3941,14 +4411,14 @@
       </p:sp>
       <p:sp>
         <p:nvSpPr>
-          <p:cNvPr id="6" name="TextBox 5"/>
+          <p:cNvPr id="12" name="TextBox 11"/>
           <p:cNvSpPr txBox="1"/>
           <p:nvPr/>
         </p:nvSpPr>
         <p:spPr>
           <a:xfrm>
-            <a:off x="1097280" y="5303520"/>
-            <a:ext cx="5486400" cy="731520"/>
+            <a:off x="914400" y="3840480"/>
+            <a:ext cx="5486400" cy="457200"/>
           </a:xfrm>
           <a:prstGeom prst="rect">
             <a:avLst/>
@@ -3964,9 +4434,9 @@
             <a:pPr algn="l">
               <a:defRPr sz="1100" b="0" i="0">
                 <a:solidFill>
-                  <a:srgbClr val="9A8A7A"/>
-                </a:solidFill>
-                <a:latin typeface="Palatino Linotype"/>
+                  <a:srgbClr val="8A7A6A"/>
+                </a:solidFill>
+                <a:latin typeface="Calibri"/>
               </a:defRPr>
             </a:pPr>
             <a:r>
@@ -3989,7 +4459,7 @@
     <p:bg>
       <p:bgPr>
         <a:solidFill>
-          <a:srgbClr val="1A0A2E"/>
+          <a:srgbClr val="120B1E"/>
         </a:solidFill>
         <a:effectLst/>
       </p:bgPr>
@@ -4003,50 +4473,14 @@
       <p:grpSpPr/>
       <p:sp>
         <p:nvSpPr>
-          <p:cNvPr id="2" name="TextBox 1"/>
-          <p:cNvSpPr txBox="1"/>
-          <p:nvPr/>
-        </p:nvSpPr>
-        <p:spPr>
-          <a:xfrm>
-            <a:off x="731520" y="274320"/>
-            <a:ext cx="7680960" cy="822960"/>
-          </a:xfrm>
-          <a:prstGeom prst="rect">
-            <a:avLst/>
-          </a:prstGeom>
-          <a:noFill/>
-        </p:spPr>
-        <p:txBody>
-          <a:bodyPr wrap="square">
-            <a:spAutoFit/>
-          </a:bodyPr>
-          <a:lstStyle/>
-          <a:p>
-            <a:pPr algn="l">
-              <a:defRPr sz="2600" b="1" i="0">
-                <a:solidFill>
-                  <a:srgbClr val="FFFFFF"/>
-                </a:solidFill>
-                <a:latin typeface="Georgia"/>
-              </a:defRPr>
-            </a:pPr>
-            <a:r>
-              <a:t>Антонис Ван Дейк (1599–1641)</a:t>
-            </a:r>
-          </a:p>
-        </p:txBody>
-      </p:sp>
-      <p:sp>
-        <p:nvSpPr>
-          <p:cNvPr id="3" name="Rectangle 2"/>
+          <p:cNvPr id="2" name="Rectangle 1"/>
           <p:cNvSpPr/>
           <p:nvPr/>
         </p:nvSpPr>
         <p:spPr>
           <a:xfrm>
-            <a:off x="731520" y="1005840"/>
-            <a:ext cx="1828800" cy="38100"/>
+            <a:off x="0" y="0"/>
+            <a:ext cx="9144000" cy="38100"/>
           </a:xfrm>
           <a:prstGeom prst="rect">
             <a:avLst/>
@@ -4082,14 +4516,81 @@
       </p:sp>
       <p:sp>
         <p:nvSpPr>
-          <p:cNvPr id="4" name="TextBox 3"/>
+          <p:cNvPr id="3" name="Rectangle 2"/>
+          <p:cNvSpPr/>
+          <p:nvPr/>
+        </p:nvSpPr>
+        <p:spPr>
+          <a:xfrm>
+            <a:off x="274320" y="731520"/>
+            <a:ext cx="2926080" cy="5669280"/>
+          </a:xfrm>
+          <a:prstGeom prst="rect">
+            <a:avLst/>
+          </a:prstGeom>
+          <a:solidFill>
+            <a:srgbClr val="1E1435"/>
+          </a:solidFill>
+          <a:ln>
+            <a:noFill/>
+          </a:ln>
+        </p:spPr>
+        <p:style>
+          <a:lnRef idx="1">
+            <a:schemeClr val="accent1"/>
+          </a:lnRef>
+          <a:fillRef idx="3">
+            <a:schemeClr val="accent1"/>
+          </a:fillRef>
+          <a:effectRef idx="2">
+            <a:schemeClr val="accent1"/>
+          </a:effectRef>
+          <a:fontRef idx="minor">
+            <a:schemeClr val="lt1"/>
+          </a:fontRef>
+        </p:style>
+        <p:txBody>
+          <a:bodyPr rtlCol="0" anchor="ctr"/>
+          <a:lstStyle/>
+          <a:p>
+            <a:pPr algn="ctr"/>
+          </a:p>
+        </p:txBody>
+      </p:sp>
+      <p:pic>
+        <p:nvPicPr>
+          <p:cNvPr id="4" name="Picture 3" descr="self_portrait.jpg"/>
+          <p:cNvPicPr>
+            <a:picLocks noChangeAspect="1"/>
+          </p:cNvPicPr>
+          <p:nvPr/>
+        </p:nvPicPr>
+        <p:blipFill>
+          <a:blip r:embed="rId2"/>
+          <a:stretch>
+            <a:fillRect/>
+          </a:stretch>
+        </p:blipFill>
+        <p:spPr>
+          <a:xfrm>
+            <a:off x="411480" y="868680"/>
+            <a:ext cx="3619260" cy="5394960"/>
+          </a:xfrm>
+          <a:prstGeom prst="rect">
+            <a:avLst/>
+          </a:prstGeom>
+        </p:spPr>
+      </p:pic>
+      <p:sp>
+        <p:nvSpPr>
+          <p:cNvPr id="5" name="TextBox 4"/>
           <p:cNvSpPr txBox="1"/>
           <p:nvPr/>
         </p:nvSpPr>
         <p:spPr>
           <a:xfrm>
-            <a:off x="731520" y="1371600"/>
-            <a:ext cx="7680960" cy="5029200"/>
+            <a:off x="3474720" y="457200"/>
+            <a:ext cx="5303520" cy="731520"/>
           </a:xfrm>
           <a:prstGeom prst="rect">
             <a:avLst/>
@@ -4102,129 +4603,30 @@
           </a:bodyPr>
           <a:lstStyle/>
           <a:p>
-            <a:pPr>
-              <a:spcBef>
-                <a:spcPts val="1400"/>
-              </a:spcBef>
-              <a:defRPr sz="1500">
-                <a:solidFill>
-                  <a:srgbClr val="E8E0D0"/>
-                </a:solidFill>
-                <a:latin typeface="Palatino Linotype"/>
-              </a:defRPr>
-            </a:pPr>
-            <a:r>
-              <a:t>• Фламандский живописец эпохи барокко, ученик Питера Пауля Рубенса</a:t>
-            </a:r>
-          </a:p>
-          <a:p>
-            <a:pPr>
-              <a:spcBef>
-                <a:spcPts val="1400"/>
-              </a:spcBef>
-              <a:defRPr sz="1500">
-                <a:solidFill>
-                  <a:srgbClr val="E8E0D0"/>
-                </a:solidFill>
-                <a:latin typeface="Palatino Linotype"/>
-              </a:defRPr>
-            </a:pPr>
-            <a:r>
-              <a:t>• Родился 22 марта 1599 г. в Антверпене, умер 9 декабря 1641 г. в Лондоне</a:t>
-            </a:r>
-          </a:p>
-          <a:p>
-            <a:pPr>
-              <a:spcBef>
-                <a:spcPts val="1400"/>
-              </a:spcBef>
-              <a:defRPr sz="1500">
-                <a:solidFill>
-                  <a:srgbClr val="E8E0D0"/>
-                </a:solidFill>
-                <a:latin typeface="Palatino Linotype"/>
-              </a:defRPr>
-            </a:pPr>
-            <a:r>
-              <a:t>• Придворный художник английского короля Карла I с 1632 года</a:t>
-            </a:r>
-          </a:p>
-          <a:p>
-            <a:pPr>
-              <a:spcBef>
-                <a:spcPts val="1400"/>
-              </a:spcBef>
-              <a:defRPr sz="1500">
-                <a:solidFill>
-                  <a:srgbClr val="E8E0D0"/>
-                </a:solidFill>
-                <a:latin typeface="Palatino Linotype"/>
-              </a:defRPr>
-            </a:pPr>
-            <a:r>
-              <a:t>• Крупнейший мастер парадного аристократического портрета XVII века</a:t>
-            </a:r>
-          </a:p>
-          <a:p>
-            <a:pPr>
-              <a:spcBef>
-                <a:spcPts val="1400"/>
-              </a:spcBef>
-              <a:defRPr sz="1500">
-                <a:solidFill>
-                  <a:srgbClr val="E8E0D0"/>
-                </a:solidFill>
-                <a:latin typeface="Palatino Linotype"/>
-              </a:defRPr>
-            </a:pPr>
-            <a:r>
-              <a:t>• Работал в Антверпене, Генуе, Риме, Палермо и Лондоне</a:t>
-            </a:r>
-          </a:p>
-          <a:p>
-            <a:pPr>
-              <a:spcBef>
-                <a:spcPts val="1400"/>
-              </a:spcBef>
-              <a:defRPr sz="1500">
-                <a:solidFill>
-                  <a:srgbClr val="E8E0D0"/>
-                </a:solidFill>
-                <a:latin typeface="Palatino Linotype"/>
-              </a:defRPr>
-            </a:pPr>
-            <a:r>
-              <a:t>• Оказал огромное влияние на английскую портретную живопись на 150 лет вперёд</a:t>
-            </a:r>
-          </a:p>
-          <a:p>
-            <a:pPr>
-              <a:spcBef>
-                <a:spcPts val="1400"/>
-              </a:spcBef>
-              <a:defRPr sz="1500">
-                <a:solidFill>
-                  <a:srgbClr val="E8E0D0"/>
-                </a:solidFill>
-                <a:latin typeface="Palatino Linotype"/>
-              </a:defRPr>
-            </a:pPr>
-            <a:r>
-              <a:t>• Создал более 900 картин за свою короткую жизнь (42 года)</a:t>
-            </a:r>
-          </a:p>
-        </p:txBody>
-      </p:sp>
-      <p:sp>
-        <p:nvSpPr>
-          <p:cNvPr id="5" name="TextBox 4"/>
+            <a:pPr algn="l">
+              <a:defRPr sz="2600" b="1" i="0">
+                <a:solidFill>
+                  <a:srgbClr val="FFFFFF"/>
+                </a:solidFill>
+                <a:latin typeface="Georgia"/>
+              </a:defRPr>
+            </a:pPr>
+            <a:r>
+              <a:t>Антонис Ван Дейк</a:t>
+            </a:r>
+          </a:p>
+        </p:txBody>
+      </p:sp>
+      <p:sp>
+        <p:nvSpPr>
+          <p:cNvPr id="6" name="TextBox 5"/>
           <p:cNvSpPr txBox="1"/>
           <p:nvPr/>
         </p:nvSpPr>
         <p:spPr>
           <a:xfrm>
-            <a:off x="8412480" y="6400800"/>
-            <a:ext cx="548640" cy="365760"/>
+            <a:off x="3474720" y="1097280"/>
+            <a:ext cx="5303520" cy="365760"/>
           </a:xfrm>
           <a:prstGeom prst="rect">
             <a:avLst/>
@@ -4237,12 +4639,271 @@
           </a:bodyPr>
           <a:lstStyle/>
           <a:p>
+            <a:pPr algn="l">
+              <a:defRPr sz="1100" b="0" i="1">
+                <a:solidFill>
+                  <a:srgbClr val="E8C56D"/>
+                </a:solidFill>
+                <a:latin typeface="Calibri"/>
+              </a:defRPr>
+            </a:pPr>
+            <a:r>
+              <a:t>22 марта 1599, Антверпен — 9 декабря 1641, Лондон</a:t>
+            </a:r>
+          </a:p>
+        </p:txBody>
+      </p:sp>
+      <p:sp>
+        <p:nvSpPr>
+          <p:cNvPr id="7" name="Rectangle 6"/>
+          <p:cNvSpPr/>
+          <p:nvPr/>
+        </p:nvSpPr>
+        <p:spPr>
+          <a:xfrm>
+            <a:off x="3474720" y="1554480"/>
+            <a:ext cx="1371600" cy="25400"/>
+          </a:xfrm>
+          <a:prstGeom prst="rect">
+            <a:avLst/>
+          </a:prstGeom>
+          <a:solidFill>
+            <a:srgbClr val="C99A2E"/>
+          </a:solidFill>
+          <a:ln>
+            <a:noFill/>
+          </a:ln>
+        </p:spPr>
+        <p:style>
+          <a:lnRef idx="1">
+            <a:schemeClr val="accent1"/>
+          </a:lnRef>
+          <a:fillRef idx="3">
+            <a:schemeClr val="accent1"/>
+          </a:fillRef>
+          <a:effectRef idx="2">
+            <a:schemeClr val="accent1"/>
+          </a:effectRef>
+          <a:fontRef idx="minor">
+            <a:schemeClr val="lt1"/>
+          </a:fontRef>
+        </p:style>
+        <p:txBody>
+          <a:bodyPr rtlCol="0" anchor="ctr"/>
+          <a:lstStyle/>
+          <a:p>
+            <a:pPr algn="ctr"/>
+          </a:p>
+        </p:txBody>
+      </p:sp>
+      <p:sp>
+        <p:nvSpPr>
+          <p:cNvPr id="8" name="TextBox 7"/>
+          <p:cNvSpPr txBox="1"/>
+          <p:nvPr/>
+        </p:nvSpPr>
+        <p:spPr>
+          <a:xfrm>
+            <a:off x="3474720" y="1737360"/>
+            <a:ext cx="5303520" cy="4754880"/>
+          </a:xfrm>
+          <a:prstGeom prst="rect">
+            <a:avLst/>
+          </a:prstGeom>
+          <a:noFill/>
+        </p:spPr>
+        <p:txBody>
+          <a:bodyPr wrap="square">
+            <a:spAutoFit/>
+          </a:bodyPr>
+          <a:lstStyle/>
+          <a:p>
+            <a:pPr>
+              <a:spcBef>
+                <a:spcPts val="800"/>
+              </a:spcBef>
+              <a:defRPr sz="1300">
+                <a:solidFill>
+                  <a:srgbClr val="E8E0D0"/>
+                </a:solidFill>
+                <a:latin typeface="Calibri"/>
+              </a:defRPr>
+            </a:pPr>
+            <a:r>
+              <a:t>Фламандский живописец, один из величайших</a:t>
+            </a:r>
+          </a:p>
+          <a:p>
+            <a:pPr>
+              <a:spcBef>
+                <a:spcPts val="800"/>
+              </a:spcBef>
+              <a:defRPr sz="1300">
+                <a:solidFill>
+                  <a:srgbClr val="E8E0D0"/>
+                </a:solidFill>
+                <a:latin typeface="Calibri"/>
+              </a:defRPr>
+            </a:pPr>
+            <a:r>
+              <a:t>портретистов эпохи барокко</a:t>
+            </a:r>
+          </a:p>
+          <a:p>
+            <a:pPr>
+              <a:spcBef>
+                <a:spcPts val="800"/>
+              </a:spcBef>
+              <a:defRPr sz="1300">
+                <a:solidFill>
+                  <a:srgbClr val="E8E0D0"/>
+                </a:solidFill>
+                <a:latin typeface="Calibri"/>
+              </a:defRPr>
+            </a:pPr>
+          </a:p>
+          <a:p>
+            <a:pPr>
+              <a:spcBef>
+                <a:spcPts val="800"/>
+              </a:spcBef>
+              <a:defRPr sz="1300">
+                <a:solidFill>
+                  <a:srgbClr val="E8E0D0"/>
+                </a:solidFill>
+                <a:latin typeface="Calibri"/>
+              </a:defRPr>
+            </a:pPr>
+            <a:r>
+              <a:t>• Ученик и помощник Питера Пауля Рубенса</a:t>
+            </a:r>
+          </a:p>
+          <a:p>
+            <a:pPr>
+              <a:spcBef>
+                <a:spcPts val="800"/>
+              </a:spcBef>
+              <a:defRPr sz="1300">
+                <a:solidFill>
+                  <a:srgbClr val="E8E0D0"/>
+                </a:solidFill>
+                <a:latin typeface="Calibri"/>
+              </a:defRPr>
+            </a:pPr>
+            <a:r>
+              <a:t>• Итальянский период (1621–1627): Генуя, Рим</a:t>
+            </a:r>
+          </a:p>
+          <a:p>
+            <a:pPr>
+              <a:spcBef>
+                <a:spcPts val="800"/>
+              </a:spcBef>
+              <a:defRPr sz="1300">
+                <a:solidFill>
+                  <a:srgbClr val="E8E0D0"/>
+                </a:solidFill>
+                <a:latin typeface="Calibri"/>
+              </a:defRPr>
+            </a:pPr>
+            <a:r>
+              <a:t>• Придворный художник Карла I с 1632 года</a:t>
+            </a:r>
+          </a:p>
+          <a:p>
+            <a:pPr>
+              <a:spcBef>
+                <a:spcPts val="800"/>
+              </a:spcBef>
+              <a:defRPr sz="1300">
+                <a:solidFill>
+                  <a:srgbClr val="E8E0D0"/>
+                </a:solidFill>
+                <a:latin typeface="Calibri"/>
+              </a:defRPr>
+            </a:pPr>
+            <a:r>
+              <a:t>• Создал более 900 картин за 42 года жизни</a:t>
+            </a:r>
+          </a:p>
+          <a:p>
+            <a:pPr>
+              <a:spcBef>
+                <a:spcPts val="800"/>
+              </a:spcBef>
+              <a:defRPr sz="1300">
+                <a:solidFill>
+                  <a:srgbClr val="E8E0D0"/>
+                </a:solidFill>
+                <a:latin typeface="Calibri"/>
+              </a:defRPr>
+            </a:pPr>
+            <a:r>
+              <a:t>• Революционизировал жанр парадного портрета</a:t>
+            </a:r>
+          </a:p>
+          <a:p>
+            <a:pPr>
+              <a:spcBef>
+                <a:spcPts val="800"/>
+              </a:spcBef>
+              <a:defRPr sz="1300">
+                <a:solidFill>
+                  <a:srgbClr val="E8E0D0"/>
+                </a:solidFill>
+                <a:latin typeface="Calibri"/>
+              </a:defRPr>
+            </a:pPr>
+            <a:r>
+              <a:t>• Определил развитие английской портретной</a:t>
+            </a:r>
+          </a:p>
+          <a:p>
+            <a:pPr>
+              <a:spcBef>
+                <a:spcPts val="800"/>
+              </a:spcBef>
+              <a:defRPr sz="1300">
+                <a:solidFill>
+                  <a:srgbClr val="E8E0D0"/>
+                </a:solidFill>
+                <a:latin typeface="Calibri"/>
+              </a:defRPr>
+            </a:pPr>
+            <a:r>
+              <a:t>  живописи на 150 лет вперёд</a:t>
+            </a:r>
+          </a:p>
+        </p:txBody>
+      </p:sp>
+      <p:sp>
+        <p:nvSpPr>
+          <p:cNvPr id="9" name="TextBox 8"/>
+          <p:cNvSpPr txBox="1"/>
+          <p:nvPr/>
+        </p:nvSpPr>
+        <p:spPr>
+          <a:xfrm>
+            <a:off x="8503920" y="6446520"/>
+            <a:ext cx="457200" cy="274320"/>
+          </a:xfrm>
+          <a:prstGeom prst="rect">
+            <a:avLst/>
+          </a:prstGeom>
+          <a:noFill/>
+        </p:spPr>
+        <p:txBody>
+          <a:bodyPr wrap="square">
+            <a:spAutoFit/>
+          </a:bodyPr>
+          <a:lstStyle/>
+          <a:p>
             <a:pPr algn="r">
               <a:defRPr sz="900" b="0" i="0">
                 <a:solidFill>
-                  <a:srgbClr val="9A8A7A"/>
-                </a:solidFill>
-                <a:latin typeface="Palatino Linotype"/>
+                  <a:srgbClr val="8A7A6A"/>
+                </a:solidFill>
+                <a:latin typeface="Calibri"/>
               </a:defRPr>
             </a:pPr>
             <a:r>
@@ -4265,7 +4926,7 @@
     <p:bg>
       <p:bgPr>
         <a:solidFill>
-          <a:srgbClr val="1A0A2E"/>
+          <a:srgbClr val="120B1E"/>
         </a:solidFill>
         <a:effectLst/>
       </p:bgPr>
@@ -4279,50 +4940,14 @@
       <p:grpSpPr/>
       <p:sp>
         <p:nvSpPr>
-          <p:cNvPr id="2" name="TextBox 1"/>
-          <p:cNvSpPr txBox="1"/>
-          <p:nvPr/>
-        </p:nvSpPr>
-        <p:spPr>
-          <a:xfrm>
-            <a:off x="731520" y="274320"/>
-            <a:ext cx="7680960" cy="822960"/>
-          </a:xfrm>
-          <a:prstGeom prst="rect">
-            <a:avLst/>
-          </a:prstGeom>
-          <a:noFill/>
-        </p:spPr>
-        <p:txBody>
-          <a:bodyPr wrap="square">
-            <a:spAutoFit/>
-          </a:bodyPr>
-          <a:lstStyle/>
-          <a:p>
-            <a:pPr algn="l">
-              <a:defRPr sz="2400" b="1" i="0">
-                <a:solidFill>
-                  <a:srgbClr val="FFFFFF"/>
-                </a:solidFill>
-                <a:latin typeface="Georgia"/>
-              </a:defRPr>
-            </a:pPr>
-            <a:r>
-              <a:t>Семейный портрет (ок. 1620–1621)</a:t>
-            </a:r>
-          </a:p>
-        </p:txBody>
-      </p:sp>
-      <p:sp>
-        <p:nvSpPr>
-          <p:cNvPr id="3" name="Rectangle 2"/>
+          <p:cNvPr id="2" name="Rectangle 1"/>
           <p:cNvSpPr/>
           <p:nvPr/>
         </p:nvSpPr>
         <p:spPr>
           <a:xfrm>
-            <a:off x="731520" y="960120"/>
-            <a:ext cx="1828800" cy="38100"/>
+            <a:off x="0" y="0"/>
+            <a:ext cx="9144000" cy="38100"/>
           </a:xfrm>
           <a:prstGeom prst="rect">
             <a:avLst/>
@@ -4358,14 +4983,81 @@
       </p:sp>
       <p:sp>
         <p:nvSpPr>
-          <p:cNvPr id="4" name="TextBox 3"/>
+          <p:cNvPr id="3" name="Rectangle 2"/>
+          <p:cNvSpPr/>
+          <p:nvPr/>
+        </p:nvSpPr>
+        <p:spPr>
+          <a:xfrm>
+            <a:off x="274320" y="548640"/>
+            <a:ext cx="3840480" cy="5943600"/>
+          </a:xfrm>
+          <a:prstGeom prst="rect">
+            <a:avLst/>
+          </a:prstGeom>
+          <a:solidFill>
+            <a:srgbClr val="1E1435"/>
+          </a:solidFill>
+          <a:ln>
+            <a:noFill/>
+          </a:ln>
+        </p:spPr>
+        <p:style>
+          <a:lnRef idx="1">
+            <a:schemeClr val="accent1"/>
+          </a:lnRef>
+          <a:fillRef idx="3">
+            <a:schemeClr val="accent1"/>
+          </a:fillRef>
+          <a:effectRef idx="2">
+            <a:schemeClr val="accent1"/>
+          </a:effectRef>
+          <a:fontRef idx="minor">
+            <a:schemeClr val="lt1"/>
+          </a:fontRef>
+        </p:style>
+        <p:txBody>
+          <a:bodyPr rtlCol="0" anchor="ctr"/>
+          <a:lstStyle/>
+          <a:p>
+            <a:pPr algn="ctr"/>
+          </a:p>
+        </p:txBody>
+      </p:sp>
+      <p:pic>
+        <p:nvPicPr>
+          <p:cNvPr id="4" name="Picture 3" descr="family_portrait.jpg"/>
+          <p:cNvPicPr>
+            <a:picLocks noChangeAspect="1"/>
+          </p:cNvPicPr>
+          <p:nvPr/>
+        </p:nvPicPr>
+        <p:blipFill>
+          <a:blip r:embed="rId2"/>
+          <a:stretch>
+            <a:fillRect/>
+          </a:stretch>
+        </p:blipFill>
+        <p:spPr>
+          <a:xfrm>
+            <a:off x="457200" y="731520"/>
+            <a:ext cx="4588454" cy="5577840"/>
+          </a:xfrm>
+          <a:prstGeom prst="rect">
+            <a:avLst/>
+          </a:prstGeom>
+        </p:spPr>
+      </p:pic>
+      <p:sp>
+        <p:nvSpPr>
+          <p:cNvPr id="5" name="TextBox 4"/>
           <p:cNvSpPr txBox="1"/>
           <p:nvPr/>
         </p:nvSpPr>
         <p:spPr>
           <a:xfrm>
-            <a:off x="731520" y="1280160"/>
-            <a:ext cx="7680960" cy="5029200"/>
+            <a:off x="4389120" y="640080"/>
+            <a:ext cx="4480560" cy="822960"/>
           </a:xfrm>
           <a:prstGeom prst="rect">
             <a:avLst/>
@@ -4378,145 +5070,30 @@
           </a:bodyPr>
           <a:lstStyle/>
           <a:p>
-            <a:pPr>
-              <a:spcBef>
-                <a:spcPts val="1200"/>
-              </a:spcBef>
-              <a:defRPr sz="1400">
-                <a:solidFill>
-                  <a:srgbClr val="E8E0D0"/>
-                </a:solidFill>
-                <a:latin typeface="Palatino Linotype"/>
-              </a:defRPr>
-            </a:pPr>
-            <a:r>
-              <a:t>• Холст, масло. 113,5 × 93,5 см</a:t>
-            </a:r>
-          </a:p>
-          <a:p>
-            <a:pPr>
-              <a:spcBef>
-                <a:spcPts val="1200"/>
-              </a:spcBef>
-              <a:defRPr sz="1400">
-                <a:solidFill>
-                  <a:srgbClr val="E8E0D0"/>
-                </a:solidFill>
-                <a:latin typeface="Palatino Linotype"/>
-              </a:defRPr>
-            </a:pPr>
-            <a:r>
-              <a:t>• Хранится в Государственном Эрмитаже, Санкт-Петербург</a:t>
-            </a:r>
-          </a:p>
-          <a:p>
-            <a:pPr>
-              <a:spcBef>
-                <a:spcPts val="1200"/>
-              </a:spcBef>
-              <a:defRPr sz="1400">
-                <a:solidFill>
-                  <a:srgbClr val="E8E0D0"/>
-                </a:solidFill>
-                <a:latin typeface="Palatino Linotype"/>
-              </a:defRPr>
-            </a:pPr>
-            <a:r>
-              <a:t>• Изображена супружеская пара с дочерью на коленях у матери</a:t>
-            </a:r>
-          </a:p>
-          <a:p>
-            <a:pPr>
-              <a:spcBef>
-                <a:spcPts val="1200"/>
-              </a:spcBef>
-              <a:defRPr sz="1400">
-                <a:solidFill>
-                  <a:srgbClr val="E8E0D0"/>
-                </a:solidFill>
-                <a:latin typeface="Palatino Linotype"/>
-              </a:defRPr>
-            </a:pPr>
-            <a:r>
-              <a:t>• Компактная композиция создаёт атмосферу доверительной</a:t>
-            </a:r>
-          </a:p>
-          <a:p>
-            <a:pPr>
-              <a:spcBef>
-                <a:spcPts val="1200"/>
-              </a:spcBef>
-              <a:defRPr sz="1400">
-                <a:solidFill>
-                  <a:srgbClr val="E8E0D0"/>
-                </a:solidFill>
-                <a:latin typeface="Palatino Linotype"/>
-              </a:defRPr>
-            </a:pPr>
-            <a:r>
-              <a:t>  близости и согласия между членами семьи</a:t>
-            </a:r>
-          </a:p>
-          <a:p>
-            <a:pPr>
-              <a:spcBef>
-                <a:spcPts val="1200"/>
-              </a:spcBef>
-              <a:defRPr sz="1400">
-                <a:solidFill>
-                  <a:srgbClr val="E8E0D0"/>
-                </a:solidFill>
-                <a:latin typeface="Palatino Linotype"/>
-              </a:defRPr>
-            </a:pPr>
-            <a:r>
-              <a:t>• Написана в ранний период творчества — Ван Дейку было ~21 год</a:t>
-            </a:r>
-          </a:p>
-          <a:p>
-            <a:pPr>
-              <a:spcBef>
-                <a:spcPts val="1200"/>
-              </a:spcBef>
-              <a:defRPr sz="1400">
-                <a:solidFill>
-                  <a:srgbClr val="E8E0D0"/>
-                </a:solidFill>
-                <a:latin typeface="Palatino Linotype"/>
-              </a:defRPr>
-            </a:pPr>
-            <a:r>
-              <a:t>• Демонстрирует влияние Рубенса в колористике и свободе мазка</a:t>
-            </a:r>
-          </a:p>
-          <a:p>
-            <a:pPr>
-              <a:spcBef>
-                <a:spcPts val="1200"/>
-              </a:spcBef>
-              <a:defRPr sz="1400">
-                <a:solidFill>
-                  <a:srgbClr val="E8E0D0"/>
-                </a:solidFill>
-                <a:latin typeface="Palatino Linotype"/>
-              </a:defRPr>
-            </a:pPr>
-            <a:r>
-              <a:t>• Одна из самых проникновенных работ молодого мастера</a:t>
-            </a:r>
-          </a:p>
-        </p:txBody>
-      </p:sp>
-      <p:sp>
-        <p:nvSpPr>
-          <p:cNvPr id="5" name="TextBox 4"/>
+            <a:pPr algn="l">
+              <a:defRPr sz="2000" b="1" i="0">
+                <a:solidFill>
+                  <a:srgbClr val="FFFFFF"/>
+                </a:solidFill>
+                <a:latin typeface="Georgia"/>
+              </a:defRPr>
+            </a:pPr>
+            <a:r>
+              <a:t>Семейный портрет</a:t>
+            </a:r>
+          </a:p>
+        </p:txBody>
+      </p:sp>
+      <p:sp>
+        <p:nvSpPr>
+          <p:cNvPr id="6" name="TextBox 5"/>
           <p:cNvSpPr txBox="1"/>
           <p:nvPr/>
         </p:nvSpPr>
         <p:spPr>
           <a:xfrm>
-            <a:off x="8412480" y="6400800"/>
-            <a:ext cx="548640" cy="365760"/>
+            <a:off x="4389120" y="1371600"/>
+            <a:ext cx="4480560" cy="365760"/>
           </a:xfrm>
           <a:prstGeom prst="rect">
             <a:avLst/>
@@ -4529,12 +5106,297 @@
           </a:bodyPr>
           <a:lstStyle/>
           <a:p>
+            <a:pPr algn="l">
+              <a:defRPr sz="1300" b="0" i="1">
+                <a:solidFill>
+                  <a:srgbClr val="E8C56D"/>
+                </a:solidFill>
+                <a:latin typeface="Calibri"/>
+              </a:defRPr>
+            </a:pPr>
+            <a:r>
+              <a:t>Ок. 1620–1621 • Холст, масло • 113,5 × 93,5 см</a:t>
+            </a:r>
+          </a:p>
+        </p:txBody>
+      </p:sp>
+      <p:sp>
+        <p:nvSpPr>
+          <p:cNvPr id="7" name="Rectangle 6"/>
+          <p:cNvSpPr/>
+          <p:nvPr/>
+        </p:nvSpPr>
+        <p:spPr>
+          <a:xfrm>
+            <a:off x="4389120" y="1783080"/>
+            <a:ext cx="1371600" cy="25400"/>
+          </a:xfrm>
+          <a:prstGeom prst="rect">
+            <a:avLst/>
+          </a:prstGeom>
+          <a:solidFill>
+            <a:srgbClr val="C99A2E"/>
+          </a:solidFill>
+          <a:ln>
+            <a:noFill/>
+          </a:ln>
+        </p:spPr>
+        <p:style>
+          <a:lnRef idx="1">
+            <a:schemeClr val="accent1"/>
+          </a:lnRef>
+          <a:fillRef idx="3">
+            <a:schemeClr val="accent1"/>
+          </a:fillRef>
+          <a:effectRef idx="2">
+            <a:schemeClr val="accent1"/>
+          </a:effectRef>
+          <a:fontRef idx="minor">
+            <a:schemeClr val="lt1"/>
+          </a:fontRef>
+        </p:style>
+        <p:txBody>
+          <a:bodyPr rtlCol="0" anchor="ctr"/>
+          <a:lstStyle/>
+          <a:p>
+            <a:pPr algn="ctr"/>
+          </a:p>
+        </p:txBody>
+      </p:sp>
+      <p:sp>
+        <p:nvSpPr>
+          <p:cNvPr id="8" name="TextBox 7"/>
+          <p:cNvSpPr txBox="1"/>
+          <p:nvPr/>
+        </p:nvSpPr>
+        <p:spPr>
+          <a:xfrm>
+            <a:off x="4389120" y="2011680"/>
+            <a:ext cx="4480560" cy="4389120"/>
+          </a:xfrm>
+          <a:prstGeom prst="rect">
+            <a:avLst/>
+          </a:prstGeom>
+          <a:noFill/>
+        </p:spPr>
+        <p:txBody>
+          <a:bodyPr wrap="square">
+            <a:spAutoFit/>
+          </a:bodyPr>
+          <a:lstStyle/>
+          <a:p>
+            <a:pPr>
+              <a:spcBef>
+                <a:spcPts val="1000"/>
+              </a:spcBef>
+              <a:defRPr sz="1200">
+                <a:solidFill>
+                  <a:srgbClr val="E8E0D0"/>
+                </a:solidFill>
+                <a:latin typeface="Calibri"/>
+              </a:defRPr>
+            </a:pPr>
+            <a:r>
+              <a:t>Государственный Эрмитаж, Санкт-Петербург</a:t>
+            </a:r>
+          </a:p>
+          <a:p>
+            <a:pPr>
+              <a:spcBef>
+                <a:spcPts val="1000"/>
+              </a:spcBef>
+              <a:defRPr sz="1200">
+                <a:solidFill>
+                  <a:srgbClr val="E8E0D0"/>
+                </a:solidFill>
+                <a:latin typeface="Calibri"/>
+              </a:defRPr>
+            </a:pPr>
+          </a:p>
+          <a:p>
+            <a:pPr>
+              <a:spcBef>
+                <a:spcPts val="1000"/>
+              </a:spcBef>
+              <a:defRPr sz="1200">
+                <a:solidFill>
+                  <a:srgbClr val="E8E0D0"/>
+                </a:solidFill>
+                <a:latin typeface="Calibri"/>
+              </a:defRPr>
+            </a:pPr>
+            <a:r>
+              <a:t>Одна из самых проникновенных работ раннего</a:t>
+            </a:r>
+          </a:p>
+          <a:p>
+            <a:pPr>
+              <a:spcBef>
+                <a:spcPts val="1000"/>
+              </a:spcBef>
+              <a:defRPr sz="1200">
+                <a:solidFill>
+                  <a:srgbClr val="E8E0D0"/>
+                </a:solidFill>
+                <a:latin typeface="Calibri"/>
+              </a:defRPr>
+            </a:pPr>
+            <a:r>
+              <a:t>периода. Изображена супружеская пара с</a:t>
+            </a:r>
+          </a:p>
+          <a:p>
+            <a:pPr>
+              <a:spcBef>
+                <a:spcPts val="1000"/>
+              </a:spcBef>
+              <a:defRPr sz="1200">
+                <a:solidFill>
+                  <a:srgbClr val="E8E0D0"/>
+                </a:solidFill>
+                <a:latin typeface="Calibri"/>
+              </a:defRPr>
+            </a:pPr>
+            <a:r>
+              <a:t>дочерью на коленях у матери.</a:t>
+            </a:r>
+          </a:p>
+          <a:p>
+            <a:pPr>
+              <a:spcBef>
+                <a:spcPts val="1000"/>
+              </a:spcBef>
+              <a:defRPr sz="1200">
+                <a:solidFill>
+                  <a:srgbClr val="E8E0D0"/>
+                </a:solidFill>
+                <a:latin typeface="Calibri"/>
+              </a:defRPr>
+            </a:pPr>
+          </a:p>
+          <a:p>
+            <a:pPr>
+              <a:spcBef>
+                <a:spcPts val="1000"/>
+              </a:spcBef>
+              <a:defRPr sz="1200">
+                <a:solidFill>
+                  <a:srgbClr val="E8E0D0"/>
+                </a:solidFill>
+                <a:latin typeface="Calibri"/>
+              </a:defRPr>
+            </a:pPr>
+            <a:r>
+              <a:t>Компактная композиция создаёт атмосферу</a:t>
+            </a:r>
+          </a:p>
+          <a:p>
+            <a:pPr>
+              <a:spcBef>
+                <a:spcPts val="1000"/>
+              </a:spcBef>
+              <a:defRPr sz="1200">
+                <a:solidFill>
+                  <a:srgbClr val="E8E0D0"/>
+                </a:solidFill>
+                <a:latin typeface="Calibri"/>
+              </a:defRPr>
+            </a:pPr>
+            <a:r>
+              <a:t>доверительной близости и семейного согласия.</a:t>
+            </a:r>
+          </a:p>
+          <a:p>
+            <a:pPr>
+              <a:spcBef>
+                <a:spcPts val="1000"/>
+              </a:spcBef>
+              <a:defRPr sz="1200">
+                <a:solidFill>
+                  <a:srgbClr val="E8E0D0"/>
+                </a:solidFill>
+                <a:latin typeface="Calibri"/>
+              </a:defRPr>
+            </a:pPr>
+          </a:p>
+          <a:p>
+            <a:pPr>
+              <a:spcBef>
+                <a:spcPts val="1000"/>
+              </a:spcBef>
+              <a:defRPr sz="1200">
+                <a:solidFill>
+                  <a:srgbClr val="E8E0D0"/>
+                </a:solidFill>
+                <a:latin typeface="Calibri"/>
+              </a:defRPr>
+            </a:pPr>
+            <a:r>
+              <a:t>Ван Дейку было всего 21 год — но уже видно</a:t>
+            </a:r>
+          </a:p>
+          <a:p>
+            <a:pPr>
+              <a:spcBef>
+                <a:spcPts val="1000"/>
+              </a:spcBef>
+              <a:defRPr sz="1200">
+                <a:solidFill>
+                  <a:srgbClr val="E8E0D0"/>
+                </a:solidFill>
+                <a:latin typeface="Calibri"/>
+              </a:defRPr>
+            </a:pPr>
+            <a:r>
+              <a:t>влияние Рубенса в колористике и свободной,</a:t>
+            </a:r>
+          </a:p>
+          <a:p>
+            <a:pPr>
+              <a:spcBef>
+                <a:spcPts val="1000"/>
+              </a:spcBef>
+              <a:defRPr sz="1200">
+                <a:solidFill>
+                  <a:srgbClr val="E8E0D0"/>
+                </a:solidFill>
+                <a:latin typeface="Calibri"/>
+              </a:defRPr>
+            </a:pPr>
+            <a:r>
+              <a:t>уверенной манере письма.</a:t>
+            </a:r>
+          </a:p>
+        </p:txBody>
+      </p:sp>
+      <p:sp>
+        <p:nvSpPr>
+          <p:cNvPr id="9" name="TextBox 8"/>
+          <p:cNvSpPr txBox="1"/>
+          <p:nvPr/>
+        </p:nvSpPr>
+        <p:spPr>
+          <a:xfrm>
+            <a:off x="8503920" y="6446520"/>
+            <a:ext cx="457200" cy="274320"/>
+          </a:xfrm>
+          <a:prstGeom prst="rect">
+            <a:avLst/>
+          </a:prstGeom>
+          <a:noFill/>
+        </p:spPr>
+        <p:txBody>
+          <a:bodyPr wrap="square">
+            <a:spAutoFit/>
+          </a:bodyPr>
+          <a:lstStyle/>
+          <a:p>
             <a:pPr algn="r">
               <a:defRPr sz="900" b="0" i="0">
                 <a:solidFill>
-                  <a:srgbClr val="9A8A7A"/>
-                </a:solidFill>
-                <a:latin typeface="Palatino Linotype"/>
+                  <a:srgbClr val="8A7A6A"/>
+                </a:solidFill>
+                <a:latin typeface="Calibri"/>
               </a:defRPr>
             </a:pPr>
             <a:r>
@@ -4557,7 +5419,7 @@
     <p:bg>
       <p:bgPr>
         <a:solidFill>
-          <a:srgbClr val="1A0A2E"/>
+          <a:srgbClr val="120B1E"/>
         </a:solidFill>
         <a:effectLst/>
       </p:bgPr>
@@ -4571,50 +5433,14 @@
       <p:grpSpPr/>
       <p:sp>
         <p:nvSpPr>
-          <p:cNvPr id="2" name="TextBox 1"/>
-          <p:cNvSpPr txBox="1"/>
-          <p:nvPr/>
-        </p:nvSpPr>
-        <p:spPr>
-          <a:xfrm>
-            <a:off x="731520" y="274320"/>
-            <a:ext cx="7680960" cy="822960"/>
-          </a:xfrm>
-          <a:prstGeom prst="rect">
-            <a:avLst/>
-          </a:prstGeom>
-          <a:noFill/>
-        </p:spPr>
-        <p:txBody>
-          <a:bodyPr wrap="square">
-            <a:spAutoFit/>
-          </a:bodyPr>
-          <a:lstStyle/>
-          <a:p>
-            <a:pPr algn="l">
-              <a:defRPr sz="2400" b="1" i="0">
-                <a:solidFill>
-                  <a:srgbClr val="FFFFFF"/>
-                </a:solidFill>
-                <a:latin typeface="Georgia"/>
-              </a:defRPr>
-            </a:pPr>
-            <a:r>
-              <a:t>Святой Мартин и нищий (ок. 1618)</a:t>
-            </a:r>
-          </a:p>
-        </p:txBody>
-      </p:sp>
-      <p:sp>
-        <p:nvSpPr>
-          <p:cNvPr id="3" name="Rectangle 2"/>
+          <p:cNvPr id="2" name="Rectangle 1"/>
           <p:cNvSpPr/>
           <p:nvPr/>
         </p:nvSpPr>
         <p:spPr>
           <a:xfrm>
-            <a:off x="731520" y="960120"/>
-            <a:ext cx="1828800" cy="38100"/>
+            <a:off x="0" y="0"/>
+            <a:ext cx="9144000" cy="38100"/>
           </a:xfrm>
           <a:prstGeom prst="rect">
             <a:avLst/>
@@ -4650,14 +5476,81 @@
       </p:sp>
       <p:sp>
         <p:nvSpPr>
-          <p:cNvPr id="4" name="TextBox 3"/>
+          <p:cNvPr id="3" name="Rectangle 2"/>
+          <p:cNvSpPr/>
+          <p:nvPr/>
+        </p:nvSpPr>
+        <p:spPr>
+          <a:xfrm>
+            <a:off x="274320" y="548640"/>
+            <a:ext cx="3840480" cy="5943600"/>
+          </a:xfrm>
+          <a:prstGeom prst="rect">
+            <a:avLst/>
+          </a:prstGeom>
+          <a:solidFill>
+            <a:srgbClr val="1E1435"/>
+          </a:solidFill>
+          <a:ln>
+            <a:noFill/>
+          </a:ln>
+        </p:spPr>
+        <p:style>
+          <a:lnRef idx="1">
+            <a:schemeClr val="accent1"/>
+          </a:lnRef>
+          <a:fillRef idx="3">
+            <a:schemeClr val="accent1"/>
+          </a:fillRef>
+          <a:effectRef idx="2">
+            <a:schemeClr val="accent1"/>
+          </a:effectRef>
+          <a:fontRef idx="minor">
+            <a:schemeClr val="lt1"/>
+          </a:fontRef>
+        </p:style>
+        <p:txBody>
+          <a:bodyPr rtlCol="0" anchor="ctr"/>
+          <a:lstStyle/>
+          <a:p>
+            <a:pPr algn="ctr"/>
+          </a:p>
+        </p:txBody>
+      </p:sp>
+      <p:pic>
+        <p:nvPicPr>
+          <p:cNvPr id="4" name="Picture 3" descr="st_martin.jpg"/>
+          <p:cNvPicPr>
+            <a:picLocks noChangeAspect="1"/>
+          </p:cNvPicPr>
+          <p:nvPr/>
+        </p:nvPicPr>
+        <p:blipFill>
+          <a:blip r:embed="rId2"/>
+          <a:stretch>
+            <a:fillRect/>
+          </a:stretch>
+        </p:blipFill>
+        <p:spPr>
+          <a:xfrm>
+            <a:off x="457200" y="731520"/>
+            <a:ext cx="4429054" cy="5577840"/>
+          </a:xfrm>
+          <a:prstGeom prst="rect">
+            <a:avLst/>
+          </a:prstGeom>
+        </p:spPr>
+      </p:pic>
+      <p:sp>
+        <p:nvSpPr>
+          <p:cNvPr id="5" name="TextBox 4"/>
           <p:cNvSpPr txBox="1"/>
           <p:nvPr/>
         </p:nvSpPr>
         <p:spPr>
           <a:xfrm>
-            <a:off x="731520" y="1280160"/>
-            <a:ext cx="7680960" cy="5029200"/>
+            <a:off x="4389120" y="640080"/>
+            <a:ext cx="4480560" cy="822960"/>
           </a:xfrm>
           <a:prstGeom prst="rect">
             <a:avLst/>
@@ -4670,161 +5563,30 @@
           </a:bodyPr>
           <a:lstStyle/>
           <a:p>
-            <a:pPr>
-              <a:spcBef>
-                <a:spcPts val="1200"/>
-              </a:spcBef>
-              <a:defRPr sz="1400">
-                <a:solidFill>
-                  <a:srgbClr val="E8E0D0"/>
-                </a:solidFill>
-                <a:latin typeface="Palatino Linotype"/>
-              </a:defRPr>
-            </a:pPr>
-            <a:r>
-              <a:t>• Дерево, масло. 172 × 158 см</a:t>
-            </a:r>
-          </a:p>
-          <a:p>
-            <a:pPr>
-              <a:spcBef>
-                <a:spcPts val="1200"/>
-              </a:spcBef>
-              <a:defRPr sz="1400">
-                <a:solidFill>
-                  <a:srgbClr val="E8E0D0"/>
-                </a:solidFill>
-                <a:latin typeface="Palatino Linotype"/>
-              </a:defRPr>
-            </a:pPr>
-            <a:r>
-              <a:t>• Алтарный образ церкви Св. Мартина в Завентеме (Бельгия)</a:t>
-            </a:r>
-          </a:p>
-          <a:p>
-            <a:pPr>
-              <a:spcBef>
-                <a:spcPts val="1200"/>
-              </a:spcBef>
-              <a:defRPr sz="1400">
-                <a:solidFill>
-                  <a:srgbClr val="E8E0D0"/>
-                </a:solidFill>
-                <a:latin typeface="Palatino Linotype"/>
-              </a:defRPr>
-            </a:pPr>
-            <a:r>
-              <a:t>• Сюжет: римский воин Мартин Турский разрезает свой плащ,</a:t>
-            </a:r>
-          </a:p>
-          <a:p>
-            <a:pPr>
-              <a:spcBef>
-                <a:spcPts val="1200"/>
-              </a:spcBef>
-              <a:defRPr sz="1400">
-                <a:solidFill>
-                  <a:srgbClr val="E8E0D0"/>
-                </a:solidFill>
-                <a:latin typeface="Palatino Linotype"/>
-              </a:defRPr>
-            </a:pPr>
-            <a:r>
-              <a:t>  чтобы поделиться с замерзающим нищим холодным зимним утром</a:t>
-            </a:r>
-          </a:p>
-          <a:p>
-            <a:pPr>
-              <a:spcBef>
-                <a:spcPts val="1200"/>
-              </a:spcBef>
-              <a:defRPr sz="1400">
-                <a:solidFill>
-                  <a:srgbClr val="E8E0D0"/>
-                </a:solidFill>
-                <a:latin typeface="Palatino Linotype"/>
-              </a:defRPr>
-            </a:pPr>
-            <a:r>
-              <a:t>• Работа написана, когда Ван Дейку было всего ~19 лет</a:t>
-            </a:r>
-          </a:p>
-          <a:p>
-            <a:pPr>
-              <a:spcBef>
-                <a:spcPts val="1200"/>
-              </a:spcBef>
-              <a:defRPr sz="1400">
-                <a:solidFill>
-                  <a:srgbClr val="E8E0D0"/>
-                </a:solidFill>
-                <a:latin typeface="Palatino Linotype"/>
-              </a:defRPr>
-            </a:pPr>
-            <a:r>
-              <a:t>• Заказ изначально предназначался для Рубенса, но был</a:t>
-            </a:r>
-          </a:p>
-          <a:p>
-            <a:pPr>
-              <a:spcBef>
-                <a:spcPts val="1200"/>
-              </a:spcBef>
-              <a:defRPr sz="1400">
-                <a:solidFill>
-                  <a:srgbClr val="E8E0D0"/>
-                </a:solidFill>
-                <a:latin typeface="Palatino Linotype"/>
-              </a:defRPr>
-            </a:pPr>
-            <a:r>
-              <a:t>  передан его талантливому ученику</a:t>
-            </a:r>
-          </a:p>
-          <a:p>
-            <a:pPr>
-              <a:spcBef>
-                <a:spcPts val="1200"/>
-              </a:spcBef>
-              <a:defRPr sz="1400">
-                <a:solidFill>
-                  <a:srgbClr val="E8E0D0"/>
-                </a:solidFill>
-                <a:latin typeface="Palatino Linotype"/>
-              </a:defRPr>
-            </a:pPr>
-            <a:r>
-              <a:t>• Драматичная барочная композиция с сильной диагональю</a:t>
-            </a:r>
-          </a:p>
-          <a:p>
-            <a:pPr>
-              <a:spcBef>
-                <a:spcPts val="1200"/>
-              </a:spcBef>
-              <a:defRPr sz="1400">
-                <a:solidFill>
-                  <a:srgbClr val="E8E0D0"/>
-                </a:solidFill>
-                <a:latin typeface="Palatino Linotype"/>
-              </a:defRPr>
-            </a:pPr>
-            <a:r>
-              <a:t>• Свидетельство раннего мастерства в монументальной живописи</a:t>
-            </a:r>
-          </a:p>
-        </p:txBody>
-      </p:sp>
-      <p:sp>
-        <p:nvSpPr>
-          <p:cNvPr id="5" name="TextBox 4"/>
+            <a:pPr algn="l">
+              <a:defRPr sz="2000" b="1" i="0">
+                <a:solidFill>
+                  <a:srgbClr val="FFFFFF"/>
+                </a:solidFill>
+                <a:latin typeface="Georgia"/>
+              </a:defRPr>
+            </a:pPr>
+            <a:r>
+              <a:t>Святой Мартин и нищий</a:t>
+            </a:r>
+          </a:p>
+        </p:txBody>
+      </p:sp>
+      <p:sp>
+        <p:nvSpPr>
+          <p:cNvPr id="6" name="TextBox 5"/>
           <p:cNvSpPr txBox="1"/>
           <p:nvPr/>
         </p:nvSpPr>
         <p:spPr>
           <a:xfrm>
-            <a:off x="8412480" y="6400800"/>
-            <a:ext cx="548640" cy="365760"/>
+            <a:off x="4389120" y="1371600"/>
+            <a:ext cx="4480560" cy="365760"/>
           </a:xfrm>
           <a:prstGeom prst="rect">
             <a:avLst/>
@@ -4837,12 +5599,297 @@
           </a:bodyPr>
           <a:lstStyle/>
           <a:p>
+            <a:pPr algn="l">
+              <a:defRPr sz="1300" b="0" i="1">
+                <a:solidFill>
+                  <a:srgbClr val="E8C56D"/>
+                </a:solidFill>
+                <a:latin typeface="Calibri"/>
+              </a:defRPr>
+            </a:pPr>
+            <a:r>
+              <a:t>Ок. 1618 • Дерево, масло • 172 × 158 см</a:t>
+            </a:r>
+          </a:p>
+        </p:txBody>
+      </p:sp>
+      <p:sp>
+        <p:nvSpPr>
+          <p:cNvPr id="7" name="Rectangle 6"/>
+          <p:cNvSpPr/>
+          <p:nvPr/>
+        </p:nvSpPr>
+        <p:spPr>
+          <a:xfrm>
+            <a:off x="4389120" y="1783080"/>
+            <a:ext cx="1371600" cy="25400"/>
+          </a:xfrm>
+          <a:prstGeom prst="rect">
+            <a:avLst/>
+          </a:prstGeom>
+          <a:solidFill>
+            <a:srgbClr val="C99A2E"/>
+          </a:solidFill>
+          <a:ln>
+            <a:noFill/>
+          </a:ln>
+        </p:spPr>
+        <p:style>
+          <a:lnRef idx="1">
+            <a:schemeClr val="accent1"/>
+          </a:lnRef>
+          <a:fillRef idx="3">
+            <a:schemeClr val="accent1"/>
+          </a:fillRef>
+          <a:effectRef idx="2">
+            <a:schemeClr val="accent1"/>
+          </a:effectRef>
+          <a:fontRef idx="minor">
+            <a:schemeClr val="lt1"/>
+          </a:fontRef>
+        </p:style>
+        <p:txBody>
+          <a:bodyPr rtlCol="0" anchor="ctr"/>
+          <a:lstStyle/>
+          <a:p>
+            <a:pPr algn="ctr"/>
+          </a:p>
+        </p:txBody>
+      </p:sp>
+      <p:sp>
+        <p:nvSpPr>
+          <p:cNvPr id="8" name="TextBox 7"/>
+          <p:cNvSpPr txBox="1"/>
+          <p:nvPr/>
+        </p:nvSpPr>
+        <p:spPr>
+          <a:xfrm>
+            <a:off x="4389120" y="2011680"/>
+            <a:ext cx="4480560" cy="4389120"/>
+          </a:xfrm>
+          <a:prstGeom prst="rect">
+            <a:avLst/>
+          </a:prstGeom>
+          <a:noFill/>
+        </p:spPr>
+        <p:txBody>
+          <a:bodyPr wrap="square">
+            <a:spAutoFit/>
+          </a:bodyPr>
+          <a:lstStyle/>
+          <a:p>
+            <a:pPr>
+              <a:spcBef>
+                <a:spcPts val="1000"/>
+              </a:spcBef>
+              <a:defRPr sz="1200">
+                <a:solidFill>
+                  <a:srgbClr val="E8E0D0"/>
+                </a:solidFill>
+                <a:latin typeface="Calibri"/>
+              </a:defRPr>
+            </a:pPr>
+            <a:r>
+              <a:t>Церковь Св. Мартина, Завентем (Бельгия)</a:t>
+            </a:r>
+          </a:p>
+          <a:p>
+            <a:pPr>
+              <a:spcBef>
+                <a:spcPts val="1000"/>
+              </a:spcBef>
+              <a:defRPr sz="1200">
+                <a:solidFill>
+                  <a:srgbClr val="E8E0D0"/>
+                </a:solidFill>
+                <a:latin typeface="Calibri"/>
+              </a:defRPr>
+            </a:pPr>
+          </a:p>
+          <a:p>
+            <a:pPr>
+              <a:spcBef>
+                <a:spcPts val="1000"/>
+              </a:spcBef>
+              <a:defRPr sz="1200">
+                <a:solidFill>
+                  <a:srgbClr val="E8E0D0"/>
+                </a:solidFill>
+                <a:latin typeface="Calibri"/>
+              </a:defRPr>
+            </a:pPr>
+            <a:r>
+              <a:t>Алтарный образ, написанный 19-летним Ван</a:t>
+            </a:r>
+          </a:p>
+          <a:p>
+            <a:pPr>
+              <a:spcBef>
+                <a:spcPts val="1000"/>
+              </a:spcBef>
+              <a:defRPr sz="1200">
+                <a:solidFill>
+                  <a:srgbClr val="E8E0D0"/>
+                </a:solidFill>
+                <a:latin typeface="Calibri"/>
+              </a:defRPr>
+            </a:pPr>
+            <a:r>
+              <a:t>Дейком. Сюжет: римский воин Мартин Турский</a:t>
+            </a:r>
+          </a:p>
+          <a:p>
+            <a:pPr>
+              <a:spcBef>
+                <a:spcPts val="1000"/>
+              </a:spcBef>
+              <a:defRPr sz="1200">
+                <a:solidFill>
+                  <a:srgbClr val="E8E0D0"/>
+                </a:solidFill>
+                <a:latin typeface="Calibri"/>
+              </a:defRPr>
+            </a:pPr>
+            <a:r>
+              <a:t>разрезает свой плащ, чтобы поделиться</a:t>
+            </a:r>
+          </a:p>
+          <a:p>
+            <a:pPr>
+              <a:spcBef>
+                <a:spcPts val="1000"/>
+              </a:spcBef>
+              <a:defRPr sz="1200">
+                <a:solidFill>
+                  <a:srgbClr val="E8E0D0"/>
+                </a:solidFill>
+                <a:latin typeface="Calibri"/>
+              </a:defRPr>
+            </a:pPr>
+            <a:r>
+              <a:t>с замерзающим нищим.</a:t>
+            </a:r>
+          </a:p>
+          <a:p>
+            <a:pPr>
+              <a:spcBef>
+                <a:spcPts val="1000"/>
+              </a:spcBef>
+              <a:defRPr sz="1200">
+                <a:solidFill>
+                  <a:srgbClr val="E8E0D0"/>
+                </a:solidFill>
+                <a:latin typeface="Calibri"/>
+              </a:defRPr>
+            </a:pPr>
+          </a:p>
+          <a:p>
+            <a:pPr>
+              <a:spcBef>
+                <a:spcPts val="1000"/>
+              </a:spcBef>
+              <a:defRPr sz="1200">
+                <a:solidFill>
+                  <a:srgbClr val="E8E0D0"/>
+                </a:solidFill>
+                <a:latin typeface="Calibri"/>
+              </a:defRPr>
+            </a:pPr>
+            <a:r>
+              <a:t>Заказ предназначался Рубенсу, но был</a:t>
+            </a:r>
+          </a:p>
+          <a:p>
+            <a:pPr>
+              <a:spcBef>
+                <a:spcPts val="1000"/>
+              </a:spcBef>
+              <a:defRPr sz="1200">
+                <a:solidFill>
+                  <a:srgbClr val="E8E0D0"/>
+                </a:solidFill>
+                <a:latin typeface="Calibri"/>
+              </a:defRPr>
+            </a:pPr>
+            <a:r>
+              <a:t>передан талантливому ученику.</a:t>
+            </a:r>
+          </a:p>
+          <a:p>
+            <a:pPr>
+              <a:spcBef>
+                <a:spcPts val="1000"/>
+              </a:spcBef>
+              <a:defRPr sz="1200">
+                <a:solidFill>
+                  <a:srgbClr val="E8E0D0"/>
+                </a:solidFill>
+                <a:latin typeface="Calibri"/>
+              </a:defRPr>
+            </a:pPr>
+          </a:p>
+          <a:p>
+            <a:pPr>
+              <a:spcBef>
+                <a:spcPts val="1000"/>
+              </a:spcBef>
+              <a:defRPr sz="1200">
+                <a:solidFill>
+                  <a:srgbClr val="E8E0D0"/>
+                </a:solidFill>
+                <a:latin typeface="Calibri"/>
+              </a:defRPr>
+            </a:pPr>
+            <a:r>
+              <a:t>Мощная барочная диагональ и драматизм</a:t>
+            </a:r>
+          </a:p>
+          <a:p>
+            <a:pPr>
+              <a:spcBef>
+                <a:spcPts val="1000"/>
+              </a:spcBef>
+              <a:defRPr sz="1200">
+                <a:solidFill>
+                  <a:srgbClr val="E8E0D0"/>
+                </a:solidFill>
+                <a:latin typeface="Calibri"/>
+              </a:defRPr>
+            </a:pPr>
+            <a:r>
+              <a:t>свидетельствуют о раннем мастерстве.</a:t>
+            </a:r>
+          </a:p>
+        </p:txBody>
+      </p:sp>
+      <p:sp>
+        <p:nvSpPr>
+          <p:cNvPr id="9" name="TextBox 8"/>
+          <p:cNvSpPr txBox="1"/>
+          <p:nvPr/>
+        </p:nvSpPr>
+        <p:spPr>
+          <a:xfrm>
+            <a:off x="8503920" y="6446520"/>
+            <a:ext cx="457200" cy="274320"/>
+          </a:xfrm>
+          <a:prstGeom prst="rect">
+            <a:avLst/>
+          </a:prstGeom>
+          <a:noFill/>
+        </p:spPr>
+        <p:txBody>
+          <a:bodyPr wrap="square">
+            <a:spAutoFit/>
+          </a:bodyPr>
+          <a:lstStyle/>
+          <a:p>
             <a:pPr algn="r">
               <a:defRPr sz="900" b="0" i="0">
                 <a:solidFill>
-                  <a:srgbClr val="9A8A7A"/>
-                </a:solidFill>
-                <a:latin typeface="Palatino Linotype"/>
+                  <a:srgbClr val="8A7A6A"/>
+                </a:solidFill>
+                <a:latin typeface="Calibri"/>
               </a:defRPr>
             </a:pPr>
             <a:r>
@@ -4865,7 +5912,7 @@
     <p:bg>
       <p:bgPr>
         <a:solidFill>
-          <a:srgbClr val="1A0A2E"/>
+          <a:srgbClr val="120B1E"/>
         </a:solidFill>
         <a:effectLst/>
       </p:bgPr>
@@ -4879,50 +5926,14 @@
       <p:grpSpPr/>
       <p:sp>
         <p:nvSpPr>
-          <p:cNvPr id="2" name="TextBox 1"/>
-          <p:cNvSpPr txBox="1"/>
-          <p:nvPr/>
-        </p:nvSpPr>
-        <p:spPr>
-          <a:xfrm>
-            <a:off x="731520" y="274320"/>
-            <a:ext cx="7680960" cy="822960"/>
-          </a:xfrm>
-          <a:prstGeom prst="rect">
-            <a:avLst/>
-          </a:prstGeom>
-          <a:noFill/>
-        </p:spPr>
-        <p:txBody>
-          <a:bodyPr wrap="square">
-            <a:spAutoFit/>
-          </a:bodyPr>
-          <a:lstStyle/>
-          <a:p>
-            <a:pPr algn="l">
-              <a:defRPr sz="2400" b="1" i="0">
-                <a:solidFill>
-                  <a:srgbClr val="FFFFFF"/>
-                </a:solidFill>
-                <a:latin typeface="Georgia"/>
-              </a:defRPr>
-            </a:pPr>
-            <a:r>
-              <a:t>Портрет кардинала Гвидо Бентивольо (ок. 1623)</a:t>
-            </a:r>
-          </a:p>
-        </p:txBody>
-      </p:sp>
-      <p:sp>
-        <p:nvSpPr>
-          <p:cNvPr id="3" name="Rectangle 2"/>
+          <p:cNvPr id="2" name="Rectangle 1"/>
           <p:cNvSpPr/>
           <p:nvPr/>
         </p:nvSpPr>
         <p:spPr>
           <a:xfrm>
-            <a:off x="731520" y="960120"/>
-            <a:ext cx="1828800" cy="38100"/>
+            <a:off x="0" y="0"/>
+            <a:ext cx="9144000" cy="38100"/>
           </a:xfrm>
           <a:prstGeom prst="rect">
             <a:avLst/>
@@ -4958,14 +5969,81 @@
       </p:sp>
       <p:sp>
         <p:nvSpPr>
-          <p:cNvPr id="4" name="TextBox 3"/>
+          <p:cNvPr id="3" name="Rectangle 2"/>
+          <p:cNvSpPr/>
+          <p:nvPr/>
+        </p:nvSpPr>
+        <p:spPr>
+          <a:xfrm>
+            <a:off x="274320" y="548640"/>
+            <a:ext cx="3840480" cy="5943600"/>
+          </a:xfrm>
+          <a:prstGeom prst="rect">
+            <a:avLst/>
+          </a:prstGeom>
+          <a:solidFill>
+            <a:srgbClr val="1E1435"/>
+          </a:solidFill>
+          <a:ln>
+            <a:noFill/>
+          </a:ln>
+        </p:spPr>
+        <p:style>
+          <a:lnRef idx="1">
+            <a:schemeClr val="accent1"/>
+          </a:lnRef>
+          <a:fillRef idx="3">
+            <a:schemeClr val="accent1"/>
+          </a:fillRef>
+          <a:effectRef idx="2">
+            <a:schemeClr val="accent1"/>
+          </a:effectRef>
+          <a:fontRef idx="minor">
+            <a:schemeClr val="lt1"/>
+          </a:fontRef>
+        </p:style>
+        <p:txBody>
+          <a:bodyPr rtlCol="0" anchor="ctr"/>
+          <a:lstStyle/>
+          <a:p>
+            <a:pPr algn="ctr"/>
+          </a:p>
+        </p:txBody>
+      </p:sp>
+      <p:pic>
+        <p:nvPicPr>
+          <p:cNvPr id="4" name="Picture 3" descr="bentivoglio.jpg"/>
+          <p:cNvPicPr>
+            <a:picLocks noChangeAspect="1"/>
+          </p:cNvPicPr>
+          <p:nvPr/>
+        </p:nvPicPr>
+        <p:blipFill>
+          <a:blip r:embed="rId2"/>
+          <a:stretch>
+            <a:fillRect/>
+          </a:stretch>
+        </p:blipFill>
+        <p:spPr>
+          <a:xfrm>
+            <a:off x="457200" y="731520"/>
+            <a:ext cx="5046867" cy="5577840"/>
+          </a:xfrm>
+          <a:prstGeom prst="rect">
+            <a:avLst/>
+          </a:prstGeom>
+        </p:spPr>
+      </p:pic>
+      <p:sp>
+        <p:nvSpPr>
+          <p:cNvPr id="5" name="TextBox 4"/>
           <p:cNvSpPr txBox="1"/>
           <p:nvPr/>
         </p:nvSpPr>
         <p:spPr>
           <a:xfrm>
-            <a:off x="731520" y="1280160"/>
-            <a:ext cx="7680960" cy="5029200"/>
+            <a:off x="4389120" y="640080"/>
+            <a:ext cx="4480560" cy="822960"/>
           </a:xfrm>
           <a:prstGeom prst="rect">
             <a:avLst/>
@@ -4978,145 +6056,30 @@
           </a:bodyPr>
           <a:lstStyle/>
           <a:p>
-            <a:pPr>
-              <a:spcBef>
-                <a:spcPts val="1200"/>
-              </a:spcBef>
-              <a:defRPr sz="1400">
-                <a:solidFill>
-                  <a:srgbClr val="E8E0D0"/>
-                </a:solidFill>
-                <a:latin typeface="Palatino Linotype"/>
-              </a:defRPr>
-            </a:pPr>
-            <a:r>
-              <a:t>• Холст, масло. Галерея Палатина, Палаццо Питти, Флоренция</a:t>
-            </a:r>
-          </a:p>
-          <a:p>
-            <a:pPr>
-              <a:spcBef>
-                <a:spcPts val="1200"/>
-              </a:spcBef>
-              <a:defRPr sz="1400">
-                <a:solidFill>
-                  <a:srgbClr val="E8E0D0"/>
-                </a:solidFill>
-                <a:latin typeface="Palatino Linotype"/>
-              </a:defRPr>
-            </a:pPr>
-            <a:r>
-              <a:t>• Написан во время пребывания Ван Дейка в Италии (1621–1627)</a:t>
-            </a:r>
-          </a:p>
-          <a:p>
-            <a:pPr>
-              <a:spcBef>
-                <a:spcPts val="1200"/>
-              </a:spcBef>
-              <a:defRPr sz="1400">
-                <a:solidFill>
-                  <a:srgbClr val="E8E0D0"/>
-                </a:solidFill>
-                <a:latin typeface="Palatino Linotype"/>
-              </a:defRPr>
-            </a:pPr>
-            <a:r>
-              <a:t>• Кардинал Бентивольо имел связи с родной Фландрией художника</a:t>
-            </a:r>
-          </a:p>
-          <a:p>
-            <a:pPr>
-              <a:spcBef>
-                <a:spcPts val="1200"/>
-              </a:spcBef>
-              <a:defRPr sz="1400">
-                <a:solidFill>
-                  <a:srgbClr val="E8E0D0"/>
-                </a:solidFill>
-                <a:latin typeface="Palatino Linotype"/>
-              </a:defRPr>
-            </a:pPr>
-            <a:r>
-              <a:t>• «Весь Рим устремился смотреть это чудо искусства, и каждый</a:t>
-            </a:r>
-          </a:p>
-          <a:p>
-            <a:pPr>
-              <a:spcBef>
-                <a:spcPts val="1200"/>
-              </a:spcBef>
-              <a:defRPr sz="1400">
-                <a:solidFill>
-                  <a:srgbClr val="E8E0D0"/>
-                </a:solidFill>
-                <a:latin typeface="Palatino Linotype"/>
-              </a:defRPr>
-            </a:pPr>
-            <a:r>
-              <a:t>  хотел быть написанным рукой нашего художника» (XVIII в.)</a:t>
-            </a:r>
-          </a:p>
-          <a:p>
-            <a:pPr>
-              <a:spcBef>
-                <a:spcPts val="1200"/>
-              </a:spcBef>
-              <a:defRPr sz="1400">
-                <a:solidFill>
-                  <a:srgbClr val="E8E0D0"/>
-                </a:solidFill>
-                <a:latin typeface="Palatino Linotype"/>
-              </a:defRPr>
-            </a:pPr>
-            <a:r>
-              <a:t>• Работа вдохновлена итальянскими мастерами, особенно Тицианом</a:t>
-            </a:r>
-          </a:p>
-          <a:p>
-            <a:pPr>
-              <a:spcBef>
-                <a:spcPts val="1200"/>
-              </a:spcBef>
-              <a:defRPr sz="1400">
-                <a:solidFill>
-                  <a:srgbClr val="E8E0D0"/>
-                </a:solidFill>
-                <a:latin typeface="Palatino Linotype"/>
-              </a:defRPr>
-            </a:pPr>
-            <a:r>
-              <a:t>• Утвердила Ван Дейка как ведущего портретиста своего времени</a:t>
-            </a:r>
-          </a:p>
-          <a:p>
-            <a:pPr>
-              <a:spcBef>
-                <a:spcPts val="1200"/>
-              </a:spcBef>
-              <a:defRPr sz="1400">
-                <a:solidFill>
-                  <a:srgbClr val="E8E0D0"/>
-                </a:solidFill>
-                <a:latin typeface="Palatino Linotype"/>
-              </a:defRPr>
-            </a:pPr>
-            <a:r>
-              <a:t>• Передаёт жизнь, ум и чувственность натуры кардинала</a:t>
-            </a:r>
-          </a:p>
-        </p:txBody>
-      </p:sp>
-      <p:sp>
-        <p:nvSpPr>
-          <p:cNvPr id="5" name="TextBox 4"/>
+            <a:pPr algn="l">
+              <a:defRPr sz="2000" b="1" i="0">
+                <a:solidFill>
+                  <a:srgbClr val="FFFFFF"/>
+                </a:solidFill>
+                <a:latin typeface="Georgia"/>
+              </a:defRPr>
+            </a:pPr>
+            <a:r>
+              <a:t>Портрет кардинала Бентивольо</a:t>
+            </a:r>
+          </a:p>
+        </p:txBody>
+      </p:sp>
+      <p:sp>
+        <p:nvSpPr>
+          <p:cNvPr id="6" name="TextBox 5"/>
           <p:cNvSpPr txBox="1"/>
           <p:nvPr/>
         </p:nvSpPr>
         <p:spPr>
           <a:xfrm>
-            <a:off x="8412480" y="6400800"/>
-            <a:ext cx="548640" cy="365760"/>
+            <a:off x="4389120" y="1371600"/>
+            <a:ext cx="4480560" cy="365760"/>
           </a:xfrm>
           <a:prstGeom prst="rect">
             <a:avLst/>
@@ -5129,12 +6092,297 @@
           </a:bodyPr>
           <a:lstStyle/>
           <a:p>
+            <a:pPr algn="l">
+              <a:defRPr sz="1300" b="0" i="1">
+                <a:solidFill>
+                  <a:srgbClr val="E8C56D"/>
+                </a:solidFill>
+                <a:latin typeface="Calibri"/>
+              </a:defRPr>
+            </a:pPr>
+            <a:r>
+              <a:t>Ок. 1623 • Холст, масло</a:t>
+            </a:r>
+          </a:p>
+        </p:txBody>
+      </p:sp>
+      <p:sp>
+        <p:nvSpPr>
+          <p:cNvPr id="7" name="Rectangle 6"/>
+          <p:cNvSpPr/>
+          <p:nvPr/>
+        </p:nvSpPr>
+        <p:spPr>
+          <a:xfrm>
+            <a:off x="4389120" y="1783080"/>
+            <a:ext cx="1371600" cy="25400"/>
+          </a:xfrm>
+          <a:prstGeom prst="rect">
+            <a:avLst/>
+          </a:prstGeom>
+          <a:solidFill>
+            <a:srgbClr val="C99A2E"/>
+          </a:solidFill>
+          <a:ln>
+            <a:noFill/>
+          </a:ln>
+        </p:spPr>
+        <p:style>
+          <a:lnRef idx="1">
+            <a:schemeClr val="accent1"/>
+          </a:lnRef>
+          <a:fillRef idx="3">
+            <a:schemeClr val="accent1"/>
+          </a:fillRef>
+          <a:effectRef idx="2">
+            <a:schemeClr val="accent1"/>
+          </a:effectRef>
+          <a:fontRef idx="minor">
+            <a:schemeClr val="lt1"/>
+          </a:fontRef>
+        </p:style>
+        <p:txBody>
+          <a:bodyPr rtlCol="0" anchor="ctr"/>
+          <a:lstStyle/>
+          <a:p>
+            <a:pPr algn="ctr"/>
+          </a:p>
+        </p:txBody>
+      </p:sp>
+      <p:sp>
+        <p:nvSpPr>
+          <p:cNvPr id="8" name="TextBox 7"/>
+          <p:cNvSpPr txBox="1"/>
+          <p:nvPr/>
+        </p:nvSpPr>
+        <p:spPr>
+          <a:xfrm>
+            <a:off x="4389120" y="2011680"/>
+            <a:ext cx="4480560" cy="4389120"/>
+          </a:xfrm>
+          <a:prstGeom prst="rect">
+            <a:avLst/>
+          </a:prstGeom>
+          <a:noFill/>
+        </p:spPr>
+        <p:txBody>
+          <a:bodyPr wrap="square">
+            <a:spAutoFit/>
+          </a:bodyPr>
+          <a:lstStyle/>
+          <a:p>
+            <a:pPr>
+              <a:spcBef>
+                <a:spcPts val="1000"/>
+              </a:spcBef>
+              <a:defRPr sz="1200">
+                <a:solidFill>
+                  <a:srgbClr val="E8E0D0"/>
+                </a:solidFill>
+                <a:latin typeface="Calibri"/>
+              </a:defRPr>
+            </a:pPr>
+            <a:r>
+              <a:t>Галерея Палатина, Палаццо Питти, Флоренция</a:t>
+            </a:r>
+          </a:p>
+          <a:p>
+            <a:pPr>
+              <a:spcBef>
+                <a:spcPts val="1000"/>
+              </a:spcBef>
+              <a:defRPr sz="1200">
+                <a:solidFill>
+                  <a:srgbClr val="E8E0D0"/>
+                </a:solidFill>
+                <a:latin typeface="Calibri"/>
+              </a:defRPr>
+            </a:pPr>
+          </a:p>
+          <a:p>
+            <a:pPr>
+              <a:spcBef>
+                <a:spcPts val="1000"/>
+              </a:spcBef>
+              <a:defRPr sz="1200">
+                <a:solidFill>
+                  <a:srgbClr val="E8E0D0"/>
+                </a:solidFill>
+                <a:latin typeface="Calibri"/>
+              </a:defRPr>
+            </a:pPr>
+            <a:r>
+              <a:t>Написан в итальянский период. Кардинал Гвидо</a:t>
+            </a:r>
+          </a:p>
+          <a:p>
+            <a:pPr>
+              <a:spcBef>
+                <a:spcPts val="1000"/>
+              </a:spcBef>
+              <a:defRPr sz="1200">
+                <a:solidFill>
+                  <a:srgbClr val="E8E0D0"/>
+                </a:solidFill>
+                <a:latin typeface="Calibri"/>
+              </a:defRPr>
+            </a:pPr>
+            <a:r>
+              <a:t>Бентивольо — дипломат, связанный с Фландрией.</a:t>
+            </a:r>
+          </a:p>
+          <a:p>
+            <a:pPr>
+              <a:spcBef>
+                <a:spcPts val="1000"/>
+              </a:spcBef>
+              <a:defRPr sz="1200">
+                <a:solidFill>
+                  <a:srgbClr val="E8E0D0"/>
+                </a:solidFill>
+                <a:latin typeface="Calibri"/>
+              </a:defRPr>
+            </a:pPr>
+          </a:p>
+          <a:p>
+            <a:pPr>
+              <a:spcBef>
+                <a:spcPts val="1000"/>
+              </a:spcBef>
+              <a:defRPr sz="1200">
+                <a:solidFill>
+                  <a:srgbClr val="E8E0D0"/>
+                </a:solidFill>
+                <a:latin typeface="Calibri"/>
+              </a:defRPr>
+            </a:pPr>
+            <a:r>
+              <a:t>«Весь Рим устремился смотреть это чудо</a:t>
+            </a:r>
+          </a:p>
+          <a:p>
+            <a:pPr>
+              <a:spcBef>
+                <a:spcPts val="1000"/>
+              </a:spcBef>
+              <a:defRPr sz="1200">
+                <a:solidFill>
+                  <a:srgbClr val="E8E0D0"/>
+                </a:solidFill>
+                <a:latin typeface="Calibri"/>
+              </a:defRPr>
+            </a:pPr>
+            <a:r>
+              <a:t>искусства, и каждый хотел быть написанным</a:t>
+            </a:r>
+          </a:p>
+          <a:p>
+            <a:pPr>
+              <a:spcBef>
+                <a:spcPts val="1000"/>
+              </a:spcBef>
+              <a:defRPr sz="1200">
+                <a:solidFill>
+                  <a:srgbClr val="E8E0D0"/>
+                </a:solidFill>
+                <a:latin typeface="Calibri"/>
+              </a:defRPr>
+            </a:pPr>
+            <a:r>
+              <a:t>рукой нашего художника»</a:t>
+            </a:r>
+          </a:p>
+          <a:p>
+            <a:pPr>
+              <a:spcBef>
+                <a:spcPts val="1000"/>
+              </a:spcBef>
+              <a:defRPr sz="1200">
+                <a:solidFill>
+                  <a:srgbClr val="E8E0D0"/>
+                </a:solidFill>
+                <a:latin typeface="Calibri"/>
+              </a:defRPr>
+            </a:pPr>
+          </a:p>
+          <a:p>
+            <a:pPr>
+              <a:spcBef>
+                <a:spcPts val="1000"/>
+              </a:spcBef>
+              <a:defRPr sz="1200">
+                <a:solidFill>
+                  <a:srgbClr val="E8E0D0"/>
+                </a:solidFill>
+                <a:latin typeface="Calibri"/>
+              </a:defRPr>
+            </a:pPr>
+            <a:r>
+              <a:t>Работа, вдохновлённая Тицианом, утвердила</a:t>
+            </a:r>
+          </a:p>
+          <a:p>
+            <a:pPr>
+              <a:spcBef>
+                <a:spcPts val="1000"/>
+              </a:spcBef>
+              <a:defRPr sz="1200">
+                <a:solidFill>
+                  <a:srgbClr val="E8E0D0"/>
+                </a:solidFill>
+                <a:latin typeface="Calibri"/>
+              </a:defRPr>
+            </a:pPr>
+            <a:r>
+              <a:t>Ван Дейка как ведущего портретиста эпохи.</a:t>
+            </a:r>
+          </a:p>
+          <a:p>
+            <a:pPr>
+              <a:spcBef>
+                <a:spcPts val="1000"/>
+              </a:spcBef>
+              <a:defRPr sz="1200">
+                <a:solidFill>
+                  <a:srgbClr val="E8E0D0"/>
+                </a:solidFill>
+                <a:latin typeface="Calibri"/>
+              </a:defRPr>
+            </a:pPr>
+            <a:r>
+              <a:t>Передаёт ум и чувственность натуры.</a:t>
+            </a:r>
+          </a:p>
+        </p:txBody>
+      </p:sp>
+      <p:sp>
+        <p:nvSpPr>
+          <p:cNvPr id="9" name="TextBox 8"/>
+          <p:cNvSpPr txBox="1"/>
+          <p:nvPr/>
+        </p:nvSpPr>
+        <p:spPr>
+          <a:xfrm>
+            <a:off x="8503920" y="6446520"/>
+            <a:ext cx="457200" cy="274320"/>
+          </a:xfrm>
+          <a:prstGeom prst="rect">
+            <a:avLst/>
+          </a:prstGeom>
+          <a:noFill/>
+        </p:spPr>
+        <p:txBody>
+          <a:bodyPr wrap="square">
+            <a:spAutoFit/>
+          </a:bodyPr>
+          <a:lstStyle/>
+          <a:p>
             <a:pPr algn="r">
               <a:defRPr sz="900" b="0" i="0">
                 <a:solidFill>
-                  <a:srgbClr val="9A8A7A"/>
-                </a:solidFill>
-                <a:latin typeface="Palatino Linotype"/>
+                  <a:srgbClr val="8A7A6A"/>
+                </a:solidFill>
+                <a:latin typeface="Calibri"/>
               </a:defRPr>
             </a:pPr>
             <a:r>
@@ -5157,7 +6405,7 @@
     <p:bg>
       <p:bgPr>
         <a:solidFill>
-          <a:srgbClr val="1A0A2E"/>
+          <a:srgbClr val="120B1E"/>
         </a:solidFill>
         <a:effectLst/>
       </p:bgPr>
@@ -5171,50 +6419,14 @@
       <p:grpSpPr/>
       <p:sp>
         <p:nvSpPr>
-          <p:cNvPr id="2" name="TextBox 1"/>
-          <p:cNvSpPr txBox="1"/>
-          <p:nvPr/>
-        </p:nvSpPr>
-        <p:spPr>
-          <a:xfrm>
-            <a:off x="731520" y="274320"/>
-            <a:ext cx="7680960" cy="822960"/>
-          </a:xfrm>
-          <a:prstGeom prst="rect">
-            <a:avLst/>
-          </a:prstGeom>
-          <a:noFill/>
-        </p:spPr>
-        <p:txBody>
-          <a:bodyPr wrap="square">
-            <a:spAutoFit/>
-          </a:bodyPr>
-          <a:lstStyle/>
-          <a:p>
-            <a:pPr algn="l">
-              <a:defRPr sz="2400" b="1" i="0">
-                <a:solidFill>
-                  <a:srgbClr val="FFFFFF"/>
-                </a:solidFill>
-                <a:latin typeface="Georgia"/>
-              </a:defRPr>
-            </a:pPr>
-            <a:r>
-              <a:t>Автопортрет (ок. 1620–1621)</a:t>
-            </a:r>
-          </a:p>
-        </p:txBody>
-      </p:sp>
-      <p:sp>
-        <p:nvSpPr>
-          <p:cNvPr id="3" name="Rectangle 2"/>
+          <p:cNvPr id="2" name="Rectangle 1"/>
           <p:cNvSpPr/>
           <p:nvPr/>
         </p:nvSpPr>
         <p:spPr>
           <a:xfrm>
-            <a:off x="731520" y="960120"/>
-            <a:ext cx="1828800" cy="38100"/>
+            <a:off x="0" y="0"/>
+            <a:ext cx="9144000" cy="38100"/>
           </a:xfrm>
           <a:prstGeom prst="rect">
             <a:avLst/>
@@ -5250,14 +6462,81 @@
       </p:sp>
       <p:sp>
         <p:nvSpPr>
-          <p:cNvPr id="4" name="TextBox 3"/>
+          <p:cNvPr id="3" name="Rectangle 2"/>
+          <p:cNvSpPr/>
+          <p:nvPr/>
+        </p:nvSpPr>
+        <p:spPr>
+          <a:xfrm>
+            <a:off x="274320" y="548640"/>
+            <a:ext cx="3840480" cy="5943600"/>
+          </a:xfrm>
+          <a:prstGeom prst="rect">
+            <a:avLst/>
+          </a:prstGeom>
+          <a:solidFill>
+            <a:srgbClr val="1E1435"/>
+          </a:solidFill>
+          <a:ln>
+            <a:noFill/>
+          </a:ln>
+        </p:spPr>
+        <p:style>
+          <a:lnRef idx="1">
+            <a:schemeClr val="accent1"/>
+          </a:lnRef>
+          <a:fillRef idx="3">
+            <a:schemeClr val="accent1"/>
+          </a:fillRef>
+          <a:effectRef idx="2">
+            <a:schemeClr val="accent1"/>
+          </a:effectRef>
+          <a:fontRef idx="minor">
+            <a:schemeClr val="lt1"/>
+          </a:fontRef>
+        </p:style>
+        <p:txBody>
+          <a:bodyPr rtlCol="0" anchor="ctr"/>
+          <a:lstStyle/>
+          <a:p>
+            <a:pPr algn="ctr"/>
+          </a:p>
+        </p:txBody>
+      </p:sp>
+      <p:pic>
+        <p:nvPicPr>
+          <p:cNvPr id="4" name="Picture 3" descr="self_portrait.jpg"/>
+          <p:cNvPicPr>
+            <a:picLocks noChangeAspect="1"/>
+          </p:cNvPicPr>
+          <p:nvPr/>
+        </p:nvPicPr>
+        <p:blipFill>
+          <a:blip r:embed="rId2"/>
+          <a:stretch>
+            <a:fillRect/>
+          </a:stretch>
+        </p:blipFill>
+        <p:spPr>
+          <a:xfrm>
+            <a:off x="457200" y="731520"/>
+            <a:ext cx="3741947" cy="5577840"/>
+          </a:xfrm>
+          <a:prstGeom prst="rect">
+            <a:avLst/>
+          </a:prstGeom>
+        </p:spPr>
+      </p:pic>
+      <p:sp>
+        <p:nvSpPr>
+          <p:cNvPr id="5" name="TextBox 4"/>
           <p:cNvSpPr txBox="1"/>
           <p:nvPr/>
         </p:nvSpPr>
         <p:spPr>
           <a:xfrm>
-            <a:off x="731520" y="1280160"/>
-            <a:ext cx="7680960" cy="5029200"/>
+            <a:off x="4389120" y="640080"/>
+            <a:ext cx="4480560" cy="822960"/>
           </a:xfrm>
           <a:prstGeom prst="rect">
             <a:avLst/>
@@ -5270,161 +6549,30 @@
           </a:bodyPr>
           <a:lstStyle/>
           <a:p>
-            <a:pPr>
-              <a:spcBef>
-                <a:spcPts val="1200"/>
-              </a:spcBef>
-              <a:defRPr sz="1400">
-                <a:solidFill>
-                  <a:srgbClr val="E8E0D0"/>
-                </a:solidFill>
-                <a:latin typeface="Palatino Linotype"/>
-              </a:defRPr>
-            </a:pPr>
-            <a:r>
-              <a:t>• Холст, масло. 119,7 × 87,9 см</a:t>
-            </a:r>
-          </a:p>
-          <a:p>
-            <a:pPr>
-              <a:spcBef>
-                <a:spcPts val="1200"/>
-              </a:spcBef>
-              <a:defRPr sz="1400">
-                <a:solidFill>
-                  <a:srgbClr val="E8E0D0"/>
-                </a:solidFill>
-                <a:latin typeface="Palatino Linotype"/>
-              </a:defRPr>
-            </a:pPr>
-            <a:r>
-              <a:t>• Хранится в Метрополитен-музее, Нью-Йорк</a:t>
-            </a:r>
-          </a:p>
-          <a:p>
-            <a:pPr>
-              <a:spcBef>
-                <a:spcPts val="1200"/>
-              </a:spcBef>
-              <a:defRPr sz="1400">
-                <a:solidFill>
-                  <a:srgbClr val="E8E0D0"/>
-                </a:solidFill>
-                <a:latin typeface="Palatino Linotype"/>
-              </a:defRPr>
-            </a:pPr>
-            <a:r>
-              <a:t>• Написан предположительно зимой 1620–1621 гг. в Лондоне</a:t>
-            </a:r>
-          </a:p>
-          <a:p>
-            <a:pPr>
-              <a:spcBef>
-                <a:spcPts val="1200"/>
-              </a:spcBef>
-              <a:defRPr sz="1400">
-                <a:solidFill>
-                  <a:srgbClr val="E8E0D0"/>
-                </a:solidFill>
-                <a:latin typeface="Palatino Linotype"/>
-              </a:defRPr>
-            </a:pPr>
-            <a:r>
-              <a:t>• Ван Дейк изобразил себя как светского джентльмена в изысканной</a:t>
-            </a:r>
-          </a:p>
-          <a:p>
-            <a:pPr>
-              <a:spcBef>
-                <a:spcPts val="1200"/>
-              </a:spcBef>
-              <a:defRPr sz="1400">
-                <a:solidFill>
-                  <a:srgbClr val="E8E0D0"/>
-                </a:solidFill>
-                <a:latin typeface="Palatino Linotype"/>
-              </a:defRPr>
-            </a:pPr>
-            <a:r>
-              <a:t>  одежде, без палитры и кистей — атрибутов ремесла</a:t>
-            </a:r>
-          </a:p>
-          <a:p>
-            <a:pPr>
-              <a:spcBef>
-                <a:spcPts val="1200"/>
-              </a:spcBef>
-              <a:defRPr sz="1400">
-                <a:solidFill>
-                  <a:srgbClr val="E8E0D0"/>
-                </a:solidFill>
-                <a:latin typeface="Palatino Linotype"/>
-              </a:defRPr>
-            </a:pPr>
-            <a:r>
-              <a:t>• Небрежная поза руки у подбородка подчёркивает аристократизм</a:t>
-            </a:r>
-          </a:p>
-          <a:p>
-            <a:pPr>
-              <a:spcBef>
-                <a:spcPts val="1200"/>
-              </a:spcBef>
-              <a:defRPr sz="1400">
-                <a:solidFill>
-                  <a:srgbClr val="E8E0D0"/>
-                </a:solidFill>
-                <a:latin typeface="Palatino Linotype"/>
-              </a:defRPr>
-            </a:pPr>
-            <a:r>
-              <a:t>• Отец художника был богатым торговцем тканями — отсюда роскошь</a:t>
-            </a:r>
-          </a:p>
-          <a:p>
-            <a:pPr>
-              <a:spcBef>
-                <a:spcPts val="1200"/>
-              </a:spcBef>
-              <a:defRPr sz="1400">
-                <a:solidFill>
-                  <a:srgbClr val="E8E0D0"/>
-                </a:solidFill>
-                <a:latin typeface="Palatino Linotype"/>
-              </a:defRPr>
-            </a:pPr>
-            <a:r>
-              <a:t>  костюма и самоуверенность 21-летнего мастера</a:t>
-            </a:r>
-          </a:p>
-          <a:p>
-            <a:pPr>
-              <a:spcBef>
-                <a:spcPts val="1200"/>
-              </a:spcBef>
-              <a:defRPr sz="1400">
-                <a:solidFill>
-                  <a:srgbClr val="E8E0D0"/>
-                </a:solidFill>
-                <a:latin typeface="Palatino Linotype"/>
-              </a:defRPr>
-            </a:pPr>
-            <a:r>
-              <a:t>• Виртуозная кисть передаёт блеск ткани и сияние молодой кожи</a:t>
-            </a:r>
-          </a:p>
-        </p:txBody>
-      </p:sp>
-      <p:sp>
-        <p:nvSpPr>
-          <p:cNvPr id="5" name="TextBox 4"/>
+            <a:pPr algn="l">
+              <a:defRPr sz="2000" b="1" i="0">
+                <a:solidFill>
+                  <a:srgbClr val="FFFFFF"/>
+                </a:solidFill>
+                <a:latin typeface="Georgia"/>
+              </a:defRPr>
+            </a:pPr>
+            <a:r>
+              <a:t>Автопортрет</a:t>
+            </a:r>
+          </a:p>
+        </p:txBody>
+      </p:sp>
+      <p:sp>
+        <p:nvSpPr>
+          <p:cNvPr id="6" name="TextBox 5"/>
           <p:cNvSpPr txBox="1"/>
           <p:nvPr/>
         </p:nvSpPr>
         <p:spPr>
           <a:xfrm>
-            <a:off x="8412480" y="6400800"/>
-            <a:ext cx="548640" cy="365760"/>
+            <a:off x="4389120" y="1371600"/>
+            <a:ext cx="4480560" cy="365760"/>
           </a:xfrm>
           <a:prstGeom prst="rect">
             <a:avLst/>
@@ -5437,12 +6585,313 @@
           </a:bodyPr>
           <a:lstStyle/>
           <a:p>
+            <a:pPr algn="l">
+              <a:defRPr sz="1300" b="0" i="1">
+                <a:solidFill>
+                  <a:srgbClr val="E8C56D"/>
+                </a:solidFill>
+                <a:latin typeface="Calibri"/>
+              </a:defRPr>
+            </a:pPr>
+            <a:r>
+              <a:t>Ок. 1620–1621 • Холст, масло • 119,7 × 87,9 см</a:t>
+            </a:r>
+          </a:p>
+        </p:txBody>
+      </p:sp>
+      <p:sp>
+        <p:nvSpPr>
+          <p:cNvPr id="7" name="Rectangle 6"/>
+          <p:cNvSpPr/>
+          <p:nvPr/>
+        </p:nvSpPr>
+        <p:spPr>
+          <a:xfrm>
+            <a:off x="4389120" y="1783080"/>
+            <a:ext cx="1371600" cy="25400"/>
+          </a:xfrm>
+          <a:prstGeom prst="rect">
+            <a:avLst/>
+          </a:prstGeom>
+          <a:solidFill>
+            <a:srgbClr val="C99A2E"/>
+          </a:solidFill>
+          <a:ln>
+            <a:noFill/>
+          </a:ln>
+        </p:spPr>
+        <p:style>
+          <a:lnRef idx="1">
+            <a:schemeClr val="accent1"/>
+          </a:lnRef>
+          <a:fillRef idx="3">
+            <a:schemeClr val="accent1"/>
+          </a:fillRef>
+          <a:effectRef idx="2">
+            <a:schemeClr val="accent1"/>
+          </a:effectRef>
+          <a:fontRef idx="minor">
+            <a:schemeClr val="lt1"/>
+          </a:fontRef>
+        </p:style>
+        <p:txBody>
+          <a:bodyPr rtlCol="0" anchor="ctr"/>
+          <a:lstStyle/>
+          <a:p>
+            <a:pPr algn="ctr"/>
+          </a:p>
+        </p:txBody>
+      </p:sp>
+      <p:sp>
+        <p:nvSpPr>
+          <p:cNvPr id="8" name="TextBox 7"/>
+          <p:cNvSpPr txBox="1"/>
+          <p:nvPr/>
+        </p:nvSpPr>
+        <p:spPr>
+          <a:xfrm>
+            <a:off x="4389120" y="2011680"/>
+            <a:ext cx="4480560" cy="4389120"/>
+          </a:xfrm>
+          <a:prstGeom prst="rect">
+            <a:avLst/>
+          </a:prstGeom>
+          <a:noFill/>
+        </p:spPr>
+        <p:txBody>
+          <a:bodyPr wrap="square">
+            <a:spAutoFit/>
+          </a:bodyPr>
+          <a:lstStyle/>
+          <a:p>
+            <a:pPr>
+              <a:spcBef>
+                <a:spcPts val="1000"/>
+              </a:spcBef>
+              <a:defRPr sz="1200">
+                <a:solidFill>
+                  <a:srgbClr val="E8E0D0"/>
+                </a:solidFill>
+                <a:latin typeface="Calibri"/>
+              </a:defRPr>
+            </a:pPr>
+            <a:r>
+              <a:t>Метрополитен-музей, Нью-Йорк</a:t>
+            </a:r>
+          </a:p>
+          <a:p>
+            <a:pPr>
+              <a:spcBef>
+                <a:spcPts val="1000"/>
+              </a:spcBef>
+              <a:defRPr sz="1200">
+                <a:solidFill>
+                  <a:srgbClr val="E8E0D0"/>
+                </a:solidFill>
+                <a:latin typeface="Calibri"/>
+              </a:defRPr>
+            </a:pPr>
+          </a:p>
+          <a:p>
+            <a:pPr>
+              <a:spcBef>
+                <a:spcPts val="1000"/>
+              </a:spcBef>
+              <a:defRPr sz="1200">
+                <a:solidFill>
+                  <a:srgbClr val="E8E0D0"/>
+                </a:solidFill>
+                <a:latin typeface="Calibri"/>
+              </a:defRPr>
+            </a:pPr>
+            <a:r>
+              <a:t>Написан зимой 1620–1621 в Лондоне.</a:t>
+            </a:r>
+          </a:p>
+          <a:p>
+            <a:pPr>
+              <a:spcBef>
+                <a:spcPts val="1000"/>
+              </a:spcBef>
+              <a:defRPr sz="1200">
+                <a:solidFill>
+                  <a:srgbClr val="E8E0D0"/>
+                </a:solidFill>
+                <a:latin typeface="Calibri"/>
+              </a:defRPr>
+            </a:pPr>
+            <a:r>
+              <a:t>Ван Дейк изображает себя как светского</a:t>
+            </a:r>
+          </a:p>
+          <a:p>
+            <a:pPr>
+              <a:spcBef>
+                <a:spcPts val="1000"/>
+              </a:spcBef>
+              <a:defRPr sz="1200">
+                <a:solidFill>
+                  <a:srgbClr val="E8E0D0"/>
+                </a:solidFill>
+                <a:latin typeface="Calibri"/>
+              </a:defRPr>
+            </a:pPr>
+            <a:r>
+              <a:t>джентльмена в изысканной одежде — без</a:t>
+            </a:r>
+          </a:p>
+          <a:p>
+            <a:pPr>
+              <a:spcBef>
+                <a:spcPts val="1000"/>
+              </a:spcBef>
+              <a:defRPr sz="1200">
+                <a:solidFill>
+                  <a:srgbClr val="E8E0D0"/>
+                </a:solidFill>
+                <a:latin typeface="Calibri"/>
+              </a:defRPr>
+            </a:pPr>
+            <a:r>
+              <a:t>палитры и кистей.</a:t>
+            </a:r>
+          </a:p>
+          <a:p>
+            <a:pPr>
+              <a:spcBef>
+                <a:spcPts val="1000"/>
+              </a:spcBef>
+              <a:defRPr sz="1200">
+                <a:solidFill>
+                  <a:srgbClr val="E8E0D0"/>
+                </a:solidFill>
+                <a:latin typeface="Calibri"/>
+              </a:defRPr>
+            </a:pPr>
+          </a:p>
+          <a:p>
+            <a:pPr>
+              <a:spcBef>
+                <a:spcPts val="1000"/>
+              </a:spcBef>
+              <a:defRPr sz="1200">
+                <a:solidFill>
+                  <a:srgbClr val="E8E0D0"/>
+                </a:solidFill>
+                <a:latin typeface="Calibri"/>
+              </a:defRPr>
+            </a:pPr>
+            <a:r>
+              <a:t>Небрежная поза руки у подбородка</a:t>
+            </a:r>
+          </a:p>
+          <a:p>
+            <a:pPr>
+              <a:spcBef>
+                <a:spcPts val="1000"/>
+              </a:spcBef>
+              <a:defRPr sz="1200">
+                <a:solidFill>
+                  <a:srgbClr val="E8E0D0"/>
+                </a:solidFill>
+                <a:latin typeface="Calibri"/>
+              </a:defRPr>
+            </a:pPr>
+            <a:r>
+              <a:t>подчёркивает аристократизм. Отец был</a:t>
+            </a:r>
+          </a:p>
+          <a:p>
+            <a:pPr>
+              <a:spcBef>
+                <a:spcPts val="1000"/>
+              </a:spcBef>
+              <a:defRPr sz="1200">
+                <a:solidFill>
+                  <a:srgbClr val="E8E0D0"/>
+                </a:solidFill>
+                <a:latin typeface="Calibri"/>
+              </a:defRPr>
+            </a:pPr>
+            <a:r>
+              <a:t>богатым торговцем тканями.</a:t>
+            </a:r>
+          </a:p>
+          <a:p>
+            <a:pPr>
+              <a:spcBef>
+                <a:spcPts val="1000"/>
+              </a:spcBef>
+              <a:defRPr sz="1200">
+                <a:solidFill>
+                  <a:srgbClr val="E8E0D0"/>
+                </a:solidFill>
+                <a:latin typeface="Calibri"/>
+              </a:defRPr>
+            </a:pPr>
+          </a:p>
+          <a:p>
+            <a:pPr>
+              <a:spcBef>
+                <a:spcPts val="1000"/>
+              </a:spcBef>
+              <a:defRPr sz="1200">
+                <a:solidFill>
+                  <a:srgbClr val="E8E0D0"/>
+                </a:solidFill>
+                <a:latin typeface="Calibri"/>
+              </a:defRPr>
+            </a:pPr>
+            <a:r>
+              <a:t>Виртуозная кисть передаёт блеск шёлка</a:t>
+            </a:r>
+          </a:p>
+          <a:p>
+            <a:pPr>
+              <a:spcBef>
+                <a:spcPts val="1000"/>
+              </a:spcBef>
+              <a:defRPr sz="1200">
+                <a:solidFill>
+                  <a:srgbClr val="E8E0D0"/>
+                </a:solidFill>
+                <a:latin typeface="Calibri"/>
+              </a:defRPr>
+            </a:pPr>
+            <a:r>
+              <a:t>и сияние молодой кожи 21-летнего мастера.</a:t>
+            </a:r>
+          </a:p>
+        </p:txBody>
+      </p:sp>
+      <p:sp>
+        <p:nvSpPr>
+          <p:cNvPr id="9" name="TextBox 8"/>
+          <p:cNvSpPr txBox="1"/>
+          <p:nvPr/>
+        </p:nvSpPr>
+        <p:spPr>
+          <a:xfrm>
+            <a:off x="8503920" y="6446520"/>
+            <a:ext cx="457200" cy="274320"/>
+          </a:xfrm>
+          <a:prstGeom prst="rect">
+            <a:avLst/>
+          </a:prstGeom>
+          <a:noFill/>
+        </p:spPr>
+        <p:txBody>
+          <a:bodyPr wrap="square">
+            <a:spAutoFit/>
+          </a:bodyPr>
+          <a:lstStyle/>
+          <a:p>
             <a:pPr algn="r">
               <a:defRPr sz="900" b="0" i="0">
                 <a:solidFill>
-                  <a:srgbClr val="9A8A7A"/>
-                </a:solidFill>
-                <a:latin typeface="Palatino Linotype"/>
+                  <a:srgbClr val="8A7A6A"/>
+                </a:solidFill>
+                <a:latin typeface="Calibri"/>
               </a:defRPr>
             </a:pPr>
             <a:r>
@@ -5465,7 +6914,7 @@
     <p:bg>
       <p:bgPr>
         <a:solidFill>
-          <a:srgbClr val="1A0A2E"/>
+          <a:srgbClr val="120B1E"/>
         </a:solidFill>
         <a:effectLst/>
       </p:bgPr>
@@ -5479,50 +6928,14 @@
       <p:grpSpPr/>
       <p:sp>
         <p:nvSpPr>
-          <p:cNvPr id="2" name="TextBox 1"/>
-          <p:cNvSpPr txBox="1"/>
-          <p:nvPr/>
-        </p:nvSpPr>
-        <p:spPr>
-          <a:xfrm>
-            <a:off x="731520" y="274320"/>
-            <a:ext cx="7680960" cy="822960"/>
-          </a:xfrm>
-          <a:prstGeom prst="rect">
-            <a:avLst/>
-          </a:prstGeom>
-          <a:noFill/>
-        </p:spPr>
-        <p:txBody>
-          <a:bodyPr wrap="square">
-            <a:spAutoFit/>
-          </a:bodyPr>
-          <a:lstStyle/>
-          <a:p>
-            <a:pPr algn="l">
-              <a:defRPr sz="2400" b="1" i="0">
-                <a:solidFill>
-                  <a:srgbClr val="FFFFFF"/>
-                </a:solidFill>
-                <a:latin typeface="Georgia"/>
-              </a:defRPr>
-            </a:pPr>
-            <a:r>
-              <a:t>Портрет Марии Луизы де Тассис (ок. 1629–1630)</a:t>
-            </a:r>
-          </a:p>
-        </p:txBody>
-      </p:sp>
-      <p:sp>
-        <p:nvSpPr>
-          <p:cNvPr id="3" name="Rectangle 2"/>
+          <p:cNvPr id="2" name="Rectangle 1"/>
           <p:cNvSpPr/>
           <p:nvPr/>
         </p:nvSpPr>
         <p:spPr>
           <a:xfrm>
-            <a:off x="731520" y="960120"/>
-            <a:ext cx="1828800" cy="38100"/>
+            <a:off x="0" y="0"/>
+            <a:ext cx="9144000" cy="38100"/>
           </a:xfrm>
           <a:prstGeom prst="rect">
             <a:avLst/>
@@ -5558,14 +6971,81 @@
       </p:sp>
       <p:sp>
         <p:nvSpPr>
-          <p:cNvPr id="4" name="TextBox 3"/>
+          <p:cNvPr id="3" name="Rectangle 2"/>
+          <p:cNvSpPr/>
+          <p:nvPr/>
+        </p:nvSpPr>
+        <p:spPr>
+          <a:xfrm>
+            <a:off x="274320" y="548640"/>
+            <a:ext cx="3840480" cy="5943600"/>
+          </a:xfrm>
+          <a:prstGeom prst="rect">
+            <a:avLst/>
+          </a:prstGeom>
+          <a:solidFill>
+            <a:srgbClr val="1E1435"/>
+          </a:solidFill>
+          <a:ln>
+            <a:noFill/>
+          </a:ln>
+        </p:spPr>
+        <p:style>
+          <a:lnRef idx="1">
+            <a:schemeClr val="accent1"/>
+          </a:lnRef>
+          <a:fillRef idx="3">
+            <a:schemeClr val="accent1"/>
+          </a:fillRef>
+          <a:effectRef idx="2">
+            <a:schemeClr val="accent1"/>
+          </a:effectRef>
+          <a:fontRef idx="minor">
+            <a:schemeClr val="lt1"/>
+          </a:fontRef>
+        </p:style>
+        <p:txBody>
+          <a:bodyPr rtlCol="0" anchor="ctr"/>
+          <a:lstStyle/>
+          <a:p>
+            <a:pPr algn="ctr"/>
+          </a:p>
+        </p:txBody>
+      </p:sp>
+      <p:pic>
+        <p:nvPicPr>
+          <p:cNvPr id="4" name="Picture 3" descr="maria_de_tassis.jpg"/>
+          <p:cNvPicPr>
+            <a:picLocks noChangeAspect="1"/>
+          </p:cNvPicPr>
+          <p:nvPr/>
+        </p:nvPicPr>
+        <p:blipFill>
+          <a:blip r:embed="rId2"/>
+          <a:stretch>
+            <a:fillRect/>
+          </a:stretch>
+        </p:blipFill>
+        <p:spPr>
+          <a:xfrm>
+            <a:off x="457200" y="731520"/>
+            <a:ext cx="3966464" cy="5577840"/>
+          </a:xfrm>
+          <a:prstGeom prst="rect">
+            <a:avLst/>
+          </a:prstGeom>
+        </p:spPr>
+      </p:pic>
+      <p:sp>
+        <p:nvSpPr>
+          <p:cNvPr id="5" name="TextBox 4"/>
           <p:cNvSpPr txBox="1"/>
           <p:nvPr/>
         </p:nvSpPr>
         <p:spPr>
           <a:xfrm>
-            <a:off x="731520" y="1280160"/>
-            <a:ext cx="7680960" cy="5029200"/>
+            <a:off x="4389120" y="640080"/>
+            <a:ext cx="4480560" cy="822960"/>
           </a:xfrm>
           <a:prstGeom prst="rect">
             <a:avLst/>
@@ -5578,145 +7058,30 @@
           </a:bodyPr>
           <a:lstStyle/>
           <a:p>
-            <a:pPr>
-              <a:spcBef>
-                <a:spcPts val="1200"/>
-              </a:spcBef>
-              <a:defRPr sz="1400">
-                <a:solidFill>
-                  <a:srgbClr val="E8E0D0"/>
-                </a:solidFill>
-                <a:latin typeface="Palatino Linotype"/>
-              </a:defRPr>
-            </a:pPr>
-            <a:r>
-              <a:t>• Холст, масло. Коллекция князей Лихтенштейн, Вадуц</a:t>
-            </a:r>
-          </a:p>
-          <a:p>
-            <a:pPr>
-              <a:spcBef>
-                <a:spcPts val="1200"/>
-              </a:spcBef>
-              <a:defRPr sz="1400">
-                <a:solidFill>
-                  <a:srgbClr val="E8E0D0"/>
-                </a:solidFill>
-                <a:latin typeface="Palatino Linotype"/>
-              </a:defRPr>
-            </a:pPr>
-            <a:r>
-              <a:t>• Мария Луиза (1611–1638) — дочь Антонио де Тассис из Антверпена</a:t>
-            </a:r>
-          </a:p>
-          <a:p>
-            <a:pPr>
-              <a:spcBef>
-                <a:spcPts val="1200"/>
-              </a:spcBef>
-              <a:defRPr sz="1400">
-                <a:solidFill>
-                  <a:srgbClr val="E8E0D0"/>
-                </a:solidFill>
-                <a:latin typeface="Palatino Linotype"/>
-              </a:defRPr>
-            </a:pPr>
-            <a:r>
-              <a:t>• Семья де Тассис из Бергамо создала первую почтовую систему Европы</a:t>
-            </a:r>
-          </a:p>
-          <a:p>
-            <a:pPr>
-              <a:spcBef>
-                <a:spcPts val="1200"/>
-              </a:spcBef>
-              <a:defRPr sz="1400">
-                <a:solidFill>
-                  <a:srgbClr val="E8E0D0"/>
-                </a:solidFill>
-                <a:latin typeface="Palatino Linotype"/>
-              </a:defRPr>
-            </a:pPr>
-            <a:r>
-              <a:t>  в конце XV века (ныне известна как Thurn und Taxis)</a:t>
-            </a:r>
-          </a:p>
-          <a:p>
-            <a:pPr>
-              <a:spcBef>
-                <a:spcPts val="1200"/>
-              </a:spcBef>
-              <a:defRPr sz="1400">
-                <a:solidFill>
-                  <a:srgbClr val="E8E0D0"/>
-                </a:solidFill>
-                <a:latin typeface="Palatino Linotype"/>
-              </a:defRPr>
-            </a:pPr>
-            <a:r>
-              <a:t>• Изображена в возрасте около 19 лет</a:t>
-            </a:r>
-          </a:p>
-          <a:p>
-            <a:pPr>
-              <a:spcBef>
-                <a:spcPts val="1200"/>
-              </a:spcBef>
-              <a:defRPr sz="1400">
-                <a:solidFill>
-                  <a:srgbClr val="E8E0D0"/>
-                </a:solidFill>
-                <a:latin typeface="Palatino Linotype"/>
-              </a:defRPr>
-            </a:pPr>
-            <a:r>
-              <a:t>• Изысканный барочный женский портрет: богатое платье, кружева,</a:t>
-            </a:r>
-          </a:p>
-          <a:p>
-            <a:pPr>
-              <a:spcBef>
-                <a:spcPts val="1200"/>
-              </a:spcBef>
-              <a:defRPr sz="1400">
-                <a:solidFill>
-                  <a:srgbClr val="E8E0D0"/>
-                </a:solidFill>
-                <a:latin typeface="Palatino Linotype"/>
-              </a:defRPr>
-            </a:pPr>
-            <a:r>
-              <a:t>  жемчуг и утончённые черты молодой аристократки</a:t>
-            </a:r>
-          </a:p>
-          <a:p>
-            <a:pPr>
-              <a:spcBef>
-                <a:spcPts val="1200"/>
-              </a:spcBef>
-              <a:defRPr sz="1400">
-                <a:solidFill>
-                  <a:srgbClr val="E8E0D0"/>
-                </a:solidFill>
-                <a:latin typeface="Palatino Linotype"/>
-              </a:defRPr>
-            </a:pPr>
-            <a:r>
-              <a:t>• Яркий пример мастерства Ван Дейка в передаче тканей и украшений</a:t>
-            </a:r>
-          </a:p>
-        </p:txBody>
-      </p:sp>
-      <p:sp>
-        <p:nvSpPr>
-          <p:cNvPr id="5" name="TextBox 4"/>
+            <a:pPr algn="l">
+              <a:defRPr sz="2000" b="1" i="0">
+                <a:solidFill>
+                  <a:srgbClr val="FFFFFF"/>
+                </a:solidFill>
+                <a:latin typeface="Georgia"/>
+              </a:defRPr>
+            </a:pPr>
+            <a:r>
+              <a:t>Портрет Марии Луизы де Тассис</a:t>
+            </a:r>
+          </a:p>
+        </p:txBody>
+      </p:sp>
+      <p:sp>
+        <p:nvSpPr>
+          <p:cNvPr id="6" name="TextBox 5"/>
           <p:cNvSpPr txBox="1"/>
           <p:nvPr/>
         </p:nvSpPr>
         <p:spPr>
           <a:xfrm>
-            <a:off x="8412480" y="6400800"/>
-            <a:ext cx="548640" cy="365760"/>
+            <a:off x="4389120" y="1371600"/>
+            <a:ext cx="4480560" cy="365760"/>
           </a:xfrm>
           <a:prstGeom prst="rect">
             <a:avLst/>
@@ -5729,12 +7094,313 @@
           </a:bodyPr>
           <a:lstStyle/>
           <a:p>
+            <a:pPr algn="l">
+              <a:defRPr sz="1300" b="0" i="1">
+                <a:solidFill>
+                  <a:srgbClr val="E8C56D"/>
+                </a:solidFill>
+                <a:latin typeface="Calibri"/>
+              </a:defRPr>
+            </a:pPr>
+            <a:r>
+              <a:t>Ок. 1629–1630 • Холст, масло</a:t>
+            </a:r>
+          </a:p>
+        </p:txBody>
+      </p:sp>
+      <p:sp>
+        <p:nvSpPr>
+          <p:cNvPr id="7" name="Rectangle 6"/>
+          <p:cNvSpPr/>
+          <p:nvPr/>
+        </p:nvSpPr>
+        <p:spPr>
+          <a:xfrm>
+            <a:off x="4389120" y="1783080"/>
+            <a:ext cx="1371600" cy="25400"/>
+          </a:xfrm>
+          <a:prstGeom prst="rect">
+            <a:avLst/>
+          </a:prstGeom>
+          <a:solidFill>
+            <a:srgbClr val="C99A2E"/>
+          </a:solidFill>
+          <a:ln>
+            <a:noFill/>
+          </a:ln>
+        </p:spPr>
+        <p:style>
+          <a:lnRef idx="1">
+            <a:schemeClr val="accent1"/>
+          </a:lnRef>
+          <a:fillRef idx="3">
+            <a:schemeClr val="accent1"/>
+          </a:fillRef>
+          <a:effectRef idx="2">
+            <a:schemeClr val="accent1"/>
+          </a:effectRef>
+          <a:fontRef idx="minor">
+            <a:schemeClr val="lt1"/>
+          </a:fontRef>
+        </p:style>
+        <p:txBody>
+          <a:bodyPr rtlCol="0" anchor="ctr"/>
+          <a:lstStyle/>
+          <a:p>
+            <a:pPr algn="ctr"/>
+          </a:p>
+        </p:txBody>
+      </p:sp>
+      <p:sp>
+        <p:nvSpPr>
+          <p:cNvPr id="8" name="TextBox 7"/>
+          <p:cNvSpPr txBox="1"/>
+          <p:nvPr/>
+        </p:nvSpPr>
+        <p:spPr>
+          <a:xfrm>
+            <a:off x="4389120" y="2011680"/>
+            <a:ext cx="4480560" cy="4389120"/>
+          </a:xfrm>
+          <a:prstGeom prst="rect">
+            <a:avLst/>
+          </a:prstGeom>
+          <a:noFill/>
+        </p:spPr>
+        <p:txBody>
+          <a:bodyPr wrap="square">
+            <a:spAutoFit/>
+          </a:bodyPr>
+          <a:lstStyle/>
+          <a:p>
+            <a:pPr>
+              <a:spcBef>
+                <a:spcPts val="1000"/>
+              </a:spcBef>
+              <a:defRPr sz="1200">
+                <a:solidFill>
+                  <a:srgbClr val="E8E0D0"/>
+                </a:solidFill>
+                <a:latin typeface="Calibri"/>
+              </a:defRPr>
+            </a:pPr>
+            <a:r>
+              <a:t>Коллекция князей Лихтенштейн, Вадуц</a:t>
+            </a:r>
+          </a:p>
+          <a:p>
+            <a:pPr>
+              <a:spcBef>
+                <a:spcPts val="1000"/>
+              </a:spcBef>
+              <a:defRPr sz="1200">
+                <a:solidFill>
+                  <a:srgbClr val="E8E0D0"/>
+                </a:solidFill>
+                <a:latin typeface="Calibri"/>
+              </a:defRPr>
+            </a:pPr>
+          </a:p>
+          <a:p>
+            <a:pPr>
+              <a:spcBef>
+                <a:spcPts val="1000"/>
+              </a:spcBef>
+              <a:defRPr sz="1200">
+                <a:solidFill>
+                  <a:srgbClr val="E8E0D0"/>
+                </a:solidFill>
+                <a:latin typeface="Calibri"/>
+              </a:defRPr>
+            </a:pPr>
+            <a:r>
+              <a:t>Мария Луиза (1611–1638) — дочь Антонио де</a:t>
+            </a:r>
+          </a:p>
+          <a:p>
+            <a:pPr>
+              <a:spcBef>
+                <a:spcPts val="1000"/>
+              </a:spcBef>
+              <a:defRPr sz="1200">
+                <a:solidFill>
+                  <a:srgbClr val="E8E0D0"/>
+                </a:solidFill>
+                <a:latin typeface="Calibri"/>
+              </a:defRPr>
+            </a:pPr>
+            <a:r>
+              <a:t>Тассис из Антверпена. Семья де Тассис</a:t>
+            </a:r>
+          </a:p>
+          <a:p>
+            <a:pPr>
+              <a:spcBef>
+                <a:spcPts val="1000"/>
+              </a:spcBef>
+              <a:defRPr sz="1200">
+                <a:solidFill>
+                  <a:srgbClr val="E8E0D0"/>
+                </a:solidFill>
+                <a:latin typeface="Calibri"/>
+              </a:defRPr>
+            </a:pPr>
+            <a:r>
+              <a:t>создала первую почтовую систему Европы</a:t>
+            </a:r>
+          </a:p>
+          <a:p>
+            <a:pPr>
+              <a:spcBef>
+                <a:spcPts val="1000"/>
+              </a:spcBef>
+              <a:defRPr sz="1200">
+                <a:solidFill>
+                  <a:srgbClr val="E8E0D0"/>
+                </a:solidFill>
+                <a:latin typeface="Calibri"/>
+              </a:defRPr>
+            </a:pPr>
+            <a:r>
+              <a:t>(ныне Thurn und Taxis).</a:t>
+            </a:r>
+          </a:p>
+          <a:p>
+            <a:pPr>
+              <a:spcBef>
+                <a:spcPts val="1000"/>
+              </a:spcBef>
+              <a:defRPr sz="1200">
+                <a:solidFill>
+                  <a:srgbClr val="E8E0D0"/>
+                </a:solidFill>
+                <a:latin typeface="Calibri"/>
+              </a:defRPr>
+            </a:pPr>
+          </a:p>
+          <a:p>
+            <a:pPr>
+              <a:spcBef>
+                <a:spcPts val="1000"/>
+              </a:spcBef>
+              <a:defRPr sz="1200">
+                <a:solidFill>
+                  <a:srgbClr val="E8E0D0"/>
+                </a:solidFill>
+                <a:latin typeface="Calibri"/>
+              </a:defRPr>
+            </a:pPr>
+            <a:r>
+              <a:t>Изображена в возрасте около 19 лет.</a:t>
+            </a:r>
+          </a:p>
+          <a:p>
+            <a:pPr>
+              <a:spcBef>
+                <a:spcPts val="1000"/>
+              </a:spcBef>
+              <a:defRPr sz="1200">
+                <a:solidFill>
+                  <a:srgbClr val="E8E0D0"/>
+                </a:solidFill>
+                <a:latin typeface="Calibri"/>
+              </a:defRPr>
+            </a:pPr>
+            <a:r>
+              <a:t>Роскошное платье, кружева, жемчуг —</a:t>
+            </a:r>
+          </a:p>
+          <a:p>
+            <a:pPr>
+              <a:spcBef>
+                <a:spcPts val="1000"/>
+              </a:spcBef>
+              <a:defRPr sz="1200">
+                <a:solidFill>
+                  <a:srgbClr val="E8E0D0"/>
+                </a:solidFill>
+                <a:latin typeface="Calibri"/>
+              </a:defRPr>
+            </a:pPr>
+            <a:r>
+              <a:t>утончённая красота молодой аристократки.</a:t>
+            </a:r>
+          </a:p>
+          <a:p>
+            <a:pPr>
+              <a:spcBef>
+                <a:spcPts val="1000"/>
+              </a:spcBef>
+              <a:defRPr sz="1200">
+                <a:solidFill>
+                  <a:srgbClr val="E8E0D0"/>
+                </a:solidFill>
+                <a:latin typeface="Calibri"/>
+              </a:defRPr>
+            </a:pPr>
+          </a:p>
+          <a:p>
+            <a:pPr>
+              <a:spcBef>
+                <a:spcPts val="1000"/>
+              </a:spcBef>
+              <a:defRPr sz="1200">
+                <a:solidFill>
+                  <a:srgbClr val="E8E0D0"/>
+                </a:solidFill>
+                <a:latin typeface="Calibri"/>
+              </a:defRPr>
+            </a:pPr>
+            <a:r>
+              <a:t>Эталон мастерства в передаче тканей,</a:t>
+            </a:r>
+          </a:p>
+          <a:p>
+            <a:pPr>
+              <a:spcBef>
+                <a:spcPts val="1000"/>
+              </a:spcBef>
+              <a:defRPr sz="1200">
+                <a:solidFill>
+                  <a:srgbClr val="E8E0D0"/>
+                </a:solidFill>
+                <a:latin typeface="Calibri"/>
+              </a:defRPr>
+            </a:pPr>
+            <a:r>
+              <a:t>украшений и женственности.</a:t>
+            </a:r>
+          </a:p>
+        </p:txBody>
+      </p:sp>
+      <p:sp>
+        <p:nvSpPr>
+          <p:cNvPr id="9" name="TextBox 8"/>
+          <p:cNvSpPr txBox="1"/>
+          <p:nvPr/>
+        </p:nvSpPr>
+        <p:spPr>
+          <a:xfrm>
+            <a:off x="8503920" y="6446520"/>
+            <a:ext cx="457200" cy="274320"/>
+          </a:xfrm>
+          <a:prstGeom prst="rect">
+            <a:avLst/>
+          </a:prstGeom>
+          <a:noFill/>
+        </p:spPr>
+        <p:txBody>
+          <a:bodyPr wrap="square">
+            <a:spAutoFit/>
+          </a:bodyPr>
+          <a:lstStyle/>
+          <a:p>
             <a:pPr algn="r">
               <a:defRPr sz="900" b="0" i="0">
                 <a:solidFill>
-                  <a:srgbClr val="9A8A7A"/>
-                </a:solidFill>
-                <a:latin typeface="Palatino Linotype"/>
+                  <a:srgbClr val="8A7A6A"/>
+                </a:solidFill>
+                <a:latin typeface="Calibri"/>
               </a:defRPr>
             </a:pPr>
             <a:r>
@@ -5757,7 +7423,7 @@
     <p:bg>
       <p:bgPr>
         <a:solidFill>
-          <a:srgbClr val="1A0A2E"/>
+          <a:srgbClr val="120B1E"/>
         </a:solidFill>
         <a:effectLst/>
       </p:bgPr>
@@ -5771,50 +7437,14 @@
       <p:grpSpPr/>
       <p:sp>
         <p:nvSpPr>
-          <p:cNvPr id="2" name="TextBox 1"/>
-          <p:cNvSpPr txBox="1"/>
-          <p:nvPr/>
-        </p:nvSpPr>
-        <p:spPr>
-          <a:xfrm>
-            <a:off x="731520" y="274320"/>
-            <a:ext cx="7680960" cy="822960"/>
-          </a:xfrm>
-          <a:prstGeom prst="rect">
-            <a:avLst/>
-          </a:prstGeom>
-          <a:noFill/>
-        </p:spPr>
-        <p:txBody>
-          <a:bodyPr wrap="square">
-            <a:spAutoFit/>
-          </a:bodyPr>
-          <a:lstStyle/>
-          <a:p>
-            <a:pPr algn="l">
-              <a:defRPr sz="2400" b="1" i="0">
-                <a:solidFill>
-                  <a:srgbClr val="FFFFFF"/>
-                </a:solidFill>
-                <a:latin typeface="Georgia"/>
-              </a:defRPr>
-            </a:pPr>
-            <a:r>
-              <a:t>Портрет сэра Томаса Чалонера (конец 1630-х)</a:t>
-            </a:r>
-          </a:p>
-        </p:txBody>
-      </p:sp>
-      <p:sp>
-        <p:nvSpPr>
-          <p:cNvPr id="3" name="Rectangle 2"/>
+          <p:cNvPr id="2" name="Rectangle 1"/>
           <p:cNvSpPr/>
           <p:nvPr/>
         </p:nvSpPr>
         <p:spPr>
           <a:xfrm>
-            <a:off x="731520" y="960120"/>
-            <a:ext cx="1828800" cy="38100"/>
+            <a:off x="0" y="0"/>
+            <a:ext cx="9144000" cy="38100"/>
           </a:xfrm>
           <a:prstGeom prst="rect">
             <a:avLst/>
@@ -5850,14 +7480,81 @@
       </p:sp>
       <p:sp>
         <p:nvSpPr>
-          <p:cNvPr id="4" name="TextBox 3"/>
+          <p:cNvPr id="3" name="Rectangle 2"/>
+          <p:cNvSpPr/>
+          <p:nvPr/>
+        </p:nvSpPr>
+        <p:spPr>
+          <a:xfrm>
+            <a:off x="274320" y="548640"/>
+            <a:ext cx="3840480" cy="5943600"/>
+          </a:xfrm>
+          <a:prstGeom prst="rect">
+            <a:avLst/>
+          </a:prstGeom>
+          <a:solidFill>
+            <a:srgbClr val="1E1435"/>
+          </a:solidFill>
+          <a:ln>
+            <a:noFill/>
+          </a:ln>
+        </p:spPr>
+        <p:style>
+          <a:lnRef idx="1">
+            <a:schemeClr val="accent1"/>
+          </a:lnRef>
+          <a:fillRef idx="3">
+            <a:schemeClr val="accent1"/>
+          </a:fillRef>
+          <a:effectRef idx="2">
+            <a:schemeClr val="accent1"/>
+          </a:effectRef>
+          <a:fontRef idx="minor">
+            <a:schemeClr val="lt1"/>
+          </a:fontRef>
+        </p:style>
+        <p:txBody>
+          <a:bodyPr rtlCol="0" anchor="ctr"/>
+          <a:lstStyle/>
+          <a:p>
+            <a:pPr algn="ctr"/>
+          </a:p>
+        </p:txBody>
+      </p:sp>
+      <p:pic>
+        <p:nvPicPr>
+          <p:cNvPr id="4" name="Picture 3" descr="chaloner.jpg"/>
+          <p:cNvPicPr>
+            <a:picLocks noChangeAspect="1"/>
+          </p:cNvPicPr>
+          <p:nvPr/>
+        </p:nvPicPr>
+        <p:blipFill>
+          <a:blip r:embed="rId2"/>
+          <a:stretch>
+            <a:fillRect/>
+          </a:stretch>
+        </p:blipFill>
+        <p:spPr>
+          <a:xfrm>
+            <a:off x="457200" y="731520"/>
+            <a:ext cx="4321813" cy="5577840"/>
+          </a:xfrm>
+          <a:prstGeom prst="rect">
+            <a:avLst/>
+          </a:prstGeom>
+        </p:spPr>
+      </p:pic>
+      <p:sp>
+        <p:nvSpPr>
+          <p:cNvPr id="5" name="TextBox 4"/>
           <p:cNvSpPr txBox="1"/>
           <p:nvPr/>
         </p:nvSpPr>
         <p:spPr>
           <a:xfrm>
-            <a:off x="731520" y="1280160"/>
-            <a:ext cx="7680960" cy="5029200"/>
+            <a:off x="4389120" y="640080"/>
+            <a:ext cx="4480560" cy="822960"/>
           </a:xfrm>
           <a:prstGeom prst="rect">
             <a:avLst/>
@@ -5870,161 +7567,30 @@
           </a:bodyPr>
           <a:lstStyle/>
           <a:p>
-            <a:pPr>
-              <a:spcBef>
-                <a:spcPts val="1200"/>
-              </a:spcBef>
-              <a:defRPr sz="1400">
-                <a:solidFill>
-                  <a:srgbClr val="E8E0D0"/>
-                </a:solidFill>
-                <a:latin typeface="Palatino Linotype"/>
-              </a:defRPr>
-            </a:pPr>
-            <a:r>
-              <a:t>• Холст, масло. Государственный Эрмитаж, Санкт-Петербург</a:t>
-            </a:r>
-          </a:p>
-          <a:p>
-            <a:pPr>
-              <a:spcBef>
-                <a:spcPts val="1200"/>
-              </a:spcBef>
-              <a:defRPr sz="1400">
-                <a:solidFill>
-                  <a:srgbClr val="E8E0D0"/>
-                </a:solidFill>
-                <a:latin typeface="Palatino Linotype"/>
-              </a:defRPr>
-            </a:pPr>
-            <a:r>
-              <a:t>• Одна из последних работ Ван Дейка</a:t>
-            </a:r>
-          </a:p>
-          <a:p>
-            <a:pPr>
-              <a:spcBef>
-                <a:spcPts val="1200"/>
-              </a:spcBef>
-              <a:defRPr sz="1400">
-                <a:solidFill>
-                  <a:srgbClr val="E8E0D0"/>
-                </a:solidFill>
-                <a:latin typeface="Palatino Linotype"/>
-              </a:defRPr>
-            </a:pPr>
-            <a:r>
-              <a:t>• Сэр Томас Чалонер — английский придворный при Карле I</a:t>
-            </a:r>
-          </a:p>
-          <a:p>
-            <a:pPr>
-              <a:spcBef>
-                <a:spcPts val="1200"/>
-              </a:spcBef>
-              <a:defRPr sz="1400">
-                <a:solidFill>
-                  <a:srgbClr val="E8E0D0"/>
-                </a:solidFill>
-                <a:latin typeface="Palatino Linotype"/>
-              </a:defRPr>
-            </a:pPr>
-            <a:r>
-              <a:t>• Художник с мастерством передаёт стареющее лицо с дряблой кожей</a:t>
-            </a:r>
-          </a:p>
-          <a:p>
-            <a:pPr>
-              <a:spcBef>
-                <a:spcPts val="1200"/>
-              </a:spcBef>
-              <a:defRPr sz="1400">
-                <a:solidFill>
-                  <a:srgbClr val="E8E0D0"/>
-                </a:solidFill>
-                <a:latin typeface="Palatino Linotype"/>
-              </a:defRPr>
-            </a:pPr>
-            <a:r>
-              <a:t>  и румянцем на щеках — честная, без лести, характеристика</a:t>
-            </a:r>
-          </a:p>
-          <a:p>
-            <a:pPr>
-              <a:spcBef>
-                <a:spcPts val="1200"/>
-              </a:spcBef>
-              <a:defRPr sz="1400">
-                <a:solidFill>
-                  <a:srgbClr val="E8E0D0"/>
-                </a:solidFill>
-                <a:latin typeface="Palatino Linotype"/>
-              </a:defRPr>
-            </a:pPr>
-            <a:r>
-              <a:t>• Считается одним из лучших полотен позднего периода</a:t>
-            </a:r>
-          </a:p>
-          <a:p>
-            <a:pPr>
-              <a:spcBef>
-                <a:spcPts val="1200"/>
-              </a:spcBef>
-              <a:defRPr sz="1400">
-                <a:solidFill>
-                  <a:srgbClr val="E8E0D0"/>
-                </a:solidFill>
-                <a:latin typeface="Palatino Linotype"/>
-              </a:defRPr>
-            </a:pPr>
-            <a:r>
-              <a:t>• Глубокий психологизм: зритель ощущает характер и жизненный</a:t>
-            </a:r>
-          </a:p>
-          <a:p>
-            <a:pPr>
-              <a:spcBef>
-                <a:spcPts val="1200"/>
-              </a:spcBef>
-              <a:defRPr sz="1400">
-                <a:solidFill>
-                  <a:srgbClr val="E8E0D0"/>
-                </a:solidFill>
-                <a:latin typeface="Palatino Linotype"/>
-              </a:defRPr>
-            </a:pPr>
-            <a:r>
-              <a:t>  опыт изображённого человека</a:t>
-            </a:r>
-          </a:p>
-          <a:p>
-            <a:pPr>
-              <a:spcBef>
-                <a:spcPts val="1200"/>
-              </a:spcBef>
-              <a:defRPr sz="1400">
-                <a:solidFill>
-                  <a:srgbClr val="E8E0D0"/>
-                </a:solidFill>
-                <a:latin typeface="Palatino Linotype"/>
-              </a:defRPr>
-            </a:pPr>
-            <a:r>
-              <a:t>• Свободная, уверенная манера письма зрелого мастера</a:t>
-            </a:r>
-          </a:p>
-        </p:txBody>
-      </p:sp>
-      <p:sp>
-        <p:nvSpPr>
-          <p:cNvPr id="5" name="TextBox 4"/>
+            <a:pPr algn="l">
+              <a:defRPr sz="2000" b="1" i="0">
+                <a:solidFill>
+                  <a:srgbClr val="FFFFFF"/>
+                </a:solidFill>
+                <a:latin typeface="Georgia"/>
+              </a:defRPr>
+            </a:pPr>
+            <a:r>
+              <a:t>Портрет сэра Томаса Чалонера</a:t>
+            </a:r>
+          </a:p>
+        </p:txBody>
+      </p:sp>
+      <p:sp>
+        <p:nvSpPr>
+          <p:cNvPr id="6" name="TextBox 5"/>
           <p:cNvSpPr txBox="1"/>
           <p:nvPr/>
         </p:nvSpPr>
         <p:spPr>
           <a:xfrm>
-            <a:off x="8412480" y="6400800"/>
-            <a:ext cx="548640" cy="365760"/>
+            <a:off x="4389120" y="1371600"/>
+            <a:ext cx="4480560" cy="365760"/>
           </a:xfrm>
           <a:prstGeom prst="rect">
             <a:avLst/>
@@ -6037,12 +7603,297 @@
           </a:bodyPr>
           <a:lstStyle/>
           <a:p>
+            <a:pPr algn="l">
+              <a:defRPr sz="1300" b="0" i="1">
+                <a:solidFill>
+                  <a:srgbClr val="E8C56D"/>
+                </a:solidFill>
+                <a:latin typeface="Calibri"/>
+              </a:defRPr>
+            </a:pPr>
+            <a:r>
+              <a:t>Конец 1630-х • Холст, масло</a:t>
+            </a:r>
+          </a:p>
+        </p:txBody>
+      </p:sp>
+      <p:sp>
+        <p:nvSpPr>
+          <p:cNvPr id="7" name="Rectangle 6"/>
+          <p:cNvSpPr/>
+          <p:nvPr/>
+        </p:nvSpPr>
+        <p:spPr>
+          <a:xfrm>
+            <a:off x="4389120" y="1783080"/>
+            <a:ext cx="1371600" cy="25400"/>
+          </a:xfrm>
+          <a:prstGeom prst="rect">
+            <a:avLst/>
+          </a:prstGeom>
+          <a:solidFill>
+            <a:srgbClr val="C99A2E"/>
+          </a:solidFill>
+          <a:ln>
+            <a:noFill/>
+          </a:ln>
+        </p:spPr>
+        <p:style>
+          <a:lnRef idx="1">
+            <a:schemeClr val="accent1"/>
+          </a:lnRef>
+          <a:fillRef idx="3">
+            <a:schemeClr val="accent1"/>
+          </a:fillRef>
+          <a:effectRef idx="2">
+            <a:schemeClr val="accent1"/>
+          </a:effectRef>
+          <a:fontRef idx="minor">
+            <a:schemeClr val="lt1"/>
+          </a:fontRef>
+        </p:style>
+        <p:txBody>
+          <a:bodyPr rtlCol="0" anchor="ctr"/>
+          <a:lstStyle/>
+          <a:p>
+            <a:pPr algn="ctr"/>
+          </a:p>
+        </p:txBody>
+      </p:sp>
+      <p:sp>
+        <p:nvSpPr>
+          <p:cNvPr id="8" name="TextBox 7"/>
+          <p:cNvSpPr txBox="1"/>
+          <p:nvPr/>
+        </p:nvSpPr>
+        <p:spPr>
+          <a:xfrm>
+            <a:off x="4389120" y="2011680"/>
+            <a:ext cx="4480560" cy="4389120"/>
+          </a:xfrm>
+          <a:prstGeom prst="rect">
+            <a:avLst/>
+          </a:prstGeom>
+          <a:noFill/>
+        </p:spPr>
+        <p:txBody>
+          <a:bodyPr wrap="square">
+            <a:spAutoFit/>
+          </a:bodyPr>
+          <a:lstStyle/>
+          <a:p>
+            <a:pPr>
+              <a:spcBef>
+                <a:spcPts val="1000"/>
+              </a:spcBef>
+              <a:defRPr sz="1200">
+                <a:solidFill>
+                  <a:srgbClr val="E8E0D0"/>
+                </a:solidFill>
+                <a:latin typeface="Calibri"/>
+              </a:defRPr>
+            </a:pPr>
+            <a:r>
+              <a:t>Государственный Эрмитаж, Санкт-Петербург</a:t>
+            </a:r>
+          </a:p>
+          <a:p>
+            <a:pPr>
+              <a:spcBef>
+                <a:spcPts val="1000"/>
+              </a:spcBef>
+              <a:defRPr sz="1200">
+                <a:solidFill>
+                  <a:srgbClr val="E8E0D0"/>
+                </a:solidFill>
+                <a:latin typeface="Calibri"/>
+              </a:defRPr>
+            </a:pPr>
+          </a:p>
+          <a:p>
+            <a:pPr>
+              <a:spcBef>
+                <a:spcPts val="1000"/>
+              </a:spcBef>
+              <a:defRPr sz="1200">
+                <a:solidFill>
+                  <a:srgbClr val="E8E0D0"/>
+                </a:solidFill>
+                <a:latin typeface="Calibri"/>
+              </a:defRPr>
+            </a:pPr>
+            <a:r>
+              <a:t>Одна из последних работ мастера. Сэр Томас</a:t>
+            </a:r>
+          </a:p>
+          <a:p>
+            <a:pPr>
+              <a:spcBef>
+                <a:spcPts val="1000"/>
+              </a:spcBef>
+              <a:defRPr sz="1200">
+                <a:solidFill>
+                  <a:srgbClr val="E8E0D0"/>
+                </a:solidFill>
+                <a:latin typeface="Calibri"/>
+              </a:defRPr>
+            </a:pPr>
+            <a:r>
+              <a:t>Чалонер — английский придворный при Карле I.</a:t>
+            </a:r>
+          </a:p>
+          <a:p>
+            <a:pPr>
+              <a:spcBef>
+                <a:spcPts val="1000"/>
+              </a:spcBef>
+              <a:defRPr sz="1200">
+                <a:solidFill>
+                  <a:srgbClr val="E8E0D0"/>
+                </a:solidFill>
+                <a:latin typeface="Calibri"/>
+              </a:defRPr>
+            </a:pPr>
+          </a:p>
+          <a:p>
+            <a:pPr>
+              <a:spcBef>
+                <a:spcPts val="1000"/>
+              </a:spcBef>
+              <a:defRPr sz="1200">
+                <a:solidFill>
+                  <a:srgbClr val="E8E0D0"/>
+                </a:solidFill>
+                <a:latin typeface="Calibri"/>
+              </a:defRPr>
+            </a:pPr>
+            <a:r>
+              <a:t>Художник с поразительной честностью передаёт</a:t>
+            </a:r>
+          </a:p>
+          <a:p>
+            <a:pPr>
+              <a:spcBef>
+                <a:spcPts val="1000"/>
+              </a:spcBef>
+              <a:defRPr sz="1200">
+                <a:solidFill>
+                  <a:srgbClr val="E8E0D0"/>
+                </a:solidFill>
+                <a:latin typeface="Calibri"/>
+              </a:defRPr>
+            </a:pPr>
+            <a:r>
+              <a:t>стареющее лицо: дряблая кожа, румянец —</a:t>
+            </a:r>
+          </a:p>
+          <a:p>
+            <a:pPr>
+              <a:spcBef>
+                <a:spcPts val="1000"/>
+              </a:spcBef>
+              <a:defRPr sz="1200">
+                <a:solidFill>
+                  <a:srgbClr val="E8E0D0"/>
+                </a:solidFill>
+                <a:latin typeface="Calibri"/>
+              </a:defRPr>
+            </a:pPr>
+            <a:r>
+              <a:t>без лести, глубокий психологизм.</a:t>
+            </a:r>
+          </a:p>
+          <a:p>
+            <a:pPr>
+              <a:spcBef>
+                <a:spcPts val="1000"/>
+              </a:spcBef>
+              <a:defRPr sz="1200">
+                <a:solidFill>
+                  <a:srgbClr val="E8E0D0"/>
+                </a:solidFill>
+                <a:latin typeface="Calibri"/>
+              </a:defRPr>
+            </a:pPr>
+          </a:p>
+          <a:p>
+            <a:pPr>
+              <a:spcBef>
+                <a:spcPts val="1000"/>
+              </a:spcBef>
+              <a:defRPr sz="1200">
+                <a:solidFill>
+                  <a:srgbClr val="E8E0D0"/>
+                </a:solidFill>
+                <a:latin typeface="Calibri"/>
+              </a:defRPr>
+            </a:pPr>
+            <a:r>
+              <a:t>Считается одним из лучших полотен позднего</a:t>
+            </a:r>
+          </a:p>
+          <a:p>
+            <a:pPr>
+              <a:spcBef>
+                <a:spcPts val="1000"/>
+              </a:spcBef>
+              <a:defRPr sz="1200">
+                <a:solidFill>
+                  <a:srgbClr val="E8E0D0"/>
+                </a:solidFill>
+                <a:latin typeface="Calibri"/>
+              </a:defRPr>
+            </a:pPr>
+            <a:r>
+              <a:t>периода. Свободная, уверенная манера</a:t>
+            </a:r>
+          </a:p>
+          <a:p>
+            <a:pPr>
+              <a:spcBef>
+                <a:spcPts val="1000"/>
+              </a:spcBef>
+              <a:defRPr sz="1200">
+                <a:solidFill>
+                  <a:srgbClr val="E8E0D0"/>
+                </a:solidFill>
+                <a:latin typeface="Calibri"/>
+              </a:defRPr>
+            </a:pPr>
+            <a:r>
+              <a:t>письма зрелого мастера.</a:t>
+            </a:r>
+          </a:p>
+        </p:txBody>
+      </p:sp>
+      <p:sp>
+        <p:nvSpPr>
+          <p:cNvPr id="9" name="TextBox 8"/>
+          <p:cNvSpPr txBox="1"/>
+          <p:nvPr/>
+        </p:nvSpPr>
+        <p:spPr>
+          <a:xfrm>
+            <a:off x="8503920" y="6446520"/>
+            <a:ext cx="457200" cy="274320"/>
+          </a:xfrm>
+          <a:prstGeom prst="rect">
+            <a:avLst/>
+          </a:prstGeom>
+          <a:noFill/>
+        </p:spPr>
+        <p:txBody>
+          <a:bodyPr wrap="square">
+            <a:spAutoFit/>
+          </a:bodyPr>
+          <a:lstStyle/>
+          <a:p>
             <a:pPr algn="r">
               <a:defRPr sz="900" b="0" i="0">
                 <a:solidFill>
-                  <a:srgbClr val="9A8A7A"/>
-                </a:solidFill>
-                <a:latin typeface="Palatino Linotype"/>
+                  <a:srgbClr val="8A7A6A"/>
+                </a:solidFill>
+                <a:latin typeface="Calibri"/>
               </a:defRPr>
             </a:pPr>
             <a:r>
@@ -6065,7 +7916,7 @@
     <p:bg>
       <p:bgPr>
         <a:solidFill>
-          <a:srgbClr val="1A0A2E"/>
+          <a:srgbClr val="120B1E"/>
         </a:solidFill>
         <a:effectLst/>
       </p:bgPr>
@@ -6079,50 +7930,14 @@
       <p:grpSpPr/>
       <p:sp>
         <p:nvSpPr>
-          <p:cNvPr id="2" name="TextBox 1"/>
-          <p:cNvSpPr txBox="1"/>
-          <p:nvPr/>
-        </p:nvSpPr>
-        <p:spPr>
-          <a:xfrm>
-            <a:off x="731520" y="274320"/>
-            <a:ext cx="7680960" cy="822960"/>
-          </a:xfrm>
-          <a:prstGeom prst="rect">
-            <a:avLst/>
-          </a:prstGeom>
-          <a:noFill/>
-        </p:spPr>
-        <p:txBody>
-          <a:bodyPr wrap="square">
-            <a:spAutoFit/>
-          </a:bodyPr>
-          <a:lstStyle/>
-          <a:p>
-            <a:pPr algn="l">
-              <a:defRPr sz="2400" b="1" i="0">
-                <a:solidFill>
-                  <a:srgbClr val="FFFFFF"/>
-                </a:solidFill>
-                <a:latin typeface="Georgia"/>
-              </a:defRPr>
-            </a:pPr>
-            <a:r>
-              <a:t>Портрет Карла I на охоте (ок. 1635)</a:t>
-            </a:r>
-          </a:p>
-        </p:txBody>
-      </p:sp>
-      <p:sp>
-        <p:nvSpPr>
-          <p:cNvPr id="3" name="Rectangle 2"/>
+          <p:cNvPr id="2" name="Rectangle 1"/>
           <p:cNvSpPr/>
           <p:nvPr/>
         </p:nvSpPr>
         <p:spPr>
           <a:xfrm>
-            <a:off x="731520" y="960120"/>
-            <a:ext cx="1828800" cy="38100"/>
+            <a:off x="0" y="0"/>
+            <a:ext cx="9144000" cy="38100"/>
           </a:xfrm>
           <a:prstGeom prst="rect">
             <a:avLst/>
@@ -6158,14 +7973,81 @@
       </p:sp>
       <p:sp>
         <p:nvSpPr>
-          <p:cNvPr id="4" name="TextBox 3"/>
+          <p:cNvPr id="3" name="Rectangle 2"/>
+          <p:cNvSpPr/>
+          <p:nvPr/>
+        </p:nvSpPr>
+        <p:spPr>
+          <a:xfrm>
+            <a:off x="274320" y="548640"/>
+            <a:ext cx="3840480" cy="5943600"/>
+          </a:xfrm>
+          <a:prstGeom prst="rect">
+            <a:avLst/>
+          </a:prstGeom>
+          <a:solidFill>
+            <a:srgbClr val="1E1435"/>
+          </a:solidFill>
+          <a:ln>
+            <a:noFill/>
+          </a:ln>
+        </p:spPr>
+        <p:style>
+          <a:lnRef idx="1">
+            <a:schemeClr val="accent1"/>
+          </a:lnRef>
+          <a:fillRef idx="3">
+            <a:schemeClr val="accent1"/>
+          </a:fillRef>
+          <a:effectRef idx="2">
+            <a:schemeClr val="accent1"/>
+          </a:effectRef>
+          <a:fontRef idx="minor">
+            <a:schemeClr val="lt1"/>
+          </a:fontRef>
+        </p:style>
+        <p:txBody>
+          <a:bodyPr rtlCol="0" anchor="ctr"/>
+          <a:lstStyle/>
+          <a:p>
+            <a:pPr algn="ctr"/>
+          </a:p>
+        </p:txBody>
+      </p:sp>
+      <p:pic>
+        <p:nvPicPr>
+          <p:cNvPr id="4" name="Picture 3" descr="charles_hunt.jpg"/>
+          <p:cNvPicPr>
+            <a:picLocks noChangeAspect="1"/>
+          </p:cNvPicPr>
+          <p:nvPr/>
+        </p:nvPicPr>
+        <p:blipFill>
+          <a:blip r:embed="rId2"/>
+          <a:stretch>
+            <a:fillRect/>
+          </a:stretch>
+        </p:blipFill>
+        <p:spPr>
+          <a:xfrm>
+            <a:off x="457200" y="731520"/>
+            <a:ext cx="4346369" cy="5577840"/>
+          </a:xfrm>
+          <a:prstGeom prst="rect">
+            <a:avLst/>
+          </a:prstGeom>
+        </p:spPr>
+      </p:pic>
+      <p:sp>
+        <p:nvSpPr>
+          <p:cNvPr id="5" name="TextBox 4"/>
           <p:cNvSpPr txBox="1"/>
           <p:nvPr/>
         </p:nvSpPr>
         <p:spPr>
           <a:xfrm>
-            <a:off x="731520" y="1280160"/>
-            <a:ext cx="7680960" cy="5029200"/>
+            <a:off x="4389120" y="640080"/>
+            <a:ext cx="4480560" cy="822960"/>
           </a:xfrm>
           <a:prstGeom prst="rect">
             <a:avLst/>
@@ -6178,177 +8060,30 @@
           </a:bodyPr>
           <a:lstStyle/>
           <a:p>
-            <a:pPr>
-              <a:spcBef>
-                <a:spcPts val="1000"/>
-              </a:spcBef>
-              <a:defRPr sz="1300">
-                <a:solidFill>
-                  <a:srgbClr val="E8E0D0"/>
-                </a:solidFill>
-                <a:latin typeface="Palatino Linotype"/>
-              </a:defRPr>
-            </a:pPr>
-            <a:r>
-              <a:t>• Холст, масло. 266 × 207 см. Музей Лувр, Париж</a:t>
-            </a:r>
-          </a:p>
-          <a:p>
-            <a:pPr>
-              <a:spcBef>
-                <a:spcPts val="1000"/>
-              </a:spcBef>
-              <a:defRPr sz="1300">
-                <a:solidFill>
-                  <a:srgbClr val="E8E0D0"/>
-                </a:solidFill>
-                <a:latin typeface="Palatino Linotype"/>
-              </a:defRPr>
-            </a:pPr>
-            <a:r>
-              <a:t>• Шедевр Ван Дейка и жемчужина коллекции Лувра с 1793 года</a:t>
-            </a:r>
-          </a:p>
-          <a:p>
-            <a:pPr>
-              <a:spcBef>
-                <a:spcPts val="1000"/>
-              </a:spcBef>
-              <a:defRPr sz="1300">
-                <a:solidFill>
-                  <a:srgbClr val="E8E0D0"/>
-                </a:solidFill>
-                <a:latin typeface="Palatino Linotype"/>
-              </a:defRPr>
-            </a:pPr>
-            <a:r>
-              <a:t>• Карл I изображён в гражданской одежде, стоящим у лошади,</a:t>
-            </a:r>
-          </a:p>
-          <a:p>
-            <a:pPr>
-              <a:spcBef>
-                <a:spcPts val="1000"/>
-              </a:spcBef>
-              <a:defRPr sz="1300">
-                <a:solidFill>
-                  <a:srgbClr val="E8E0D0"/>
-                </a:solidFill>
-                <a:latin typeface="Palatino Linotype"/>
-              </a:defRPr>
-            </a:pPr>
-            <a:r>
-              <a:t>  как будто отдыхающим на охоте</a:t>
-            </a:r>
-          </a:p>
-          <a:p>
-            <a:pPr>
-              <a:spcBef>
-                <a:spcPts val="1000"/>
-              </a:spcBef>
-              <a:defRPr sz="1300">
-                <a:solidFill>
-                  <a:srgbClr val="E8E0D0"/>
-                </a:solidFill>
-                <a:latin typeface="Palatino Linotype"/>
-              </a:defRPr>
-            </a:pPr>
-            <a:r>
-              <a:t>• «Тонкий компромисс между джентльменской небрежностью</a:t>
-            </a:r>
-          </a:p>
-          <a:p>
-            <a:pPr>
-              <a:spcBef>
-                <a:spcPts val="1000"/>
-              </a:spcBef>
-              <a:defRPr sz="1300">
-                <a:solidFill>
-                  <a:srgbClr val="E8E0D0"/>
-                </a:solidFill>
-                <a:latin typeface="Palatino Linotype"/>
-              </a:defRPr>
-            </a:pPr>
-            <a:r>
-              <a:t>  и королевской уверенностью» (описание Лувра)</a:t>
-            </a:r>
-          </a:p>
-          <a:p>
-            <a:pPr>
-              <a:spcBef>
-                <a:spcPts val="1000"/>
-              </a:spcBef>
-              <a:defRPr sz="1300">
-                <a:solidFill>
-                  <a:srgbClr val="E8E0D0"/>
-                </a:solidFill>
-                <a:latin typeface="Palatino Linotype"/>
-              </a:defRPr>
-            </a:pPr>
-            <a:r>
-              <a:t>• Король невысокого роста (163 см), но Ван Дейк с помощью</a:t>
-            </a:r>
-          </a:p>
-          <a:p>
-            <a:pPr>
-              <a:spcBef>
-                <a:spcPts val="1000"/>
-              </a:spcBef>
-              <a:defRPr sz="1300">
-                <a:solidFill>
-                  <a:srgbClr val="E8E0D0"/>
-                </a:solidFill>
-                <a:latin typeface="Palatino Linotype"/>
-              </a:defRPr>
-            </a:pPr>
-            <a:r>
-              <a:t>  композиции создаёт впечатление величественной фигуры</a:t>
-            </a:r>
-          </a:p>
-          <a:p>
-            <a:pPr>
-              <a:spcBef>
-                <a:spcPts val="1000"/>
-              </a:spcBef>
-              <a:defRPr sz="1300">
-                <a:solidFill>
-                  <a:srgbClr val="E8E0D0"/>
-                </a:solidFill>
-                <a:latin typeface="Palatino Linotype"/>
-              </a:defRPr>
-            </a:pPr>
-            <a:r>
-              <a:t>• Лошадь словно кланяется, подчёркивая статус монарха</a:t>
-            </a:r>
-          </a:p>
-          <a:p>
-            <a:pPr>
-              <a:spcBef>
-                <a:spcPts val="1000"/>
-              </a:spcBef>
-              <a:defRPr sz="1300">
-                <a:solidFill>
-                  <a:srgbClr val="E8E0D0"/>
-                </a:solidFill>
-                <a:latin typeface="Palatino Linotype"/>
-              </a:defRPr>
-            </a:pPr>
-            <a:r>
-              <a:t>• Прекрасный пейзажный фон объединяет природу и власть</a:t>
-            </a:r>
-          </a:p>
-        </p:txBody>
-      </p:sp>
-      <p:sp>
-        <p:nvSpPr>
-          <p:cNvPr id="5" name="TextBox 4"/>
+            <a:pPr algn="l">
+              <a:defRPr sz="2000" b="1" i="0">
+                <a:solidFill>
+                  <a:srgbClr val="FFFFFF"/>
+                </a:solidFill>
+                <a:latin typeface="Georgia"/>
+              </a:defRPr>
+            </a:pPr>
+            <a:r>
+              <a:t>Портрет Карла I на охоте</a:t>
+            </a:r>
+          </a:p>
+        </p:txBody>
+      </p:sp>
+      <p:sp>
+        <p:nvSpPr>
+          <p:cNvPr id="6" name="TextBox 5"/>
           <p:cNvSpPr txBox="1"/>
           <p:nvPr/>
         </p:nvSpPr>
         <p:spPr>
           <a:xfrm>
-            <a:off x="8412480" y="6400800"/>
-            <a:ext cx="548640" cy="365760"/>
+            <a:off x="4389120" y="1371600"/>
+            <a:ext cx="4480560" cy="365760"/>
           </a:xfrm>
           <a:prstGeom prst="rect">
             <a:avLst/>
@@ -6361,12 +8096,313 @@
           </a:bodyPr>
           <a:lstStyle/>
           <a:p>
+            <a:pPr algn="l">
+              <a:defRPr sz="1300" b="0" i="1">
+                <a:solidFill>
+                  <a:srgbClr val="E8C56D"/>
+                </a:solidFill>
+                <a:latin typeface="Calibri"/>
+              </a:defRPr>
+            </a:pPr>
+            <a:r>
+              <a:t>Ок. 1635 • Холст, масло • 266 × 207 см</a:t>
+            </a:r>
+          </a:p>
+        </p:txBody>
+      </p:sp>
+      <p:sp>
+        <p:nvSpPr>
+          <p:cNvPr id="7" name="Rectangle 6"/>
+          <p:cNvSpPr/>
+          <p:nvPr/>
+        </p:nvSpPr>
+        <p:spPr>
+          <a:xfrm>
+            <a:off x="4389120" y="1783080"/>
+            <a:ext cx="1371600" cy="25400"/>
+          </a:xfrm>
+          <a:prstGeom prst="rect">
+            <a:avLst/>
+          </a:prstGeom>
+          <a:solidFill>
+            <a:srgbClr val="C99A2E"/>
+          </a:solidFill>
+          <a:ln>
+            <a:noFill/>
+          </a:ln>
+        </p:spPr>
+        <p:style>
+          <a:lnRef idx="1">
+            <a:schemeClr val="accent1"/>
+          </a:lnRef>
+          <a:fillRef idx="3">
+            <a:schemeClr val="accent1"/>
+          </a:fillRef>
+          <a:effectRef idx="2">
+            <a:schemeClr val="accent1"/>
+          </a:effectRef>
+          <a:fontRef idx="minor">
+            <a:schemeClr val="lt1"/>
+          </a:fontRef>
+        </p:style>
+        <p:txBody>
+          <a:bodyPr rtlCol="0" anchor="ctr"/>
+          <a:lstStyle/>
+          <a:p>
+            <a:pPr algn="ctr"/>
+          </a:p>
+        </p:txBody>
+      </p:sp>
+      <p:sp>
+        <p:nvSpPr>
+          <p:cNvPr id="8" name="TextBox 7"/>
+          <p:cNvSpPr txBox="1"/>
+          <p:nvPr/>
+        </p:nvSpPr>
+        <p:spPr>
+          <a:xfrm>
+            <a:off x="4389120" y="2011680"/>
+            <a:ext cx="4480560" cy="4389120"/>
+          </a:xfrm>
+          <a:prstGeom prst="rect">
+            <a:avLst/>
+          </a:prstGeom>
+          <a:noFill/>
+        </p:spPr>
+        <p:txBody>
+          <a:bodyPr wrap="square">
+            <a:spAutoFit/>
+          </a:bodyPr>
+          <a:lstStyle/>
+          <a:p>
+            <a:pPr>
+              <a:spcBef>
+                <a:spcPts val="1000"/>
+              </a:spcBef>
+              <a:defRPr sz="1200">
+                <a:solidFill>
+                  <a:srgbClr val="E8E0D0"/>
+                </a:solidFill>
+                <a:latin typeface="Calibri"/>
+              </a:defRPr>
+            </a:pPr>
+            <a:r>
+              <a:t>Музей Лувр, Париж</a:t>
+            </a:r>
+          </a:p>
+          <a:p>
+            <a:pPr>
+              <a:spcBef>
+                <a:spcPts val="1000"/>
+              </a:spcBef>
+              <a:defRPr sz="1200">
+                <a:solidFill>
+                  <a:srgbClr val="E8E0D0"/>
+                </a:solidFill>
+                <a:latin typeface="Calibri"/>
+              </a:defRPr>
+            </a:pPr>
+          </a:p>
+          <a:p>
+            <a:pPr>
+              <a:spcBef>
+                <a:spcPts val="1000"/>
+              </a:spcBef>
+              <a:defRPr sz="1200">
+                <a:solidFill>
+                  <a:srgbClr val="E8E0D0"/>
+                </a:solidFill>
+                <a:latin typeface="Calibri"/>
+              </a:defRPr>
+            </a:pPr>
+            <a:r>
+              <a:t>Шедевр и жемчужина Лувра с 1793 года.</a:t>
+            </a:r>
+          </a:p>
+          <a:p>
+            <a:pPr>
+              <a:spcBef>
+                <a:spcPts val="1000"/>
+              </a:spcBef>
+              <a:defRPr sz="1200">
+                <a:solidFill>
+                  <a:srgbClr val="E8E0D0"/>
+                </a:solidFill>
+                <a:latin typeface="Calibri"/>
+              </a:defRPr>
+            </a:pPr>
+            <a:r>
+              <a:t>Карл I в гражданской одежде, стоящий у лошади.</a:t>
+            </a:r>
+          </a:p>
+          <a:p>
+            <a:pPr>
+              <a:spcBef>
+                <a:spcPts val="1000"/>
+              </a:spcBef>
+              <a:defRPr sz="1200">
+                <a:solidFill>
+                  <a:srgbClr val="E8E0D0"/>
+                </a:solidFill>
+                <a:latin typeface="Calibri"/>
+              </a:defRPr>
+            </a:pPr>
+          </a:p>
+          <a:p>
+            <a:pPr>
+              <a:spcBef>
+                <a:spcPts val="1000"/>
+              </a:spcBef>
+              <a:defRPr sz="1200">
+                <a:solidFill>
+                  <a:srgbClr val="E8E0D0"/>
+                </a:solidFill>
+                <a:latin typeface="Calibri"/>
+              </a:defRPr>
+            </a:pPr>
+            <a:r>
+              <a:t>«Тонкий компромисс между джентльменской</a:t>
+            </a:r>
+          </a:p>
+          <a:p>
+            <a:pPr>
+              <a:spcBef>
+                <a:spcPts val="1000"/>
+              </a:spcBef>
+              <a:defRPr sz="1200">
+                <a:solidFill>
+                  <a:srgbClr val="E8E0D0"/>
+                </a:solidFill>
+                <a:latin typeface="Calibri"/>
+              </a:defRPr>
+            </a:pPr>
+            <a:r>
+              <a:t>небрежностью и королевской уверенностью»</a:t>
+            </a:r>
+          </a:p>
+          <a:p>
+            <a:pPr>
+              <a:spcBef>
+                <a:spcPts val="1000"/>
+              </a:spcBef>
+              <a:defRPr sz="1200">
+                <a:solidFill>
+                  <a:srgbClr val="E8E0D0"/>
+                </a:solidFill>
+                <a:latin typeface="Calibri"/>
+              </a:defRPr>
+            </a:pPr>
+            <a:r>
+              <a:t>— описание Лувра.</a:t>
+            </a:r>
+          </a:p>
+          <a:p>
+            <a:pPr>
+              <a:spcBef>
+                <a:spcPts val="1000"/>
+              </a:spcBef>
+              <a:defRPr sz="1200">
+                <a:solidFill>
+                  <a:srgbClr val="E8E0D0"/>
+                </a:solidFill>
+                <a:latin typeface="Calibri"/>
+              </a:defRPr>
+            </a:pPr>
+          </a:p>
+          <a:p>
+            <a:pPr>
+              <a:spcBef>
+                <a:spcPts val="1000"/>
+              </a:spcBef>
+              <a:defRPr sz="1200">
+                <a:solidFill>
+                  <a:srgbClr val="E8E0D0"/>
+                </a:solidFill>
+                <a:latin typeface="Calibri"/>
+              </a:defRPr>
+            </a:pPr>
+            <a:r>
+              <a:t>Король был невысок (163 см), но Ван Дейк</a:t>
+            </a:r>
+          </a:p>
+          <a:p>
+            <a:pPr>
+              <a:spcBef>
+                <a:spcPts val="1000"/>
+              </a:spcBef>
+              <a:defRPr sz="1200">
+                <a:solidFill>
+                  <a:srgbClr val="E8E0D0"/>
+                </a:solidFill>
+                <a:latin typeface="Calibri"/>
+              </a:defRPr>
+            </a:pPr>
+            <a:r>
+              <a:t>с помощью композиции создаёт впечатление</a:t>
+            </a:r>
+          </a:p>
+          <a:p>
+            <a:pPr>
+              <a:spcBef>
+                <a:spcPts val="1000"/>
+              </a:spcBef>
+              <a:defRPr sz="1200">
+                <a:solidFill>
+                  <a:srgbClr val="E8E0D0"/>
+                </a:solidFill>
+                <a:latin typeface="Calibri"/>
+              </a:defRPr>
+            </a:pPr>
+            <a:r>
+              <a:t>величественной фигуры. Лошадь словно</a:t>
+            </a:r>
+          </a:p>
+          <a:p>
+            <a:pPr>
+              <a:spcBef>
+                <a:spcPts val="1000"/>
+              </a:spcBef>
+              <a:defRPr sz="1200">
+                <a:solidFill>
+                  <a:srgbClr val="E8E0D0"/>
+                </a:solidFill>
+                <a:latin typeface="Calibri"/>
+              </a:defRPr>
+            </a:pPr>
+            <a:r>
+              <a:t>кланяется, подчёркивая статус монарха.</a:t>
+            </a:r>
+          </a:p>
+        </p:txBody>
+      </p:sp>
+      <p:sp>
+        <p:nvSpPr>
+          <p:cNvPr id="9" name="TextBox 8"/>
+          <p:cNvSpPr txBox="1"/>
+          <p:nvPr/>
+        </p:nvSpPr>
+        <p:spPr>
+          <a:xfrm>
+            <a:off x="8503920" y="6446520"/>
+            <a:ext cx="457200" cy="274320"/>
+          </a:xfrm>
+          <a:prstGeom prst="rect">
+            <a:avLst/>
+          </a:prstGeom>
+          <a:noFill/>
+        </p:spPr>
+        <p:txBody>
+          <a:bodyPr wrap="square">
+            <a:spAutoFit/>
+          </a:bodyPr>
+          <a:lstStyle/>
+          <a:p>
             <a:pPr algn="r">
               <a:defRPr sz="900" b="0" i="0">
                 <a:solidFill>
-                  <a:srgbClr val="9A8A7A"/>
-                </a:solidFill>
-                <a:latin typeface="Palatino Linotype"/>
+                  <a:srgbClr val="8A7A6A"/>
+                </a:solidFill>
+                <a:latin typeface="Calibri"/>
               </a:defRPr>
             </a:pPr>
             <a:r>

--- a/Van_Dyck_Presentation.pptx
+++ b/Van_Dyck_Presentation.pptx
@@ -3122,8 +3122,8 @@
         </p:nvSpPr>
         <p:spPr>
           <a:xfrm>
-            <a:off x="7132320" y="-1371600"/>
-            <a:ext cx="3657600" cy="3657600"/>
+            <a:off x="7315200" y="-1371600"/>
+            <a:ext cx="3200400" cy="3200400"/>
           </a:xfrm>
           <a:prstGeom prst="ellipse">
             <a:avLst/>
@@ -3165,8 +3165,8 @@
         </p:nvSpPr>
         <p:spPr>
           <a:xfrm>
-            <a:off x="-1097280" y="5029200"/>
-            <a:ext cx="2286000" cy="2286000"/>
+            <a:off x="-914400" y="5486400"/>
+            <a:ext cx="1828800" cy="1828800"/>
           </a:xfrm>
           <a:prstGeom prst="ellipse">
             <a:avLst/>
@@ -3216,8 +3216,8 @@
         </p:blipFill>
         <p:spPr>
           <a:xfrm>
-            <a:off x="5943600" y="1371600"/>
-            <a:ext cx="3373887" cy="5029200"/>
+            <a:off x="6217920" y="1703641"/>
+            <a:ext cx="2560320" cy="3816477"/>
           </a:xfrm>
           <a:prstGeom prst="rect">
             <a:avLst/>
@@ -3226,59 +3226,14 @@
       </p:pic>
       <p:sp>
         <p:nvSpPr>
-          <p:cNvPr id="5" name="Rectangle 4"/>
-          <p:cNvSpPr/>
-          <p:nvPr/>
-        </p:nvSpPr>
-        <p:spPr>
-          <a:xfrm>
-            <a:off x="5943600" y="1371600"/>
-            <a:ext cx="3200400" cy="5029200"/>
-          </a:xfrm>
-          <a:prstGeom prst="rect">
-            <a:avLst/>
-          </a:prstGeom>
-          <a:solidFill>
-            <a:srgbClr val="22153A">
-              <a:alpha val="55000"/>
-            </a:srgbClr>
-          </a:solidFill>
-          <a:ln>
-            <a:noFill/>
-          </a:ln>
-        </p:spPr>
-        <p:style>
-          <a:lnRef idx="1">
-            <a:schemeClr val="accent1"/>
-          </a:lnRef>
-          <a:fillRef idx="3">
-            <a:schemeClr val="accent1"/>
-          </a:fillRef>
-          <a:effectRef idx="2">
-            <a:schemeClr val="accent1"/>
-          </a:effectRef>
-          <a:fontRef idx="minor">
-            <a:schemeClr val="lt1"/>
-          </a:fontRef>
-        </p:style>
-        <p:txBody>
-          <a:bodyPr rtlCol="0" anchor="ctr"/>
-          <a:lstStyle/>
-          <a:p>
-            <a:pPr algn="ctr"/>
-          </a:p>
-        </p:txBody>
-      </p:sp>
-      <p:sp>
-        <p:nvSpPr>
-          <p:cNvPr id="6" name="TextBox 5"/>
+          <p:cNvPr id="5" name="TextBox 4"/>
           <p:cNvSpPr txBox="1"/>
           <p:nvPr/>
         </p:nvSpPr>
         <p:spPr>
           <a:xfrm>
             <a:off x="731520" y="457200"/>
-            <a:ext cx="5486400" cy="365760"/>
+            <a:ext cx="5029200" cy="365760"/>
           </a:xfrm>
           <a:prstGeom prst="rect">
             <a:avLst/>
@@ -3307,7 +3262,7 @@
       </p:sp>
       <p:sp>
         <p:nvSpPr>
-          <p:cNvPr id="7" name="TextBox 6"/>
+          <p:cNvPr id="6" name="TextBox 5"/>
           <p:cNvSpPr txBox="1"/>
           <p:nvPr/>
         </p:nvSpPr>
@@ -3343,14 +3298,14 @@
       </p:sp>
       <p:sp>
         <p:nvSpPr>
-          <p:cNvPr id="8" name="Rectangle 7"/>
+          <p:cNvPr id="7" name="Rectangle 6"/>
           <p:cNvSpPr/>
           <p:nvPr/>
         </p:nvSpPr>
         <p:spPr>
           <a:xfrm>
-            <a:off x="731520" y="2377440"/>
-            <a:ext cx="3200400" cy="50800"/>
+            <a:off x="731520" y="2331720"/>
+            <a:ext cx="2743200" cy="50800"/>
           </a:xfrm>
           <a:prstGeom prst="rect">
             <a:avLst/>
@@ -3386,13 +3341,13 @@
       </p:sp>
       <p:sp>
         <p:nvSpPr>
-          <p:cNvPr id="9" name="TextBox 8"/>
+          <p:cNvPr id="8" name="TextBox 7"/>
           <p:cNvSpPr txBox="1"/>
           <p:nvPr/>
         </p:nvSpPr>
         <p:spPr>
           <a:xfrm>
-            <a:off x="731520" y="2651760"/>
+            <a:off x="731520" y="2560320"/>
             <a:ext cx="5029200" cy="1645920"/>
           </a:xfrm>
           <a:prstGeom prst="rect">
@@ -3426,14 +3381,14 @@
       </p:sp>
       <p:sp>
         <p:nvSpPr>
-          <p:cNvPr id="10" name="TextBox 9"/>
+          <p:cNvPr id="9" name="TextBox 8"/>
           <p:cNvSpPr txBox="1"/>
           <p:nvPr/>
         </p:nvSpPr>
         <p:spPr>
           <a:xfrm>
-            <a:off x="731520" y="4389120"/>
-            <a:ext cx="4572000" cy="548640"/>
+            <a:off x="731520" y="4206240"/>
+            <a:ext cx="5029200" cy="548640"/>
           </a:xfrm>
           <a:prstGeom prst="rect">
             <a:avLst/>
@@ -3462,13 +3417,13 @@
       </p:sp>
       <p:sp>
         <p:nvSpPr>
-          <p:cNvPr id="11" name="TextBox 10"/>
+          <p:cNvPr id="10" name="TextBox 9"/>
           <p:cNvSpPr txBox="1"/>
           <p:nvPr/>
         </p:nvSpPr>
         <p:spPr>
           <a:xfrm>
-            <a:off x="731520" y="5029200"/>
+            <a:off x="731520" y="4846320"/>
             <a:ext cx="4572000" cy="365760"/>
           </a:xfrm>
           <a:prstGeom prst="rect">
@@ -3498,7 +3453,7 @@
       </p:sp>
       <p:sp>
         <p:nvSpPr>
-          <p:cNvPr id="12" name="TextBox 11"/>
+          <p:cNvPr id="11" name="TextBox 10"/>
           <p:cNvSpPr txBox="1"/>
           <p:nvPr/>
         </p:nvSpPr>
@@ -3609,8 +3564,8 @@
         </p:nvSpPr>
         <p:spPr>
           <a:xfrm>
-            <a:off x="274320" y="548640"/>
-            <a:ext cx="3840480" cy="5943600"/>
+            <a:off x="274320" y="457200"/>
+            <a:ext cx="3657600" cy="6035040"/>
           </a:xfrm>
           <a:prstGeom prst="rect">
             <a:avLst/>
@@ -3660,8 +3615,8 @@
         </p:blipFill>
         <p:spPr>
           <a:xfrm>
-            <a:off x="457200" y="731520"/>
-            <a:ext cx="5589412" cy="5577840"/>
+            <a:off x="411480" y="1786582"/>
+            <a:ext cx="3383280" cy="3376275"/>
           </a:xfrm>
           <a:prstGeom prst="rect">
             <a:avLst/>
@@ -3676,8 +3631,8 @@
         </p:nvSpPr>
         <p:spPr>
           <a:xfrm>
-            <a:off x="4389120" y="640080"/>
-            <a:ext cx="4480560" cy="822960"/>
+            <a:off x="4206240" y="548640"/>
+            <a:ext cx="4663440" cy="731520"/>
           </a:xfrm>
           <a:prstGeom prst="rect">
             <a:avLst/>
@@ -3712,8 +3667,8 @@
         </p:nvSpPr>
         <p:spPr>
           <a:xfrm>
-            <a:off x="4389120" y="1371600"/>
-            <a:ext cx="4480560" cy="365760"/>
+            <a:off x="4206240" y="1234440"/>
+            <a:ext cx="4663440" cy="365760"/>
           </a:xfrm>
           <a:prstGeom prst="rect">
             <a:avLst/>
@@ -3727,7 +3682,7 @@
           <a:lstStyle/>
           <a:p>
             <a:pPr algn="l">
-              <a:defRPr sz="1300" b="0" i="1">
+              <a:defRPr sz="1200" b="0" i="1">
                 <a:solidFill>
                   <a:srgbClr val="E8C56D"/>
                 </a:solidFill>
@@ -3748,7 +3703,7 @@
         </p:nvSpPr>
         <p:spPr>
           <a:xfrm>
-            <a:off x="4389120" y="1783080"/>
+            <a:off x="4206240" y="1645920"/>
             <a:ext cx="1371600" cy="25400"/>
           </a:xfrm>
           <a:prstGeom prst="rect">
@@ -3791,8 +3746,8 @@
         </p:nvSpPr>
         <p:spPr>
           <a:xfrm>
-            <a:off x="4389120" y="2011680"/>
-            <a:ext cx="4480560" cy="4389120"/>
+            <a:off x="4206240" y="1828800"/>
+            <a:ext cx="4663440" cy="4572000"/>
           </a:xfrm>
           <a:prstGeom prst="rect">
             <a:avLst/>
@@ -3807,7 +3762,7 @@
           <a:p>
             <a:pPr>
               <a:spcBef>
-                <a:spcPts val="1000"/>
+                <a:spcPts val="800"/>
               </a:spcBef>
               <a:defRPr sz="1200">
                 <a:solidFill>
@@ -3823,20 +3778,20 @@
           <a:p>
             <a:pPr>
               <a:spcBef>
-                <a:spcPts val="1000"/>
-              </a:spcBef>
-              <a:defRPr sz="1200">
-                <a:solidFill>
-                  <a:srgbClr val="E8E0D0"/>
-                </a:solidFill>
-                <a:latin typeface="Calibri"/>
-              </a:defRPr>
-            </a:pPr>
-          </a:p>
-          <a:p>
-            <a:pPr>
-              <a:spcBef>
-                <a:spcPts val="1000"/>
+                <a:spcPts val="800"/>
+              </a:spcBef>
+              <a:defRPr sz="1200">
+                <a:solidFill>
+                  <a:srgbClr val="E8E0D0"/>
+                </a:solidFill>
+                <a:latin typeface="Calibri"/>
+              </a:defRPr>
+            </a:pPr>
+          </a:p>
+          <a:p>
+            <a:pPr>
+              <a:spcBef>
+                <a:spcPts val="800"/>
               </a:spcBef>
               <a:defRPr sz="1200">
                 <a:solidFill>
@@ -3852,7 +3807,7 @@
           <a:p>
             <a:pPr>
               <a:spcBef>
-                <a:spcPts val="1000"/>
+                <a:spcPts val="800"/>
               </a:spcBef>
               <a:defRPr sz="1200">
                 <a:solidFill>
@@ -3868,110 +3823,97 @@
           <a:p>
             <a:pPr>
               <a:spcBef>
-                <a:spcPts val="1000"/>
-              </a:spcBef>
-              <a:defRPr sz="1200">
-                <a:solidFill>
-                  <a:srgbClr val="E8E0D0"/>
-                </a:solidFill>
-                <a:latin typeface="Calibri"/>
-              </a:defRPr>
-            </a:pPr>
-          </a:p>
-          <a:p>
-            <a:pPr>
-              <a:spcBef>
-                <a:spcPts val="1000"/>
-              </a:spcBef>
-              <a:defRPr sz="1200">
-                <a:solidFill>
-                  <a:srgbClr val="E8E0D0"/>
-                </a:solidFill>
-                <a:latin typeface="Calibri"/>
-              </a:defRPr>
-            </a:pPr>
-            <a:r>
-              <a:t>Джордж Дигби (1612–1677) — 2-й граф</a:t>
-            </a:r>
-          </a:p>
-          <a:p>
-            <a:pPr>
-              <a:spcBef>
-                <a:spcPts val="1000"/>
-              </a:spcBef>
-              <a:defRPr sz="1200">
-                <a:solidFill>
-                  <a:srgbClr val="E8E0D0"/>
-                </a:solidFill>
-                <a:latin typeface="Calibri"/>
-              </a:defRPr>
-            </a:pPr>
-            <a:r>
-              <a:t>Бристоль, политик, поэт, драматург.</a:t>
-            </a:r>
-          </a:p>
-          <a:p>
-            <a:pPr>
-              <a:spcBef>
-                <a:spcPts val="1000"/>
-              </a:spcBef>
-              <a:defRPr sz="1200">
-                <a:solidFill>
-                  <a:srgbClr val="E8E0D0"/>
-                </a:solidFill>
-                <a:latin typeface="Calibri"/>
-              </a:defRPr>
-            </a:pPr>
-          </a:p>
-          <a:p>
-            <a:pPr>
-              <a:spcBef>
-                <a:spcPts val="1000"/>
-              </a:spcBef>
-              <a:defRPr sz="1200">
-                <a:solidFill>
-                  <a:srgbClr val="E8E0D0"/>
-                </a:solidFill>
-                <a:latin typeface="Calibri"/>
-              </a:defRPr>
-            </a:pPr>
-            <a:r>
-              <a:t>Уильям Рассел (1616–1700) — будущий</a:t>
-            </a:r>
-          </a:p>
-          <a:p>
-            <a:pPr>
-              <a:spcBef>
-                <a:spcPts val="1000"/>
-              </a:spcBef>
-              <a:defRPr sz="1200">
-                <a:solidFill>
-                  <a:srgbClr val="E8E0D0"/>
-                </a:solidFill>
-                <a:latin typeface="Calibri"/>
-              </a:defRPr>
-            </a:pPr>
-            <a:r>
-              <a:t>1-й герцог Бедфорд.</a:t>
-            </a:r>
-          </a:p>
-          <a:p>
-            <a:pPr>
-              <a:spcBef>
-                <a:spcPts val="1000"/>
-              </a:spcBef>
-              <a:defRPr sz="1200">
-                <a:solidFill>
-                  <a:srgbClr val="E8E0D0"/>
-                </a:solidFill>
-                <a:latin typeface="Calibri"/>
-              </a:defRPr>
-            </a:pPr>
-          </a:p>
-          <a:p>
-            <a:pPr>
-              <a:spcBef>
-                <a:spcPts val="1000"/>
+                <a:spcPts val="800"/>
+              </a:spcBef>
+              <a:defRPr sz="1200">
+                <a:solidFill>
+                  <a:srgbClr val="E8E0D0"/>
+                </a:solidFill>
+                <a:latin typeface="Calibri"/>
+              </a:defRPr>
+            </a:pPr>
+          </a:p>
+          <a:p>
+            <a:pPr>
+              <a:spcBef>
+                <a:spcPts val="800"/>
+              </a:spcBef>
+              <a:defRPr sz="1200">
+                <a:solidFill>
+                  <a:srgbClr val="E8E0D0"/>
+                </a:solidFill>
+                <a:latin typeface="Calibri"/>
+              </a:defRPr>
+            </a:pPr>
+            <a:r>
+              <a:t>• Джордж Дигби (1612–1677) — 2-й граф</a:t>
+            </a:r>
+          </a:p>
+          <a:p>
+            <a:pPr>
+              <a:spcBef>
+                <a:spcPts val="800"/>
+              </a:spcBef>
+              <a:defRPr sz="1200">
+                <a:solidFill>
+                  <a:srgbClr val="E8E0D0"/>
+                </a:solidFill>
+                <a:latin typeface="Calibri"/>
+              </a:defRPr>
+            </a:pPr>
+            <a:r>
+              <a:t>  Бристоль, политик, поэт, драматург</a:t>
+            </a:r>
+          </a:p>
+          <a:p>
+            <a:pPr>
+              <a:spcBef>
+                <a:spcPts val="800"/>
+              </a:spcBef>
+              <a:defRPr sz="1200">
+                <a:solidFill>
+                  <a:srgbClr val="E8E0D0"/>
+                </a:solidFill>
+                <a:latin typeface="Calibri"/>
+              </a:defRPr>
+            </a:pPr>
+            <a:r>
+              <a:t>• Уильям Рассел (1616–1700) — будущий</a:t>
+            </a:r>
+          </a:p>
+          <a:p>
+            <a:pPr>
+              <a:spcBef>
+                <a:spcPts val="800"/>
+              </a:spcBef>
+              <a:defRPr sz="1200">
+                <a:solidFill>
+                  <a:srgbClr val="E8E0D0"/>
+                </a:solidFill>
+                <a:latin typeface="Calibri"/>
+              </a:defRPr>
+            </a:pPr>
+            <a:r>
+              <a:t>  1-й герцог Бедфорд</a:t>
+            </a:r>
+          </a:p>
+          <a:p>
+            <a:pPr>
+              <a:spcBef>
+                <a:spcPts val="800"/>
+              </a:spcBef>
+              <a:defRPr sz="1200">
+                <a:solidFill>
+                  <a:srgbClr val="E8E0D0"/>
+                </a:solidFill>
+                <a:latin typeface="Calibri"/>
+              </a:defRPr>
+            </a:pPr>
+          </a:p>
+          <a:p>
+            <a:pPr>
+              <a:spcBef>
+                <a:spcPts val="800"/>
               </a:spcBef>
               <a:defRPr sz="1200">
                 <a:solidFill>
@@ -3987,33 +3929,17 @@
           <a:p>
             <a:pPr>
               <a:spcBef>
-                <a:spcPts val="1000"/>
-              </a:spcBef>
-              <a:defRPr sz="1200">
-                <a:solidFill>
-                  <a:srgbClr val="E8E0D0"/>
-                </a:solidFill>
-                <a:latin typeface="Calibri"/>
-              </a:defRPr>
-            </a:pPr>
-            <a:r>
-              <a:t>типичный «friendship portrait», жанр,</a:t>
-            </a:r>
-          </a:p>
-          <a:p>
-            <a:pPr>
-              <a:spcBef>
-                <a:spcPts val="1000"/>
-              </a:spcBef>
-              <a:defRPr sz="1200">
-                <a:solidFill>
-                  <a:srgbClr val="E8E0D0"/>
-                </a:solidFill>
-                <a:latin typeface="Calibri"/>
-              </a:defRPr>
-            </a:pPr>
-            <a:r>
-              <a:t>в котором Ван Дейк непревзойдён.</a:t>
+                <a:spcPts val="800"/>
+              </a:spcBef>
+              <a:defRPr sz="1200">
+                <a:solidFill>
+                  <a:srgbClr val="E8E0D0"/>
+                </a:solidFill>
+                <a:latin typeface="Calibri"/>
+              </a:defRPr>
+            </a:pPr>
+            <a:r>
+              <a:t>типичный «friendship portrait».</a:t>
             </a:r>
           </a:p>
         </p:txBody>
@@ -4096,8 +4022,8 @@
         </p:nvSpPr>
         <p:spPr>
           <a:xfrm>
-            <a:off x="6583680" y="3840480"/>
-            <a:ext cx="3474720" cy="3474720"/>
+            <a:off x="6858000" y="4114800"/>
+            <a:ext cx="3200400" cy="3200400"/>
           </a:xfrm>
           <a:prstGeom prst="ellipse">
             <a:avLst/>
@@ -4139,8 +4065,8 @@
         </p:nvSpPr>
         <p:spPr>
           <a:xfrm>
-            <a:off x="-731520" y="-731520"/>
-            <a:ext cx="1828800" cy="1828800"/>
+            <a:off x="-457200" y="-457200"/>
+            <a:ext cx="1371600" cy="1371600"/>
           </a:xfrm>
           <a:prstGeom prst="ellipse">
             <a:avLst/>
@@ -4174,9 +4100,160 @@
           </a:p>
         </p:txBody>
       </p:sp>
+      <p:sp>
+        <p:nvSpPr>
+          <p:cNvPr id="4" name="TextBox 3"/>
+          <p:cNvSpPr txBox="1"/>
+          <p:nvPr/>
+        </p:nvSpPr>
+        <p:spPr>
+          <a:xfrm>
+            <a:off x="914400" y="1371600"/>
+            <a:ext cx="7315200" cy="1097280"/>
+          </a:xfrm>
+          <a:prstGeom prst="rect">
+            <a:avLst/>
+          </a:prstGeom>
+          <a:noFill/>
+        </p:spPr>
+        <p:txBody>
+          <a:bodyPr wrap="square">
+            <a:spAutoFit/>
+          </a:bodyPr>
+          <a:lstStyle/>
+          <a:p>
+            <a:pPr algn="l">
+              <a:defRPr sz="3600" b="1" i="0">
+                <a:solidFill>
+                  <a:srgbClr val="FFFFFF"/>
+                </a:solidFill>
+                <a:latin typeface="Georgia"/>
+              </a:defRPr>
+            </a:pPr>
+            <a:r>
+              <a:t>СПАСИБО ЗА ВНИМАНИЕ</a:t>
+            </a:r>
+          </a:p>
+        </p:txBody>
+      </p:sp>
+      <p:sp>
+        <p:nvSpPr>
+          <p:cNvPr id="5" name="Rectangle 4"/>
+          <p:cNvSpPr/>
+          <p:nvPr/>
+        </p:nvSpPr>
+        <p:spPr>
+          <a:xfrm>
+            <a:off x="914400" y="2560320"/>
+            <a:ext cx="2286000" cy="38100"/>
+          </a:xfrm>
+          <a:prstGeom prst="rect">
+            <a:avLst/>
+          </a:prstGeom>
+          <a:solidFill>
+            <a:srgbClr val="C99A2E"/>
+          </a:solidFill>
+          <a:ln>
+            <a:noFill/>
+          </a:ln>
+        </p:spPr>
+        <p:style>
+          <a:lnRef idx="1">
+            <a:schemeClr val="accent1"/>
+          </a:lnRef>
+          <a:fillRef idx="3">
+            <a:schemeClr val="accent1"/>
+          </a:fillRef>
+          <a:effectRef idx="2">
+            <a:schemeClr val="accent1"/>
+          </a:effectRef>
+          <a:fontRef idx="minor">
+            <a:schemeClr val="lt1"/>
+          </a:fontRef>
+        </p:style>
+        <p:txBody>
+          <a:bodyPr rtlCol="0" anchor="ctr"/>
+          <a:lstStyle/>
+          <a:p>
+            <a:pPr algn="ctr"/>
+          </a:p>
+        </p:txBody>
+      </p:sp>
+      <p:sp>
+        <p:nvSpPr>
+          <p:cNvPr id="6" name="TextBox 5"/>
+          <p:cNvSpPr txBox="1"/>
+          <p:nvPr/>
+        </p:nvSpPr>
+        <p:spPr>
+          <a:xfrm>
+            <a:off x="914400" y="2834640"/>
+            <a:ext cx="5486400" cy="457200"/>
+          </a:xfrm>
+          <a:prstGeom prst="rect">
+            <a:avLst/>
+          </a:prstGeom>
+          <a:noFill/>
+        </p:spPr>
+        <p:txBody>
+          <a:bodyPr wrap="square">
+            <a:spAutoFit/>
+          </a:bodyPr>
+          <a:lstStyle/>
+          <a:p>
+            <a:pPr algn="l">
+              <a:defRPr sz="1800" b="0" i="0">
+                <a:solidFill>
+                  <a:srgbClr val="E8C56D"/>
+                </a:solidFill>
+                <a:latin typeface="Calibri"/>
+              </a:defRPr>
+            </a:pPr>
+            <a:r>
+              <a:t>Готов ответить на вопросы</a:t>
+            </a:r>
+          </a:p>
+        </p:txBody>
+      </p:sp>
+      <p:sp>
+        <p:nvSpPr>
+          <p:cNvPr id="7" name="TextBox 6"/>
+          <p:cNvSpPr txBox="1"/>
+          <p:nvPr/>
+        </p:nvSpPr>
+        <p:spPr>
+          <a:xfrm>
+            <a:off x="914400" y="3474720"/>
+            <a:ext cx="5486400" cy="365760"/>
+          </a:xfrm>
+          <a:prstGeom prst="rect">
+            <a:avLst/>
+          </a:prstGeom>
+          <a:noFill/>
+        </p:spPr>
+        <p:txBody>
+          <a:bodyPr wrap="square">
+            <a:spAutoFit/>
+          </a:bodyPr>
+          <a:lstStyle/>
+          <a:p>
+            <a:pPr algn="l">
+              <a:defRPr sz="1100" b="0" i="0">
+                <a:solidFill>
+                  <a:srgbClr val="8A7A6A"/>
+                </a:solidFill>
+                <a:latin typeface="Calibri"/>
+              </a:defRPr>
+            </a:pPr>
+            <a:r>
+              <a:t>Тверской филиал РГУ им. А.Н. Косыгина  •  История искусств</a:t>
+            </a:r>
+          </a:p>
+        </p:txBody>
+      </p:sp>
       <p:pic>
         <p:nvPicPr>
-          <p:cNvPr id="4" name="Picture 3" descr="family_portrait.jpg"/>
+          <p:cNvPr id="8" name="Picture 7" descr="family_portrait.jpg"/>
           <p:cNvPicPr>
             <a:picLocks noChangeAspect="1"/>
           </p:cNvPicPr>
@@ -4190,8 +4267,8 @@
         </p:blipFill>
         <p:spPr>
           <a:xfrm>
-            <a:off x="274320" y="4572000"/>
-            <a:ext cx="1504411" cy="1828800"/>
+            <a:off x="457200" y="4206240"/>
+            <a:ext cx="1880514" cy="2286000"/>
           </a:xfrm>
           <a:prstGeom prst="rect">
             <a:avLst/>
@@ -4200,7 +4277,7 @@
       </p:pic>
       <p:pic>
         <p:nvPicPr>
-          <p:cNvPr id="5" name="Picture 4" descr="st_martin.jpg"/>
+          <p:cNvPr id="9" name="Picture 8" descr="bentivoglio.jpg"/>
           <p:cNvPicPr>
             <a:picLocks noChangeAspect="1"/>
           </p:cNvPicPr>
@@ -4214,8 +4291,8 @@
         </p:blipFill>
         <p:spPr>
           <a:xfrm>
-            <a:off x="2057400" y="4572000"/>
-            <a:ext cx="1452149" cy="1828800"/>
+            <a:off x="2474874" y="4206240"/>
+            <a:ext cx="2068388" cy="2286000"/>
           </a:xfrm>
           <a:prstGeom prst="rect">
             <a:avLst/>
@@ -4224,7 +4301,7 @@
       </p:pic>
       <p:pic>
         <p:nvPicPr>
-          <p:cNvPr id="6" name="Picture 5" descr="bentivoglio.jpg"/>
+          <p:cNvPr id="10" name="Picture 9" descr="charles_hunt.jpg"/>
           <p:cNvPicPr>
             <a:picLocks noChangeAspect="1"/>
           </p:cNvPicPr>
@@ -4238,8 +4315,8 @@
         </p:blipFill>
         <p:spPr>
           <a:xfrm>
-            <a:off x="3840480" y="4572000"/>
-            <a:ext cx="1654711" cy="1828800"/>
+            <a:off x="4680422" y="4206240"/>
+            <a:ext cx="1781299" cy="2286000"/>
           </a:xfrm>
           <a:prstGeom prst="rect">
             <a:avLst/>
@@ -4248,7 +4325,7 @@
       </p:pic>
       <p:pic>
         <p:nvPicPr>
-          <p:cNvPr id="7" name="Picture 6" descr="charles_hunt.jpg"/>
+          <p:cNvPr id="11" name="Picture 10" descr="maria_de_tassis.jpg"/>
           <p:cNvPicPr>
             <a:picLocks noChangeAspect="1"/>
           </p:cNvPicPr>
@@ -4262,189 +4339,14 @@
         </p:blipFill>
         <p:spPr>
           <a:xfrm>
-            <a:off x="5623559" y="4572000"/>
-            <a:ext cx="1425039" cy="1828800"/>
+            <a:off x="6598880" y="4206240"/>
+            <a:ext cx="1625600" cy="2286000"/>
           </a:xfrm>
           <a:prstGeom prst="rect">
             <a:avLst/>
           </a:prstGeom>
         </p:spPr>
       </p:pic>
-      <p:pic>
-        <p:nvPicPr>
-          <p:cNvPr id="8" name="Picture 7" descr="maria_de_tassis.jpg"/>
-          <p:cNvPicPr>
-            <a:picLocks noChangeAspect="1"/>
-          </p:cNvPicPr>
-          <p:nvPr/>
-        </p:nvPicPr>
-        <p:blipFill>
-          <a:blip r:embed="rId6"/>
-          <a:stretch>
-            <a:fillRect/>
-          </a:stretch>
-        </p:blipFill>
-        <p:spPr>
-          <a:xfrm>
-            <a:off x="7406640" y="4572000"/>
-            <a:ext cx="1300480" cy="1828800"/>
-          </a:xfrm>
-          <a:prstGeom prst="rect">
-            <a:avLst/>
-          </a:prstGeom>
-        </p:spPr>
-      </p:pic>
-      <p:sp>
-        <p:nvSpPr>
-          <p:cNvPr id="9" name="TextBox 8"/>
-          <p:cNvSpPr txBox="1"/>
-          <p:nvPr/>
-        </p:nvSpPr>
-        <p:spPr>
-          <a:xfrm>
-            <a:off x="914400" y="1371600"/>
-            <a:ext cx="7315200" cy="1371600"/>
-          </a:xfrm>
-          <a:prstGeom prst="rect">
-            <a:avLst/>
-          </a:prstGeom>
-          <a:noFill/>
-        </p:spPr>
-        <p:txBody>
-          <a:bodyPr wrap="square">
-            <a:spAutoFit/>
-          </a:bodyPr>
-          <a:lstStyle/>
-          <a:p>
-            <a:pPr algn="l">
-              <a:defRPr sz="3600" b="1" i="0">
-                <a:solidFill>
-                  <a:srgbClr val="FFFFFF"/>
-                </a:solidFill>
-                <a:latin typeface="Georgia"/>
-              </a:defRPr>
-            </a:pPr>
-            <a:r>
-              <a:t>СПАСИБО ЗА ВНИМАНИЕ</a:t>
-            </a:r>
-          </a:p>
-        </p:txBody>
-      </p:sp>
-      <p:sp>
-        <p:nvSpPr>
-          <p:cNvPr id="10" name="Rectangle 9"/>
-          <p:cNvSpPr/>
-          <p:nvPr/>
-        </p:nvSpPr>
-        <p:spPr>
-          <a:xfrm>
-            <a:off x="914400" y="2743200"/>
-            <a:ext cx="2286000" cy="38100"/>
-          </a:xfrm>
-          <a:prstGeom prst="rect">
-            <a:avLst/>
-          </a:prstGeom>
-          <a:solidFill>
-            <a:srgbClr val="C99A2E"/>
-          </a:solidFill>
-          <a:ln>
-            <a:noFill/>
-          </a:ln>
-        </p:spPr>
-        <p:style>
-          <a:lnRef idx="1">
-            <a:schemeClr val="accent1"/>
-          </a:lnRef>
-          <a:fillRef idx="3">
-            <a:schemeClr val="accent1"/>
-          </a:fillRef>
-          <a:effectRef idx="2">
-            <a:schemeClr val="accent1"/>
-          </a:effectRef>
-          <a:fontRef idx="minor">
-            <a:schemeClr val="lt1"/>
-          </a:fontRef>
-        </p:style>
-        <p:txBody>
-          <a:bodyPr rtlCol="0" anchor="ctr"/>
-          <a:lstStyle/>
-          <a:p>
-            <a:pPr algn="ctr"/>
-          </a:p>
-        </p:txBody>
-      </p:sp>
-      <p:sp>
-        <p:nvSpPr>
-          <p:cNvPr id="11" name="TextBox 10"/>
-          <p:cNvSpPr txBox="1"/>
-          <p:nvPr/>
-        </p:nvSpPr>
-        <p:spPr>
-          <a:xfrm>
-            <a:off x="914400" y="3017520"/>
-            <a:ext cx="5486400" cy="548640"/>
-          </a:xfrm>
-          <a:prstGeom prst="rect">
-            <a:avLst/>
-          </a:prstGeom>
-          <a:noFill/>
-        </p:spPr>
-        <p:txBody>
-          <a:bodyPr wrap="square">
-            <a:spAutoFit/>
-          </a:bodyPr>
-          <a:lstStyle/>
-          <a:p>
-            <a:pPr algn="l">
-              <a:defRPr sz="1800" b="0" i="0">
-                <a:solidFill>
-                  <a:srgbClr val="E8C56D"/>
-                </a:solidFill>
-                <a:latin typeface="Calibri"/>
-              </a:defRPr>
-            </a:pPr>
-            <a:r>
-              <a:t>Готов ответить на вопросы</a:t>
-            </a:r>
-          </a:p>
-        </p:txBody>
-      </p:sp>
-      <p:sp>
-        <p:nvSpPr>
-          <p:cNvPr id="12" name="TextBox 11"/>
-          <p:cNvSpPr txBox="1"/>
-          <p:nvPr/>
-        </p:nvSpPr>
-        <p:spPr>
-          <a:xfrm>
-            <a:off x="914400" y="3840480"/>
-            <a:ext cx="5486400" cy="457200"/>
-          </a:xfrm>
-          <a:prstGeom prst="rect">
-            <a:avLst/>
-          </a:prstGeom>
-          <a:noFill/>
-        </p:spPr>
-        <p:txBody>
-          <a:bodyPr wrap="square">
-            <a:spAutoFit/>
-          </a:bodyPr>
-          <a:lstStyle/>
-          <a:p>
-            <a:pPr algn="l">
-              <a:defRPr sz="1100" b="0" i="0">
-                <a:solidFill>
-                  <a:srgbClr val="8A7A6A"/>
-                </a:solidFill>
-                <a:latin typeface="Calibri"/>
-              </a:defRPr>
-            </a:pPr>
-            <a:r>
-              <a:t>Тверской филиал РГУ им. А.Н. Косыгина  •  История искусств</a:t>
-            </a:r>
-          </a:p>
-        </p:txBody>
-      </p:sp>
     </p:spTree>
   </p:cSld>
   <p:clrMapOvr>
@@ -4522,8 +4424,8 @@
         </p:nvSpPr>
         <p:spPr>
           <a:xfrm>
-            <a:off x="274320" y="731520"/>
-            <a:ext cx="2926080" cy="5669280"/>
+            <a:off x="274320" y="640080"/>
+            <a:ext cx="2743200" cy="5852160"/>
           </a:xfrm>
           <a:prstGeom prst="rect">
             <a:avLst/>
@@ -4573,8 +4475,8 @@
         </p:blipFill>
         <p:spPr>
           <a:xfrm>
-            <a:off x="411480" y="868680"/>
-            <a:ext cx="3619260" cy="5394960"/>
+            <a:off x="365760" y="1657921"/>
+            <a:ext cx="2560320" cy="3816477"/>
           </a:xfrm>
           <a:prstGeom prst="rect">
             <a:avLst/>
@@ -4589,8 +4491,8 @@
         </p:nvSpPr>
         <p:spPr>
           <a:xfrm>
-            <a:off x="3474720" y="457200"/>
-            <a:ext cx="5303520" cy="731520"/>
+            <a:off x="3291840" y="457200"/>
+            <a:ext cx="5486400" cy="640080"/>
           </a:xfrm>
           <a:prstGeom prst="rect">
             <a:avLst/>
@@ -4625,8 +4527,8 @@
         </p:nvSpPr>
         <p:spPr>
           <a:xfrm>
-            <a:off x="3474720" y="1097280"/>
-            <a:ext cx="5303520" cy="365760"/>
+            <a:off x="3291840" y="1051560"/>
+            <a:ext cx="5486400" cy="365760"/>
           </a:xfrm>
           <a:prstGeom prst="rect">
             <a:avLst/>
@@ -4661,7 +4563,7 @@
         </p:nvSpPr>
         <p:spPr>
           <a:xfrm>
-            <a:off x="3474720" y="1554480"/>
+            <a:off x="3291840" y="1463040"/>
             <a:ext cx="1371600" cy="25400"/>
           </a:xfrm>
           <a:prstGeom prst="rect">
@@ -4704,8 +4606,8 @@
         </p:nvSpPr>
         <p:spPr>
           <a:xfrm>
-            <a:off x="3474720" y="1737360"/>
-            <a:ext cx="5303520" cy="4754880"/>
+            <a:off x="3291840" y="1645920"/>
+            <a:ext cx="5486400" cy="4937760"/>
           </a:xfrm>
           <a:prstGeom prst="rect">
             <a:avLst/>
@@ -4720,7 +4622,7 @@
           <a:p>
             <a:pPr>
               <a:spcBef>
-                <a:spcPts val="800"/>
+                <a:spcPts val="900"/>
               </a:spcBef>
               <a:defRPr sz="1300">
                 <a:solidFill>
@@ -4736,7 +4638,7 @@
           <a:p>
             <a:pPr>
               <a:spcBef>
-                <a:spcPts val="800"/>
+                <a:spcPts val="900"/>
               </a:spcBef>
               <a:defRPr sz="1300">
                 <a:solidFill>
@@ -4752,7 +4654,7 @@
           <a:p>
             <a:pPr>
               <a:spcBef>
-                <a:spcPts val="800"/>
+                <a:spcPts val="900"/>
               </a:spcBef>
               <a:defRPr sz="1300">
                 <a:solidFill>
@@ -4765,7 +4667,7 @@
           <a:p>
             <a:pPr>
               <a:spcBef>
-                <a:spcPts val="800"/>
+                <a:spcPts val="900"/>
               </a:spcBef>
               <a:defRPr sz="1300">
                 <a:solidFill>
@@ -4781,7 +4683,7 @@
           <a:p>
             <a:pPr>
               <a:spcBef>
-                <a:spcPts val="800"/>
+                <a:spcPts val="900"/>
               </a:spcBef>
               <a:defRPr sz="1300">
                 <a:solidFill>
@@ -4797,7 +4699,7 @@
           <a:p>
             <a:pPr>
               <a:spcBef>
-                <a:spcPts val="800"/>
+                <a:spcPts val="900"/>
               </a:spcBef>
               <a:defRPr sz="1300">
                 <a:solidFill>
@@ -4813,7 +4715,7 @@
           <a:p>
             <a:pPr>
               <a:spcBef>
-                <a:spcPts val="800"/>
+                <a:spcPts val="900"/>
               </a:spcBef>
               <a:defRPr sz="1300">
                 <a:solidFill>
@@ -4829,7 +4731,7 @@
           <a:p>
             <a:pPr>
               <a:spcBef>
-                <a:spcPts val="800"/>
+                <a:spcPts val="900"/>
               </a:spcBef>
               <a:defRPr sz="1300">
                 <a:solidFill>
@@ -4845,7 +4747,7 @@
           <a:p>
             <a:pPr>
               <a:spcBef>
-                <a:spcPts val="800"/>
+                <a:spcPts val="900"/>
               </a:spcBef>
               <a:defRPr sz="1300">
                 <a:solidFill>
@@ -4861,7 +4763,7 @@
           <a:p>
             <a:pPr>
               <a:spcBef>
-                <a:spcPts val="800"/>
+                <a:spcPts val="900"/>
               </a:spcBef>
               <a:defRPr sz="1300">
                 <a:solidFill>
@@ -4989,8 +4891,8 @@
         </p:nvSpPr>
         <p:spPr>
           <a:xfrm>
-            <a:off x="274320" y="548640"/>
-            <a:ext cx="3840480" cy="5943600"/>
+            <a:off x="274320" y="457200"/>
+            <a:ext cx="3657600" cy="6035040"/>
           </a:xfrm>
           <a:prstGeom prst="rect">
             <a:avLst/>
@@ -5040,8 +4942,8 @@
         </p:blipFill>
         <p:spPr>
           <a:xfrm>
-            <a:off x="457200" y="731520"/>
-            <a:ext cx="4588454" cy="5577840"/>
+            <a:off x="411480" y="1418320"/>
+            <a:ext cx="3383280" cy="4112799"/>
           </a:xfrm>
           <a:prstGeom prst="rect">
             <a:avLst/>
@@ -5056,8 +4958,8 @@
         </p:nvSpPr>
         <p:spPr>
           <a:xfrm>
-            <a:off x="4389120" y="640080"/>
-            <a:ext cx="4480560" cy="822960"/>
+            <a:off x="4206240" y="548640"/>
+            <a:ext cx="4663440" cy="731520"/>
           </a:xfrm>
           <a:prstGeom prst="rect">
             <a:avLst/>
@@ -5092,8 +4994,8 @@
         </p:nvSpPr>
         <p:spPr>
           <a:xfrm>
-            <a:off x="4389120" y="1371600"/>
-            <a:ext cx="4480560" cy="365760"/>
+            <a:off x="4206240" y="1234440"/>
+            <a:ext cx="4663440" cy="365760"/>
           </a:xfrm>
           <a:prstGeom prst="rect">
             <a:avLst/>
@@ -5107,7 +5009,7 @@
           <a:lstStyle/>
           <a:p>
             <a:pPr algn="l">
-              <a:defRPr sz="1300" b="0" i="1">
+              <a:defRPr sz="1200" b="0" i="1">
                 <a:solidFill>
                   <a:srgbClr val="E8C56D"/>
                 </a:solidFill>
@@ -5128,7 +5030,7 @@
         </p:nvSpPr>
         <p:spPr>
           <a:xfrm>
-            <a:off x="4389120" y="1783080"/>
+            <a:off x="4206240" y="1645920"/>
             <a:ext cx="1371600" cy="25400"/>
           </a:xfrm>
           <a:prstGeom prst="rect">
@@ -5171,8 +5073,8 @@
         </p:nvSpPr>
         <p:spPr>
           <a:xfrm>
-            <a:off x="4389120" y="2011680"/>
-            <a:ext cx="4480560" cy="4389120"/>
+            <a:off x="4206240" y="1828800"/>
+            <a:ext cx="4663440" cy="4572000"/>
           </a:xfrm>
           <a:prstGeom prst="rect">
             <a:avLst/>
@@ -5187,7 +5089,7 @@
           <a:p>
             <a:pPr>
               <a:spcBef>
-                <a:spcPts val="1000"/>
+                <a:spcPts val="800"/>
               </a:spcBef>
               <a:defRPr sz="1200">
                 <a:solidFill>
@@ -5203,20 +5105,20 @@
           <a:p>
             <a:pPr>
               <a:spcBef>
-                <a:spcPts val="1000"/>
-              </a:spcBef>
-              <a:defRPr sz="1200">
-                <a:solidFill>
-                  <a:srgbClr val="E8E0D0"/>
-                </a:solidFill>
-                <a:latin typeface="Calibri"/>
-              </a:defRPr>
-            </a:pPr>
-          </a:p>
-          <a:p>
-            <a:pPr>
-              <a:spcBef>
-                <a:spcPts val="1000"/>
+                <a:spcPts val="800"/>
+              </a:spcBef>
+              <a:defRPr sz="1200">
+                <a:solidFill>
+                  <a:srgbClr val="E8E0D0"/>
+                </a:solidFill>
+                <a:latin typeface="Calibri"/>
+              </a:defRPr>
+            </a:pPr>
+          </a:p>
+          <a:p>
+            <a:pPr>
+              <a:spcBef>
+                <a:spcPts val="800"/>
               </a:spcBef>
               <a:defRPr sz="1200">
                 <a:solidFill>
@@ -5232,7 +5134,7 @@
           <a:p>
             <a:pPr>
               <a:spcBef>
-                <a:spcPts val="1000"/>
+                <a:spcPts val="800"/>
               </a:spcBef>
               <a:defRPr sz="1200">
                 <a:solidFill>
@@ -5248,7 +5150,7 @@
           <a:p>
             <a:pPr>
               <a:spcBef>
-                <a:spcPts val="1000"/>
+                <a:spcPts val="800"/>
               </a:spcBef>
               <a:defRPr sz="1200">
                 <a:solidFill>
@@ -5264,20 +5166,20 @@
           <a:p>
             <a:pPr>
               <a:spcBef>
-                <a:spcPts val="1000"/>
-              </a:spcBef>
-              <a:defRPr sz="1200">
-                <a:solidFill>
-                  <a:srgbClr val="E8E0D0"/>
-                </a:solidFill>
-                <a:latin typeface="Calibri"/>
-              </a:defRPr>
-            </a:pPr>
-          </a:p>
-          <a:p>
-            <a:pPr>
-              <a:spcBef>
-                <a:spcPts val="1000"/>
+                <a:spcPts val="800"/>
+              </a:spcBef>
+              <a:defRPr sz="1200">
+                <a:solidFill>
+                  <a:srgbClr val="E8E0D0"/>
+                </a:solidFill>
+                <a:latin typeface="Calibri"/>
+              </a:defRPr>
+            </a:pPr>
+          </a:p>
+          <a:p>
+            <a:pPr>
+              <a:spcBef>
+                <a:spcPts val="800"/>
               </a:spcBef>
               <a:defRPr sz="1200">
                 <a:solidFill>
@@ -5293,7 +5195,7 @@
           <a:p>
             <a:pPr>
               <a:spcBef>
-                <a:spcPts val="1000"/>
+                <a:spcPts val="800"/>
               </a:spcBef>
               <a:defRPr sz="1200">
                 <a:solidFill>
@@ -5309,20 +5211,20 @@
           <a:p>
             <a:pPr>
               <a:spcBef>
-                <a:spcPts val="1000"/>
-              </a:spcBef>
-              <a:defRPr sz="1200">
-                <a:solidFill>
-                  <a:srgbClr val="E8E0D0"/>
-                </a:solidFill>
-                <a:latin typeface="Calibri"/>
-              </a:defRPr>
-            </a:pPr>
-          </a:p>
-          <a:p>
-            <a:pPr>
-              <a:spcBef>
-                <a:spcPts val="1000"/>
+                <a:spcPts val="800"/>
+              </a:spcBef>
+              <a:defRPr sz="1200">
+                <a:solidFill>
+                  <a:srgbClr val="E8E0D0"/>
+                </a:solidFill>
+                <a:latin typeface="Calibri"/>
+              </a:defRPr>
+            </a:pPr>
+          </a:p>
+          <a:p>
+            <a:pPr>
+              <a:spcBef>
+                <a:spcPts val="800"/>
               </a:spcBef>
               <a:defRPr sz="1200">
                 <a:solidFill>
@@ -5338,7 +5240,7 @@
           <a:p>
             <a:pPr>
               <a:spcBef>
-                <a:spcPts val="1000"/>
+                <a:spcPts val="800"/>
               </a:spcBef>
               <a:defRPr sz="1200">
                 <a:solidFill>
@@ -5354,7 +5256,7 @@
           <a:p>
             <a:pPr>
               <a:spcBef>
-                <a:spcPts val="1000"/>
+                <a:spcPts val="800"/>
               </a:spcBef>
               <a:defRPr sz="1200">
                 <a:solidFill>
@@ -5482,8 +5384,8 @@
         </p:nvSpPr>
         <p:spPr>
           <a:xfrm>
-            <a:off x="274320" y="548640"/>
-            <a:ext cx="3840480" cy="5943600"/>
+            <a:off x="274320" y="457200"/>
+            <a:ext cx="3657600" cy="6035040"/>
           </a:xfrm>
           <a:prstGeom prst="rect">
             <a:avLst/>
@@ -5533,8 +5435,8 @@
         </p:blipFill>
         <p:spPr>
           <a:xfrm>
-            <a:off x="457200" y="731520"/>
-            <a:ext cx="4429054" cy="5577840"/>
+            <a:off x="411480" y="1344311"/>
+            <a:ext cx="3383280" cy="4260818"/>
           </a:xfrm>
           <a:prstGeom prst="rect">
             <a:avLst/>
@@ -5549,8 +5451,8 @@
         </p:nvSpPr>
         <p:spPr>
           <a:xfrm>
-            <a:off x="4389120" y="640080"/>
-            <a:ext cx="4480560" cy="822960"/>
+            <a:off x="4206240" y="548640"/>
+            <a:ext cx="4663440" cy="731520"/>
           </a:xfrm>
           <a:prstGeom prst="rect">
             <a:avLst/>
@@ -5585,8 +5487,8 @@
         </p:nvSpPr>
         <p:spPr>
           <a:xfrm>
-            <a:off x="4389120" y="1371600"/>
-            <a:ext cx="4480560" cy="365760"/>
+            <a:off x="4206240" y="1234440"/>
+            <a:ext cx="4663440" cy="365760"/>
           </a:xfrm>
           <a:prstGeom prst="rect">
             <a:avLst/>
@@ -5600,7 +5502,7 @@
           <a:lstStyle/>
           <a:p>
             <a:pPr algn="l">
-              <a:defRPr sz="1300" b="0" i="1">
+              <a:defRPr sz="1200" b="0" i="1">
                 <a:solidFill>
                   <a:srgbClr val="E8C56D"/>
                 </a:solidFill>
@@ -5621,7 +5523,7 @@
         </p:nvSpPr>
         <p:spPr>
           <a:xfrm>
-            <a:off x="4389120" y="1783080"/>
+            <a:off x="4206240" y="1645920"/>
             <a:ext cx="1371600" cy="25400"/>
           </a:xfrm>
           <a:prstGeom prst="rect">
@@ -5664,8 +5566,8 @@
         </p:nvSpPr>
         <p:spPr>
           <a:xfrm>
-            <a:off x="4389120" y="2011680"/>
-            <a:ext cx="4480560" cy="4389120"/>
+            <a:off x="4206240" y="1828800"/>
+            <a:ext cx="4663440" cy="4572000"/>
           </a:xfrm>
           <a:prstGeom prst="rect">
             <a:avLst/>
@@ -5680,7 +5582,7 @@
           <a:p>
             <a:pPr>
               <a:spcBef>
-                <a:spcPts val="1000"/>
+                <a:spcPts val="800"/>
               </a:spcBef>
               <a:defRPr sz="1200">
                 <a:solidFill>
@@ -5696,20 +5598,20 @@
           <a:p>
             <a:pPr>
               <a:spcBef>
-                <a:spcPts val="1000"/>
-              </a:spcBef>
-              <a:defRPr sz="1200">
-                <a:solidFill>
-                  <a:srgbClr val="E8E0D0"/>
-                </a:solidFill>
-                <a:latin typeface="Calibri"/>
-              </a:defRPr>
-            </a:pPr>
-          </a:p>
-          <a:p>
-            <a:pPr>
-              <a:spcBef>
-                <a:spcPts val="1000"/>
+                <a:spcPts val="800"/>
+              </a:spcBef>
+              <a:defRPr sz="1200">
+                <a:solidFill>
+                  <a:srgbClr val="E8E0D0"/>
+                </a:solidFill>
+                <a:latin typeface="Calibri"/>
+              </a:defRPr>
+            </a:pPr>
+          </a:p>
+          <a:p>
+            <a:pPr>
+              <a:spcBef>
+                <a:spcPts val="800"/>
               </a:spcBef>
               <a:defRPr sz="1200">
                 <a:solidFill>
@@ -5725,7 +5627,7 @@
           <a:p>
             <a:pPr>
               <a:spcBef>
-                <a:spcPts val="1000"/>
+                <a:spcPts val="800"/>
               </a:spcBef>
               <a:defRPr sz="1200">
                 <a:solidFill>
@@ -5741,7 +5643,7 @@
           <a:p>
             <a:pPr>
               <a:spcBef>
-                <a:spcPts val="1000"/>
+                <a:spcPts val="800"/>
               </a:spcBef>
               <a:defRPr sz="1200">
                 <a:solidFill>
@@ -5757,7 +5659,7 @@
           <a:p>
             <a:pPr>
               <a:spcBef>
-                <a:spcPts val="1000"/>
+                <a:spcPts val="800"/>
               </a:spcBef>
               <a:defRPr sz="1200">
                 <a:solidFill>
@@ -5773,20 +5675,20 @@
           <a:p>
             <a:pPr>
               <a:spcBef>
-                <a:spcPts val="1000"/>
-              </a:spcBef>
-              <a:defRPr sz="1200">
-                <a:solidFill>
-                  <a:srgbClr val="E8E0D0"/>
-                </a:solidFill>
-                <a:latin typeface="Calibri"/>
-              </a:defRPr>
-            </a:pPr>
-          </a:p>
-          <a:p>
-            <a:pPr>
-              <a:spcBef>
-                <a:spcPts val="1000"/>
+                <a:spcPts val="800"/>
+              </a:spcBef>
+              <a:defRPr sz="1200">
+                <a:solidFill>
+                  <a:srgbClr val="E8E0D0"/>
+                </a:solidFill>
+                <a:latin typeface="Calibri"/>
+              </a:defRPr>
+            </a:pPr>
+          </a:p>
+          <a:p>
+            <a:pPr>
+              <a:spcBef>
+                <a:spcPts val="800"/>
               </a:spcBef>
               <a:defRPr sz="1200">
                 <a:solidFill>
@@ -5802,7 +5704,7 @@
           <a:p>
             <a:pPr>
               <a:spcBef>
-                <a:spcPts val="1000"/>
+                <a:spcPts val="800"/>
               </a:spcBef>
               <a:defRPr sz="1200">
                 <a:solidFill>
@@ -5818,20 +5720,20 @@
           <a:p>
             <a:pPr>
               <a:spcBef>
-                <a:spcPts val="1000"/>
-              </a:spcBef>
-              <a:defRPr sz="1200">
-                <a:solidFill>
-                  <a:srgbClr val="E8E0D0"/>
-                </a:solidFill>
-                <a:latin typeface="Calibri"/>
-              </a:defRPr>
-            </a:pPr>
-          </a:p>
-          <a:p>
-            <a:pPr>
-              <a:spcBef>
-                <a:spcPts val="1000"/>
+                <a:spcPts val="800"/>
+              </a:spcBef>
+              <a:defRPr sz="1200">
+                <a:solidFill>
+                  <a:srgbClr val="E8E0D0"/>
+                </a:solidFill>
+                <a:latin typeface="Calibri"/>
+              </a:defRPr>
+            </a:pPr>
+          </a:p>
+          <a:p>
+            <a:pPr>
+              <a:spcBef>
+                <a:spcPts val="800"/>
               </a:spcBef>
               <a:defRPr sz="1200">
                 <a:solidFill>
@@ -5847,7 +5749,7 @@
           <a:p>
             <a:pPr>
               <a:spcBef>
-                <a:spcPts val="1000"/>
+                <a:spcPts val="800"/>
               </a:spcBef>
               <a:defRPr sz="1200">
                 <a:solidFill>
@@ -5975,8 +5877,8 @@
         </p:nvSpPr>
         <p:spPr>
           <a:xfrm>
-            <a:off x="274320" y="548640"/>
-            <a:ext cx="3840480" cy="5943600"/>
+            <a:off x="274320" y="457200"/>
+            <a:ext cx="3657600" cy="6035040"/>
           </a:xfrm>
           <a:prstGeom prst="rect">
             <a:avLst/>
@@ -6026,8 +5928,8 @@
         </p:blipFill>
         <p:spPr>
           <a:xfrm>
-            <a:off x="457200" y="731520"/>
-            <a:ext cx="5046867" cy="5577840"/>
+            <a:off x="411480" y="1605105"/>
+            <a:ext cx="3383280" cy="3739229"/>
           </a:xfrm>
           <a:prstGeom prst="rect">
             <a:avLst/>
@@ -6042,8 +5944,8 @@
         </p:nvSpPr>
         <p:spPr>
           <a:xfrm>
-            <a:off x="4389120" y="640080"/>
-            <a:ext cx="4480560" cy="822960"/>
+            <a:off x="4206240" y="548640"/>
+            <a:ext cx="4663440" cy="731520"/>
           </a:xfrm>
           <a:prstGeom prst="rect">
             <a:avLst/>
@@ -6078,8 +5980,8 @@
         </p:nvSpPr>
         <p:spPr>
           <a:xfrm>
-            <a:off x="4389120" y="1371600"/>
-            <a:ext cx="4480560" cy="365760"/>
+            <a:off x="4206240" y="1234440"/>
+            <a:ext cx="4663440" cy="365760"/>
           </a:xfrm>
           <a:prstGeom prst="rect">
             <a:avLst/>
@@ -6093,7 +5995,7 @@
           <a:lstStyle/>
           <a:p>
             <a:pPr algn="l">
-              <a:defRPr sz="1300" b="0" i="1">
+              <a:defRPr sz="1200" b="0" i="1">
                 <a:solidFill>
                   <a:srgbClr val="E8C56D"/>
                 </a:solidFill>
@@ -6114,7 +6016,7 @@
         </p:nvSpPr>
         <p:spPr>
           <a:xfrm>
-            <a:off x="4389120" y="1783080"/>
+            <a:off x="4206240" y="1645920"/>
             <a:ext cx="1371600" cy="25400"/>
           </a:xfrm>
           <a:prstGeom prst="rect">
@@ -6157,8 +6059,8 @@
         </p:nvSpPr>
         <p:spPr>
           <a:xfrm>
-            <a:off x="4389120" y="2011680"/>
-            <a:ext cx="4480560" cy="4389120"/>
+            <a:off x="4206240" y="1828800"/>
+            <a:ext cx="4663440" cy="4572000"/>
           </a:xfrm>
           <a:prstGeom prst="rect">
             <a:avLst/>
@@ -6173,7 +6075,7 @@
           <a:p>
             <a:pPr>
               <a:spcBef>
-                <a:spcPts val="1000"/>
+                <a:spcPts val="800"/>
               </a:spcBef>
               <a:defRPr sz="1200">
                 <a:solidFill>
@@ -6189,65 +6091,81 @@
           <a:p>
             <a:pPr>
               <a:spcBef>
-                <a:spcPts val="1000"/>
-              </a:spcBef>
-              <a:defRPr sz="1200">
-                <a:solidFill>
-                  <a:srgbClr val="E8E0D0"/>
-                </a:solidFill>
-                <a:latin typeface="Calibri"/>
-              </a:defRPr>
-            </a:pPr>
-          </a:p>
-          <a:p>
-            <a:pPr>
-              <a:spcBef>
-                <a:spcPts val="1000"/>
-              </a:spcBef>
-              <a:defRPr sz="1200">
-                <a:solidFill>
-                  <a:srgbClr val="E8E0D0"/>
-                </a:solidFill>
-                <a:latin typeface="Calibri"/>
-              </a:defRPr>
-            </a:pPr>
-            <a:r>
-              <a:t>Написан в итальянский период. Кардинал Гвидо</a:t>
-            </a:r>
-          </a:p>
-          <a:p>
-            <a:pPr>
-              <a:spcBef>
-                <a:spcPts val="1000"/>
-              </a:spcBef>
-              <a:defRPr sz="1200">
-                <a:solidFill>
-                  <a:srgbClr val="E8E0D0"/>
-                </a:solidFill>
-                <a:latin typeface="Calibri"/>
-              </a:defRPr>
-            </a:pPr>
-            <a:r>
-              <a:t>Бентивольо — дипломат, связанный с Фландрией.</a:t>
-            </a:r>
-          </a:p>
-          <a:p>
-            <a:pPr>
-              <a:spcBef>
-                <a:spcPts val="1000"/>
-              </a:spcBef>
-              <a:defRPr sz="1200">
-                <a:solidFill>
-                  <a:srgbClr val="E8E0D0"/>
-                </a:solidFill>
-                <a:latin typeface="Calibri"/>
-              </a:defRPr>
-            </a:pPr>
-          </a:p>
-          <a:p>
-            <a:pPr>
-              <a:spcBef>
-                <a:spcPts val="1000"/>
+                <a:spcPts val="800"/>
+              </a:spcBef>
+              <a:defRPr sz="1200">
+                <a:solidFill>
+                  <a:srgbClr val="E8E0D0"/>
+                </a:solidFill>
+                <a:latin typeface="Calibri"/>
+              </a:defRPr>
+            </a:pPr>
+          </a:p>
+          <a:p>
+            <a:pPr>
+              <a:spcBef>
+                <a:spcPts val="800"/>
+              </a:spcBef>
+              <a:defRPr sz="1200">
+                <a:solidFill>
+                  <a:srgbClr val="E8E0D0"/>
+                </a:solidFill>
+                <a:latin typeface="Calibri"/>
+              </a:defRPr>
+            </a:pPr>
+            <a:r>
+              <a:t>Написан в итальянский период. Кардинал</a:t>
+            </a:r>
+          </a:p>
+          <a:p>
+            <a:pPr>
+              <a:spcBef>
+                <a:spcPts val="800"/>
+              </a:spcBef>
+              <a:defRPr sz="1200">
+                <a:solidFill>
+                  <a:srgbClr val="E8E0D0"/>
+                </a:solidFill>
+                <a:latin typeface="Calibri"/>
+              </a:defRPr>
+            </a:pPr>
+            <a:r>
+              <a:t>Гвидо Бентивольо — дипломат, связанный</a:t>
+            </a:r>
+          </a:p>
+          <a:p>
+            <a:pPr>
+              <a:spcBef>
+                <a:spcPts val="800"/>
+              </a:spcBef>
+              <a:defRPr sz="1200">
+                <a:solidFill>
+                  <a:srgbClr val="E8E0D0"/>
+                </a:solidFill>
+                <a:latin typeface="Calibri"/>
+              </a:defRPr>
+            </a:pPr>
+            <a:r>
+              <a:t>с Фландрией.</a:t>
+            </a:r>
+          </a:p>
+          <a:p>
+            <a:pPr>
+              <a:spcBef>
+                <a:spcPts val="800"/>
+              </a:spcBef>
+              <a:defRPr sz="1200">
+                <a:solidFill>
+                  <a:srgbClr val="E8E0D0"/>
+                </a:solidFill>
+                <a:latin typeface="Calibri"/>
+              </a:defRPr>
+            </a:pPr>
+          </a:p>
+          <a:p>
+            <a:pPr>
+              <a:spcBef>
+                <a:spcPts val="800"/>
               </a:spcBef>
               <a:defRPr sz="1200">
                 <a:solidFill>
@@ -6263,7 +6181,7 @@
           <a:p>
             <a:pPr>
               <a:spcBef>
-                <a:spcPts val="1000"/>
+                <a:spcPts val="800"/>
               </a:spcBef>
               <a:defRPr sz="1200">
                 <a:solidFill>
@@ -6279,7 +6197,7 @@
           <a:p>
             <a:pPr>
               <a:spcBef>
-                <a:spcPts val="1000"/>
+                <a:spcPts val="800"/>
               </a:spcBef>
               <a:defRPr sz="1200">
                 <a:solidFill>
@@ -6295,20 +6213,20 @@
           <a:p>
             <a:pPr>
               <a:spcBef>
-                <a:spcPts val="1000"/>
-              </a:spcBef>
-              <a:defRPr sz="1200">
-                <a:solidFill>
-                  <a:srgbClr val="E8E0D0"/>
-                </a:solidFill>
-                <a:latin typeface="Calibri"/>
-              </a:defRPr>
-            </a:pPr>
-          </a:p>
-          <a:p>
-            <a:pPr>
-              <a:spcBef>
-                <a:spcPts val="1000"/>
+                <a:spcPts val="800"/>
+              </a:spcBef>
+              <a:defRPr sz="1200">
+                <a:solidFill>
+                  <a:srgbClr val="E8E0D0"/>
+                </a:solidFill>
+                <a:latin typeface="Calibri"/>
+              </a:defRPr>
+            </a:pPr>
+          </a:p>
+          <a:p>
+            <a:pPr>
+              <a:spcBef>
+                <a:spcPts val="800"/>
               </a:spcBef>
               <a:defRPr sz="1200">
                 <a:solidFill>
@@ -6324,7 +6242,7 @@
           <a:p>
             <a:pPr>
               <a:spcBef>
-                <a:spcPts val="1000"/>
+                <a:spcPts val="800"/>
               </a:spcBef>
               <a:defRPr sz="1200">
                 <a:solidFill>
@@ -6335,22 +6253,6 @@
             </a:pPr>
             <a:r>
               <a:t>Ван Дейка как ведущего портретиста эпохи.</a:t>
-            </a:r>
-          </a:p>
-          <a:p>
-            <a:pPr>
-              <a:spcBef>
-                <a:spcPts val="1000"/>
-              </a:spcBef>
-              <a:defRPr sz="1200">
-                <a:solidFill>
-                  <a:srgbClr val="E8E0D0"/>
-                </a:solidFill>
-                <a:latin typeface="Calibri"/>
-              </a:defRPr>
-            </a:pPr>
-            <a:r>
-              <a:t>Передаёт ум и чувственность натуры.</a:t>
             </a:r>
           </a:p>
         </p:txBody>
@@ -6468,8 +6370,8 @@
         </p:nvSpPr>
         <p:spPr>
           <a:xfrm>
-            <a:off x="274320" y="548640"/>
-            <a:ext cx="3840480" cy="5943600"/>
+            <a:off x="274320" y="457200"/>
+            <a:ext cx="3657600" cy="6035040"/>
           </a:xfrm>
           <a:prstGeom prst="rect">
             <a:avLst/>
@@ -6519,8 +6421,8 @@
         </p:blipFill>
         <p:spPr>
           <a:xfrm>
-            <a:off x="457200" y="731520"/>
-            <a:ext cx="3741947" cy="5577840"/>
+            <a:off x="411480" y="953119"/>
+            <a:ext cx="3383280" cy="5043201"/>
           </a:xfrm>
           <a:prstGeom prst="rect">
             <a:avLst/>
@@ -6535,8 +6437,8 @@
         </p:nvSpPr>
         <p:spPr>
           <a:xfrm>
-            <a:off x="4389120" y="640080"/>
-            <a:ext cx="4480560" cy="822960"/>
+            <a:off x="4206240" y="548640"/>
+            <a:ext cx="4663440" cy="731520"/>
           </a:xfrm>
           <a:prstGeom prst="rect">
             <a:avLst/>
@@ -6571,8 +6473,8 @@
         </p:nvSpPr>
         <p:spPr>
           <a:xfrm>
-            <a:off x="4389120" y="1371600"/>
-            <a:ext cx="4480560" cy="365760"/>
+            <a:off x="4206240" y="1234440"/>
+            <a:ext cx="4663440" cy="365760"/>
           </a:xfrm>
           <a:prstGeom prst="rect">
             <a:avLst/>
@@ -6586,7 +6488,7 @@
           <a:lstStyle/>
           <a:p>
             <a:pPr algn="l">
-              <a:defRPr sz="1300" b="0" i="1">
+              <a:defRPr sz="1200" b="0" i="1">
                 <a:solidFill>
                   <a:srgbClr val="E8C56D"/>
                 </a:solidFill>
@@ -6607,7 +6509,7 @@
         </p:nvSpPr>
         <p:spPr>
           <a:xfrm>
-            <a:off x="4389120" y="1783080"/>
+            <a:off x="4206240" y="1645920"/>
             <a:ext cx="1371600" cy="25400"/>
           </a:xfrm>
           <a:prstGeom prst="rect">
@@ -6650,8 +6552,8 @@
         </p:nvSpPr>
         <p:spPr>
           <a:xfrm>
-            <a:off x="4389120" y="2011680"/>
-            <a:ext cx="4480560" cy="4389120"/>
+            <a:off x="4206240" y="1828800"/>
+            <a:ext cx="4663440" cy="4572000"/>
           </a:xfrm>
           <a:prstGeom prst="rect">
             <a:avLst/>
@@ -6666,7 +6568,7 @@
           <a:p>
             <a:pPr>
               <a:spcBef>
-                <a:spcPts val="1000"/>
+                <a:spcPts val="800"/>
               </a:spcBef>
               <a:defRPr sz="1200">
                 <a:solidFill>
@@ -6682,20 +6584,20 @@
           <a:p>
             <a:pPr>
               <a:spcBef>
-                <a:spcPts val="1000"/>
-              </a:spcBef>
-              <a:defRPr sz="1200">
-                <a:solidFill>
-                  <a:srgbClr val="E8E0D0"/>
-                </a:solidFill>
-                <a:latin typeface="Calibri"/>
-              </a:defRPr>
-            </a:pPr>
-          </a:p>
-          <a:p>
-            <a:pPr>
-              <a:spcBef>
-                <a:spcPts val="1000"/>
+                <a:spcPts val="800"/>
+              </a:spcBef>
+              <a:defRPr sz="1200">
+                <a:solidFill>
+                  <a:srgbClr val="E8E0D0"/>
+                </a:solidFill>
+                <a:latin typeface="Calibri"/>
+              </a:defRPr>
+            </a:pPr>
+          </a:p>
+          <a:p>
+            <a:pPr>
+              <a:spcBef>
+                <a:spcPts val="800"/>
               </a:spcBef>
               <a:defRPr sz="1200">
                 <a:solidFill>
@@ -6711,7 +6613,7 @@
           <a:p>
             <a:pPr>
               <a:spcBef>
-                <a:spcPts val="1000"/>
+                <a:spcPts val="800"/>
               </a:spcBef>
               <a:defRPr sz="1200">
                 <a:solidFill>
@@ -6727,52 +6629,36 @@
           <a:p>
             <a:pPr>
               <a:spcBef>
-                <a:spcPts val="1000"/>
-              </a:spcBef>
-              <a:defRPr sz="1200">
-                <a:solidFill>
-                  <a:srgbClr val="E8E0D0"/>
-                </a:solidFill>
-                <a:latin typeface="Calibri"/>
-              </a:defRPr>
-            </a:pPr>
-            <a:r>
-              <a:t>джентльмена в изысканной одежде — без</a:t>
-            </a:r>
-          </a:p>
-          <a:p>
-            <a:pPr>
-              <a:spcBef>
-                <a:spcPts val="1000"/>
-              </a:spcBef>
-              <a:defRPr sz="1200">
-                <a:solidFill>
-                  <a:srgbClr val="E8E0D0"/>
-                </a:solidFill>
-                <a:latin typeface="Calibri"/>
-              </a:defRPr>
-            </a:pPr>
-            <a:r>
-              <a:t>палитры и кистей.</a:t>
-            </a:r>
-          </a:p>
-          <a:p>
-            <a:pPr>
-              <a:spcBef>
-                <a:spcPts val="1000"/>
-              </a:spcBef>
-              <a:defRPr sz="1200">
-                <a:solidFill>
-                  <a:srgbClr val="E8E0D0"/>
-                </a:solidFill>
-                <a:latin typeface="Calibri"/>
-              </a:defRPr>
-            </a:pPr>
-          </a:p>
-          <a:p>
-            <a:pPr>
-              <a:spcBef>
-                <a:spcPts val="1000"/>
+                <a:spcPts val="800"/>
+              </a:spcBef>
+              <a:defRPr sz="1200">
+                <a:solidFill>
+                  <a:srgbClr val="E8E0D0"/>
+                </a:solidFill>
+                <a:latin typeface="Calibri"/>
+              </a:defRPr>
+            </a:pPr>
+            <a:r>
+              <a:t>джентльмена — без палитры и кистей.</a:t>
+            </a:r>
+          </a:p>
+          <a:p>
+            <a:pPr>
+              <a:spcBef>
+                <a:spcPts val="800"/>
+              </a:spcBef>
+              <a:defRPr sz="1200">
+                <a:solidFill>
+                  <a:srgbClr val="E8E0D0"/>
+                </a:solidFill>
+                <a:latin typeface="Calibri"/>
+              </a:defRPr>
+            </a:pPr>
+          </a:p>
+          <a:p>
+            <a:pPr>
+              <a:spcBef>
+                <a:spcPts val="800"/>
               </a:spcBef>
               <a:defRPr sz="1200">
                 <a:solidFill>
@@ -6788,52 +6674,36 @@
           <a:p>
             <a:pPr>
               <a:spcBef>
-                <a:spcPts val="1000"/>
-              </a:spcBef>
-              <a:defRPr sz="1200">
-                <a:solidFill>
-                  <a:srgbClr val="E8E0D0"/>
-                </a:solidFill>
-                <a:latin typeface="Calibri"/>
-              </a:defRPr>
-            </a:pPr>
-            <a:r>
-              <a:t>подчёркивает аристократизм. Отец был</a:t>
-            </a:r>
-          </a:p>
-          <a:p>
-            <a:pPr>
-              <a:spcBef>
-                <a:spcPts val="1000"/>
-              </a:spcBef>
-              <a:defRPr sz="1200">
-                <a:solidFill>
-                  <a:srgbClr val="E8E0D0"/>
-                </a:solidFill>
-                <a:latin typeface="Calibri"/>
-              </a:defRPr>
-            </a:pPr>
-            <a:r>
-              <a:t>богатым торговцем тканями.</a:t>
-            </a:r>
-          </a:p>
-          <a:p>
-            <a:pPr>
-              <a:spcBef>
-                <a:spcPts val="1000"/>
-              </a:spcBef>
-              <a:defRPr sz="1200">
-                <a:solidFill>
-                  <a:srgbClr val="E8E0D0"/>
-                </a:solidFill>
-                <a:latin typeface="Calibri"/>
-              </a:defRPr>
-            </a:pPr>
-          </a:p>
-          <a:p>
-            <a:pPr>
-              <a:spcBef>
-                <a:spcPts val="1000"/>
+                <a:spcPts val="800"/>
+              </a:spcBef>
+              <a:defRPr sz="1200">
+                <a:solidFill>
+                  <a:srgbClr val="E8E0D0"/>
+                </a:solidFill>
+                <a:latin typeface="Calibri"/>
+              </a:defRPr>
+            </a:pPr>
+            <a:r>
+              <a:t>подчёркивает аристократизм.</a:t>
+            </a:r>
+          </a:p>
+          <a:p>
+            <a:pPr>
+              <a:spcBef>
+                <a:spcPts val="800"/>
+              </a:spcBef>
+              <a:defRPr sz="1200">
+                <a:solidFill>
+                  <a:srgbClr val="E8E0D0"/>
+                </a:solidFill>
+                <a:latin typeface="Calibri"/>
+              </a:defRPr>
+            </a:pPr>
+          </a:p>
+          <a:p>
+            <a:pPr>
+              <a:spcBef>
+                <a:spcPts val="800"/>
               </a:spcBef>
               <a:defRPr sz="1200">
                 <a:solidFill>
@@ -6849,7 +6719,7 @@
           <a:p>
             <a:pPr>
               <a:spcBef>
-                <a:spcPts val="1000"/>
+                <a:spcPts val="800"/>
               </a:spcBef>
               <a:defRPr sz="1200">
                 <a:solidFill>
@@ -6977,8 +6847,8 @@
         </p:nvSpPr>
         <p:spPr>
           <a:xfrm>
-            <a:off x="274320" y="548640"/>
-            <a:ext cx="3840480" cy="5943600"/>
+            <a:off x="274320" y="457200"/>
+            <a:ext cx="3657600" cy="6035040"/>
           </a:xfrm>
           <a:prstGeom prst="rect">
             <a:avLst/>
@@ -7028,8 +6898,8 @@
         </p:blipFill>
         <p:spPr>
           <a:xfrm>
-            <a:off x="457200" y="731520"/>
-            <a:ext cx="3966464" cy="5577840"/>
+            <a:off x="411480" y="1095851"/>
+            <a:ext cx="3383280" cy="4757737"/>
           </a:xfrm>
           <a:prstGeom prst="rect">
             <a:avLst/>
@@ -7044,8 +6914,8 @@
         </p:nvSpPr>
         <p:spPr>
           <a:xfrm>
-            <a:off x="4389120" y="640080"/>
-            <a:ext cx="4480560" cy="822960"/>
+            <a:off x="4206240" y="548640"/>
+            <a:ext cx="4663440" cy="731520"/>
           </a:xfrm>
           <a:prstGeom prst="rect">
             <a:avLst/>
@@ -7080,8 +6950,8 @@
         </p:nvSpPr>
         <p:spPr>
           <a:xfrm>
-            <a:off x="4389120" y="1371600"/>
-            <a:ext cx="4480560" cy="365760"/>
+            <a:off x="4206240" y="1234440"/>
+            <a:ext cx="4663440" cy="365760"/>
           </a:xfrm>
           <a:prstGeom prst="rect">
             <a:avLst/>
@@ -7095,7 +6965,7 @@
           <a:lstStyle/>
           <a:p>
             <a:pPr algn="l">
-              <a:defRPr sz="1300" b="0" i="1">
+              <a:defRPr sz="1200" b="0" i="1">
                 <a:solidFill>
                   <a:srgbClr val="E8C56D"/>
                 </a:solidFill>
@@ -7116,7 +6986,7 @@
         </p:nvSpPr>
         <p:spPr>
           <a:xfrm>
-            <a:off x="4389120" y="1783080"/>
+            <a:off x="4206240" y="1645920"/>
             <a:ext cx="1371600" cy="25400"/>
           </a:xfrm>
           <a:prstGeom prst="rect">
@@ -7159,8 +7029,8 @@
         </p:nvSpPr>
         <p:spPr>
           <a:xfrm>
-            <a:off x="4389120" y="2011680"/>
-            <a:ext cx="4480560" cy="4389120"/>
+            <a:off x="4206240" y="1828800"/>
+            <a:ext cx="4663440" cy="4572000"/>
           </a:xfrm>
           <a:prstGeom prst="rect">
             <a:avLst/>
@@ -7175,7 +7045,7 @@
           <a:p>
             <a:pPr>
               <a:spcBef>
-                <a:spcPts val="1000"/>
+                <a:spcPts val="800"/>
               </a:spcBef>
               <a:defRPr sz="1200">
                 <a:solidFill>
@@ -7191,97 +7061,81 @@
           <a:p>
             <a:pPr>
               <a:spcBef>
-                <a:spcPts val="1000"/>
-              </a:spcBef>
-              <a:defRPr sz="1200">
-                <a:solidFill>
-                  <a:srgbClr val="E8E0D0"/>
-                </a:solidFill>
-                <a:latin typeface="Calibri"/>
-              </a:defRPr>
-            </a:pPr>
-          </a:p>
-          <a:p>
-            <a:pPr>
-              <a:spcBef>
-                <a:spcPts val="1000"/>
-              </a:spcBef>
-              <a:defRPr sz="1200">
-                <a:solidFill>
-                  <a:srgbClr val="E8E0D0"/>
-                </a:solidFill>
-                <a:latin typeface="Calibri"/>
-              </a:defRPr>
-            </a:pPr>
-            <a:r>
-              <a:t>Мария Луиза (1611–1638) — дочь Антонио де</a:t>
-            </a:r>
-          </a:p>
-          <a:p>
-            <a:pPr>
-              <a:spcBef>
-                <a:spcPts val="1000"/>
-              </a:spcBef>
-              <a:defRPr sz="1200">
-                <a:solidFill>
-                  <a:srgbClr val="E8E0D0"/>
-                </a:solidFill>
-                <a:latin typeface="Calibri"/>
-              </a:defRPr>
-            </a:pPr>
-            <a:r>
-              <a:t>Тассис из Антверпена. Семья де Тассис</a:t>
-            </a:r>
-          </a:p>
-          <a:p>
-            <a:pPr>
-              <a:spcBef>
-                <a:spcPts val="1000"/>
-              </a:spcBef>
-              <a:defRPr sz="1200">
-                <a:solidFill>
-                  <a:srgbClr val="E8E0D0"/>
-                </a:solidFill>
-                <a:latin typeface="Calibri"/>
-              </a:defRPr>
-            </a:pPr>
-            <a:r>
-              <a:t>создала первую почтовую систему Европы</a:t>
-            </a:r>
-          </a:p>
-          <a:p>
-            <a:pPr>
-              <a:spcBef>
-                <a:spcPts val="1000"/>
-              </a:spcBef>
-              <a:defRPr sz="1200">
-                <a:solidFill>
-                  <a:srgbClr val="E8E0D0"/>
-                </a:solidFill>
-                <a:latin typeface="Calibri"/>
-              </a:defRPr>
-            </a:pPr>
-            <a:r>
-              <a:t>(ныне Thurn und Taxis).</a:t>
-            </a:r>
-          </a:p>
-          <a:p>
-            <a:pPr>
-              <a:spcBef>
-                <a:spcPts val="1000"/>
-              </a:spcBef>
-              <a:defRPr sz="1200">
-                <a:solidFill>
-                  <a:srgbClr val="E8E0D0"/>
-                </a:solidFill>
-                <a:latin typeface="Calibri"/>
-              </a:defRPr>
-            </a:pPr>
-          </a:p>
-          <a:p>
-            <a:pPr>
-              <a:spcBef>
-                <a:spcPts val="1000"/>
+                <a:spcPts val="800"/>
+              </a:spcBef>
+              <a:defRPr sz="1200">
+                <a:solidFill>
+                  <a:srgbClr val="E8E0D0"/>
+                </a:solidFill>
+                <a:latin typeface="Calibri"/>
+              </a:defRPr>
+            </a:pPr>
+          </a:p>
+          <a:p>
+            <a:pPr>
+              <a:spcBef>
+                <a:spcPts val="800"/>
+              </a:spcBef>
+              <a:defRPr sz="1200">
+                <a:solidFill>
+                  <a:srgbClr val="E8E0D0"/>
+                </a:solidFill>
+                <a:latin typeface="Calibri"/>
+              </a:defRPr>
+            </a:pPr>
+            <a:r>
+              <a:t>Мария Луиза (1611–1638) — дочь Антонио</a:t>
+            </a:r>
+          </a:p>
+          <a:p>
+            <a:pPr>
+              <a:spcBef>
+                <a:spcPts val="800"/>
+              </a:spcBef>
+              <a:defRPr sz="1200">
+                <a:solidFill>
+                  <a:srgbClr val="E8E0D0"/>
+                </a:solidFill>
+                <a:latin typeface="Calibri"/>
+              </a:defRPr>
+            </a:pPr>
+            <a:r>
+              <a:t>де Тассис из Антверпена. Семья создала</a:t>
+            </a:r>
+          </a:p>
+          <a:p>
+            <a:pPr>
+              <a:spcBef>
+                <a:spcPts val="800"/>
+              </a:spcBef>
+              <a:defRPr sz="1200">
+                <a:solidFill>
+                  <a:srgbClr val="E8E0D0"/>
+                </a:solidFill>
+                <a:latin typeface="Calibri"/>
+              </a:defRPr>
+            </a:pPr>
+            <a:r>
+              <a:t>первую почтовую систему Европы.</a:t>
+            </a:r>
+          </a:p>
+          <a:p>
+            <a:pPr>
+              <a:spcBef>
+                <a:spcPts val="800"/>
+              </a:spcBef>
+              <a:defRPr sz="1200">
+                <a:solidFill>
+                  <a:srgbClr val="E8E0D0"/>
+                </a:solidFill>
+                <a:latin typeface="Calibri"/>
+              </a:defRPr>
+            </a:pPr>
+          </a:p>
+          <a:p>
+            <a:pPr>
+              <a:spcBef>
+                <a:spcPts val="800"/>
               </a:spcBef>
               <a:defRPr sz="1200">
                 <a:solidFill>
@@ -7297,7 +7151,7 @@
           <a:p>
             <a:pPr>
               <a:spcBef>
-                <a:spcPts val="1000"/>
+                <a:spcPts val="800"/>
               </a:spcBef>
               <a:defRPr sz="1200">
                 <a:solidFill>
@@ -7313,62 +7167,62 @@
           <a:p>
             <a:pPr>
               <a:spcBef>
-                <a:spcPts val="1000"/>
-              </a:spcBef>
-              <a:defRPr sz="1200">
-                <a:solidFill>
-                  <a:srgbClr val="E8E0D0"/>
-                </a:solidFill>
-                <a:latin typeface="Calibri"/>
-              </a:defRPr>
-            </a:pPr>
-            <a:r>
-              <a:t>утончённая красота молодой аристократки.</a:t>
-            </a:r>
-          </a:p>
-          <a:p>
-            <a:pPr>
-              <a:spcBef>
-                <a:spcPts val="1000"/>
-              </a:spcBef>
-              <a:defRPr sz="1200">
-                <a:solidFill>
-                  <a:srgbClr val="E8E0D0"/>
-                </a:solidFill>
-                <a:latin typeface="Calibri"/>
-              </a:defRPr>
-            </a:pPr>
-          </a:p>
-          <a:p>
-            <a:pPr>
-              <a:spcBef>
-                <a:spcPts val="1000"/>
-              </a:spcBef>
-              <a:defRPr sz="1200">
-                <a:solidFill>
-                  <a:srgbClr val="E8E0D0"/>
-                </a:solidFill>
-                <a:latin typeface="Calibri"/>
-              </a:defRPr>
-            </a:pPr>
-            <a:r>
-              <a:t>Эталон мастерства в передаче тканей,</a:t>
-            </a:r>
-          </a:p>
-          <a:p>
-            <a:pPr>
-              <a:spcBef>
-                <a:spcPts val="1000"/>
-              </a:spcBef>
-              <a:defRPr sz="1200">
-                <a:solidFill>
-                  <a:srgbClr val="E8E0D0"/>
-                </a:solidFill>
-                <a:latin typeface="Calibri"/>
-              </a:defRPr>
-            </a:pPr>
-            <a:r>
-              <a:t>украшений и женственности.</a:t>
+                <a:spcPts val="800"/>
+              </a:spcBef>
+              <a:defRPr sz="1200">
+                <a:solidFill>
+                  <a:srgbClr val="E8E0D0"/>
+                </a:solidFill>
+                <a:latin typeface="Calibri"/>
+              </a:defRPr>
+            </a:pPr>
+            <a:r>
+              <a:t>утончённая красота аристократки.</a:t>
+            </a:r>
+          </a:p>
+          <a:p>
+            <a:pPr>
+              <a:spcBef>
+                <a:spcPts val="800"/>
+              </a:spcBef>
+              <a:defRPr sz="1200">
+                <a:solidFill>
+                  <a:srgbClr val="E8E0D0"/>
+                </a:solidFill>
+                <a:latin typeface="Calibri"/>
+              </a:defRPr>
+            </a:pPr>
+          </a:p>
+          <a:p>
+            <a:pPr>
+              <a:spcBef>
+                <a:spcPts val="800"/>
+              </a:spcBef>
+              <a:defRPr sz="1200">
+                <a:solidFill>
+                  <a:srgbClr val="E8E0D0"/>
+                </a:solidFill>
+                <a:latin typeface="Calibri"/>
+              </a:defRPr>
+            </a:pPr>
+            <a:r>
+              <a:t>Эталон мастерства Ван Дейка в передаче</a:t>
+            </a:r>
+          </a:p>
+          <a:p>
+            <a:pPr>
+              <a:spcBef>
+                <a:spcPts val="800"/>
+              </a:spcBef>
+              <a:defRPr sz="1200">
+                <a:solidFill>
+                  <a:srgbClr val="E8E0D0"/>
+                </a:solidFill>
+                <a:latin typeface="Calibri"/>
+              </a:defRPr>
+            </a:pPr>
+            <a:r>
+              <a:t>тканей, украшений и женственности.</a:t>
             </a:r>
           </a:p>
         </p:txBody>
@@ -7486,8 +7340,8 @@
         </p:nvSpPr>
         <p:spPr>
           <a:xfrm>
-            <a:off x="274320" y="548640"/>
-            <a:ext cx="3840480" cy="5943600"/>
+            <a:off x="274320" y="457200"/>
+            <a:ext cx="3657600" cy="6035040"/>
           </a:xfrm>
           <a:prstGeom prst="rect">
             <a:avLst/>
@@ -7537,8 +7391,8 @@
         </p:blipFill>
         <p:spPr>
           <a:xfrm>
-            <a:off x="457200" y="731520"/>
-            <a:ext cx="4321813" cy="5577840"/>
+            <a:off x="411480" y="1291447"/>
+            <a:ext cx="3383280" cy="4366545"/>
           </a:xfrm>
           <a:prstGeom prst="rect">
             <a:avLst/>
@@ -7553,8 +7407,8 @@
         </p:nvSpPr>
         <p:spPr>
           <a:xfrm>
-            <a:off x="4389120" y="640080"/>
-            <a:ext cx="4480560" cy="822960"/>
+            <a:off x="4206240" y="548640"/>
+            <a:ext cx="4663440" cy="731520"/>
           </a:xfrm>
           <a:prstGeom prst="rect">
             <a:avLst/>
@@ -7589,8 +7443,8 @@
         </p:nvSpPr>
         <p:spPr>
           <a:xfrm>
-            <a:off x="4389120" y="1371600"/>
-            <a:ext cx="4480560" cy="365760"/>
+            <a:off x="4206240" y="1234440"/>
+            <a:ext cx="4663440" cy="365760"/>
           </a:xfrm>
           <a:prstGeom prst="rect">
             <a:avLst/>
@@ -7604,7 +7458,7 @@
           <a:lstStyle/>
           <a:p>
             <a:pPr algn="l">
-              <a:defRPr sz="1300" b="0" i="1">
+              <a:defRPr sz="1200" b="0" i="1">
                 <a:solidFill>
                   <a:srgbClr val="E8C56D"/>
                 </a:solidFill>
@@ -7625,7 +7479,7 @@
         </p:nvSpPr>
         <p:spPr>
           <a:xfrm>
-            <a:off x="4389120" y="1783080"/>
+            <a:off x="4206240" y="1645920"/>
             <a:ext cx="1371600" cy="25400"/>
           </a:xfrm>
           <a:prstGeom prst="rect">
@@ -7668,8 +7522,8 @@
         </p:nvSpPr>
         <p:spPr>
           <a:xfrm>
-            <a:off x="4389120" y="2011680"/>
-            <a:ext cx="4480560" cy="4389120"/>
+            <a:off x="4206240" y="1828800"/>
+            <a:ext cx="4663440" cy="4572000"/>
           </a:xfrm>
           <a:prstGeom prst="rect">
             <a:avLst/>
@@ -7684,7 +7538,7 @@
           <a:p>
             <a:pPr>
               <a:spcBef>
-                <a:spcPts val="1000"/>
+                <a:spcPts val="800"/>
               </a:spcBef>
               <a:defRPr sz="1200">
                 <a:solidFill>
@@ -7700,168 +7554,168 @@
           <a:p>
             <a:pPr>
               <a:spcBef>
-                <a:spcPts val="1000"/>
-              </a:spcBef>
-              <a:defRPr sz="1200">
-                <a:solidFill>
-                  <a:srgbClr val="E8E0D0"/>
-                </a:solidFill>
-                <a:latin typeface="Calibri"/>
-              </a:defRPr>
-            </a:pPr>
-          </a:p>
-          <a:p>
-            <a:pPr>
-              <a:spcBef>
-                <a:spcPts val="1000"/>
-              </a:spcBef>
-              <a:defRPr sz="1200">
-                <a:solidFill>
-                  <a:srgbClr val="E8E0D0"/>
-                </a:solidFill>
-                <a:latin typeface="Calibri"/>
-              </a:defRPr>
-            </a:pPr>
-            <a:r>
-              <a:t>Одна из последних работ мастера. Сэр Томас</a:t>
-            </a:r>
-          </a:p>
-          <a:p>
-            <a:pPr>
-              <a:spcBef>
-                <a:spcPts val="1000"/>
-              </a:spcBef>
-              <a:defRPr sz="1200">
-                <a:solidFill>
-                  <a:srgbClr val="E8E0D0"/>
-                </a:solidFill>
-                <a:latin typeface="Calibri"/>
-              </a:defRPr>
-            </a:pPr>
-            <a:r>
-              <a:t>Чалонер — английский придворный при Карле I.</a:t>
-            </a:r>
-          </a:p>
-          <a:p>
-            <a:pPr>
-              <a:spcBef>
-                <a:spcPts val="1000"/>
-              </a:spcBef>
-              <a:defRPr sz="1200">
-                <a:solidFill>
-                  <a:srgbClr val="E8E0D0"/>
-                </a:solidFill>
-                <a:latin typeface="Calibri"/>
-              </a:defRPr>
-            </a:pPr>
-          </a:p>
-          <a:p>
-            <a:pPr>
-              <a:spcBef>
-                <a:spcPts val="1000"/>
-              </a:spcBef>
-              <a:defRPr sz="1200">
-                <a:solidFill>
-                  <a:srgbClr val="E8E0D0"/>
-                </a:solidFill>
-                <a:latin typeface="Calibri"/>
-              </a:defRPr>
-            </a:pPr>
-            <a:r>
-              <a:t>Художник с поразительной честностью передаёт</a:t>
-            </a:r>
-          </a:p>
-          <a:p>
-            <a:pPr>
-              <a:spcBef>
-                <a:spcPts val="1000"/>
-              </a:spcBef>
-              <a:defRPr sz="1200">
-                <a:solidFill>
-                  <a:srgbClr val="E8E0D0"/>
-                </a:solidFill>
-                <a:latin typeface="Calibri"/>
-              </a:defRPr>
-            </a:pPr>
-            <a:r>
-              <a:t>стареющее лицо: дряблая кожа, румянец —</a:t>
-            </a:r>
-          </a:p>
-          <a:p>
-            <a:pPr>
-              <a:spcBef>
-                <a:spcPts val="1000"/>
-              </a:spcBef>
-              <a:defRPr sz="1200">
-                <a:solidFill>
-                  <a:srgbClr val="E8E0D0"/>
-                </a:solidFill>
-                <a:latin typeface="Calibri"/>
-              </a:defRPr>
-            </a:pPr>
-            <a:r>
-              <a:t>без лести, глубокий психологизм.</a:t>
-            </a:r>
-          </a:p>
-          <a:p>
-            <a:pPr>
-              <a:spcBef>
-                <a:spcPts val="1000"/>
-              </a:spcBef>
-              <a:defRPr sz="1200">
-                <a:solidFill>
-                  <a:srgbClr val="E8E0D0"/>
-                </a:solidFill>
-                <a:latin typeface="Calibri"/>
-              </a:defRPr>
-            </a:pPr>
-          </a:p>
-          <a:p>
-            <a:pPr>
-              <a:spcBef>
-                <a:spcPts val="1000"/>
-              </a:spcBef>
-              <a:defRPr sz="1200">
-                <a:solidFill>
-                  <a:srgbClr val="E8E0D0"/>
-                </a:solidFill>
-                <a:latin typeface="Calibri"/>
-              </a:defRPr>
-            </a:pPr>
-            <a:r>
-              <a:t>Считается одним из лучших полотен позднего</a:t>
-            </a:r>
-          </a:p>
-          <a:p>
-            <a:pPr>
-              <a:spcBef>
-                <a:spcPts val="1000"/>
-              </a:spcBef>
-              <a:defRPr sz="1200">
-                <a:solidFill>
-                  <a:srgbClr val="E8E0D0"/>
-                </a:solidFill>
-                <a:latin typeface="Calibri"/>
-              </a:defRPr>
-            </a:pPr>
-            <a:r>
-              <a:t>периода. Свободная, уверенная манера</a:t>
-            </a:r>
-          </a:p>
-          <a:p>
-            <a:pPr>
-              <a:spcBef>
-                <a:spcPts val="1000"/>
-              </a:spcBef>
-              <a:defRPr sz="1200">
-                <a:solidFill>
-                  <a:srgbClr val="E8E0D0"/>
-                </a:solidFill>
-                <a:latin typeface="Calibri"/>
-              </a:defRPr>
-            </a:pPr>
-            <a:r>
-              <a:t>письма зрелого мастера.</a:t>
+                <a:spcPts val="800"/>
+              </a:spcBef>
+              <a:defRPr sz="1200">
+                <a:solidFill>
+                  <a:srgbClr val="E8E0D0"/>
+                </a:solidFill>
+                <a:latin typeface="Calibri"/>
+              </a:defRPr>
+            </a:pPr>
+          </a:p>
+          <a:p>
+            <a:pPr>
+              <a:spcBef>
+                <a:spcPts val="800"/>
+              </a:spcBef>
+              <a:defRPr sz="1200">
+                <a:solidFill>
+                  <a:srgbClr val="E8E0D0"/>
+                </a:solidFill>
+                <a:latin typeface="Calibri"/>
+              </a:defRPr>
+            </a:pPr>
+            <a:r>
+              <a:t>Одна из последних работ мастера.</a:t>
+            </a:r>
+          </a:p>
+          <a:p>
+            <a:pPr>
+              <a:spcBef>
+                <a:spcPts val="800"/>
+              </a:spcBef>
+              <a:defRPr sz="1200">
+                <a:solidFill>
+                  <a:srgbClr val="E8E0D0"/>
+                </a:solidFill>
+                <a:latin typeface="Calibri"/>
+              </a:defRPr>
+            </a:pPr>
+            <a:r>
+              <a:t>Сэр Томас Чалонер — придворный Карла I.</a:t>
+            </a:r>
+          </a:p>
+          <a:p>
+            <a:pPr>
+              <a:spcBef>
+                <a:spcPts val="800"/>
+              </a:spcBef>
+              <a:defRPr sz="1200">
+                <a:solidFill>
+                  <a:srgbClr val="E8E0D0"/>
+                </a:solidFill>
+                <a:latin typeface="Calibri"/>
+              </a:defRPr>
+            </a:pPr>
+          </a:p>
+          <a:p>
+            <a:pPr>
+              <a:spcBef>
+                <a:spcPts val="800"/>
+              </a:spcBef>
+              <a:defRPr sz="1200">
+                <a:solidFill>
+                  <a:srgbClr val="E8E0D0"/>
+                </a:solidFill>
+                <a:latin typeface="Calibri"/>
+              </a:defRPr>
+            </a:pPr>
+            <a:r>
+              <a:t>Художник честно передаёт стареющее лицо:</a:t>
+            </a:r>
+          </a:p>
+          <a:p>
+            <a:pPr>
+              <a:spcBef>
+                <a:spcPts val="800"/>
+              </a:spcBef>
+              <a:defRPr sz="1200">
+                <a:solidFill>
+                  <a:srgbClr val="E8E0D0"/>
+                </a:solidFill>
+                <a:latin typeface="Calibri"/>
+              </a:defRPr>
+            </a:pPr>
+            <a:r>
+              <a:t>дряблая кожа, румянец — без лести,</a:t>
+            </a:r>
+          </a:p>
+          <a:p>
+            <a:pPr>
+              <a:spcBef>
+                <a:spcPts val="800"/>
+              </a:spcBef>
+              <a:defRPr sz="1200">
+                <a:solidFill>
+                  <a:srgbClr val="E8E0D0"/>
+                </a:solidFill>
+                <a:latin typeface="Calibri"/>
+              </a:defRPr>
+            </a:pPr>
+            <a:r>
+              <a:t>глубокий психологизм.</a:t>
+            </a:r>
+          </a:p>
+          <a:p>
+            <a:pPr>
+              <a:spcBef>
+                <a:spcPts val="800"/>
+              </a:spcBef>
+              <a:defRPr sz="1200">
+                <a:solidFill>
+                  <a:srgbClr val="E8E0D0"/>
+                </a:solidFill>
+                <a:latin typeface="Calibri"/>
+              </a:defRPr>
+            </a:pPr>
+          </a:p>
+          <a:p>
+            <a:pPr>
+              <a:spcBef>
+                <a:spcPts val="800"/>
+              </a:spcBef>
+              <a:defRPr sz="1200">
+                <a:solidFill>
+                  <a:srgbClr val="E8E0D0"/>
+                </a:solidFill>
+                <a:latin typeface="Calibri"/>
+              </a:defRPr>
+            </a:pPr>
+            <a:r>
+              <a:t>Считается одним из лучших полотен</a:t>
+            </a:r>
+          </a:p>
+          <a:p>
+            <a:pPr>
+              <a:spcBef>
+                <a:spcPts val="800"/>
+              </a:spcBef>
+              <a:defRPr sz="1200">
+                <a:solidFill>
+                  <a:srgbClr val="E8E0D0"/>
+                </a:solidFill>
+                <a:latin typeface="Calibri"/>
+              </a:defRPr>
+            </a:pPr>
+            <a:r>
+              <a:t>позднего периода. Свободная, уверенная</a:t>
+            </a:r>
+          </a:p>
+          <a:p>
+            <a:pPr>
+              <a:spcBef>
+                <a:spcPts val="800"/>
+              </a:spcBef>
+              <a:defRPr sz="1200">
+                <a:solidFill>
+                  <a:srgbClr val="E8E0D0"/>
+                </a:solidFill>
+                <a:latin typeface="Calibri"/>
+              </a:defRPr>
+            </a:pPr>
+            <a:r>
+              <a:t>манера письма зрелого мастера.</a:t>
             </a:r>
           </a:p>
         </p:txBody>
@@ -7979,8 +7833,8 @@
         </p:nvSpPr>
         <p:spPr>
           <a:xfrm>
-            <a:off x="274320" y="548640"/>
-            <a:ext cx="3840480" cy="5943600"/>
+            <a:off x="274320" y="457200"/>
+            <a:ext cx="3657600" cy="6035040"/>
           </a:xfrm>
           <a:prstGeom prst="rect">
             <a:avLst/>
@@ -8030,8 +7884,8 @@
         </p:blipFill>
         <p:spPr>
           <a:xfrm>
-            <a:off x="457200" y="731520"/>
-            <a:ext cx="4346369" cy="5577840"/>
+            <a:off x="411480" y="1303782"/>
+            <a:ext cx="3383280" cy="4341876"/>
           </a:xfrm>
           <a:prstGeom prst="rect">
             <a:avLst/>
@@ -8046,8 +7900,8 @@
         </p:nvSpPr>
         <p:spPr>
           <a:xfrm>
-            <a:off x="4389120" y="640080"/>
-            <a:ext cx="4480560" cy="822960"/>
+            <a:off x="4206240" y="548640"/>
+            <a:ext cx="4663440" cy="731520"/>
           </a:xfrm>
           <a:prstGeom prst="rect">
             <a:avLst/>
@@ -8082,8 +7936,8 @@
         </p:nvSpPr>
         <p:spPr>
           <a:xfrm>
-            <a:off x="4389120" y="1371600"/>
-            <a:ext cx="4480560" cy="365760"/>
+            <a:off x="4206240" y="1234440"/>
+            <a:ext cx="4663440" cy="365760"/>
           </a:xfrm>
           <a:prstGeom prst="rect">
             <a:avLst/>
@@ -8097,7 +7951,7 @@
           <a:lstStyle/>
           <a:p>
             <a:pPr algn="l">
-              <a:defRPr sz="1300" b="0" i="1">
+              <a:defRPr sz="1200" b="0" i="1">
                 <a:solidFill>
                   <a:srgbClr val="E8C56D"/>
                 </a:solidFill>
@@ -8118,7 +7972,7 @@
         </p:nvSpPr>
         <p:spPr>
           <a:xfrm>
-            <a:off x="4389120" y="1783080"/>
+            <a:off x="4206240" y="1645920"/>
             <a:ext cx="1371600" cy="25400"/>
           </a:xfrm>
           <a:prstGeom prst="rect">
@@ -8161,8 +8015,8 @@
         </p:nvSpPr>
         <p:spPr>
           <a:xfrm>
-            <a:off x="4389120" y="2011680"/>
-            <a:ext cx="4480560" cy="4389120"/>
+            <a:off x="4206240" y="1828800"/>
+            <a:ext cx="4663440" cy="4572000"/>
           </a:xfrm>
           <a:prstGeom prst="rect">
             <a:avLst/>
@@ -8177,7 +8031,7 @@
           <a:p>
             <a:pPr>
               <a:spcBef>
-                <a:spcPts val="1000"/>
+                <a:spcPts val="800"/>
               </a:spcBef>
               <a:defRPr sz="1200">
                 <a:solidFill>
@@ -8193,20 +8047,20 @@
           <a:p>
             <a:pPr>
               <a:spcBef>
-                <a:spcPts val="1000"/>
-              </a:spcBef>
-              <a:defRPr sz="1200">
-                <a:solidFill>
-                  <a:srgbClr val="E8E0D0"/>
-                </a:solidFill>
-                <a:latin typeface="Calibri"/>
-              </a:defRPr>
-            </a:pPr>
-          </a:p>
-          <a:p>
-            <a:pPr>
-              <a:spcBef>
-                <a:spcPts val="1000"/>
+                <a:spcPts val="800"/>
+              </a:spcBef>
+              <a:defRPr sz="1200">
+                <a:solidFill>
+                  <a:srgbClr val="E8E0D0"/>
+                </a:solidFill>
+                <a:latin typeface="Calibri"/>
+              </a:defRPr>
+            </a:pPr>
+          </a:p>
+          <a:p>
+            <a:pPr>
+              <a:spcBef>
+                <a:spcPts val="800"/>
               </a:spcBef>
               <a:defRPr sz="1200">
                 <a:solidFill>
@@ -8222,36 +8076,36 @@
           <a:p>
             <a:pPr>
               <a:spcBef>
-                <a:spcPts val="1000"/>
-              </a:spcBef>
-              <a:defRPr sz="1200">
-                <a:solidFill>
-                  <a:srgbClr val="E8E0D0"/>
-                </a:solidFill>
-                <a:latin typeface="Calibri"/>
-              </a:defRPr>
-            </a:pPr>
-            <a:r>
-              <a:t>Карл I в гражданской одежде, стоящий у лошади.</a:t>
-            </a:r>
-          </a:p>
-          <a:p>
-            <a:pPr>
-              <a:spcBef>
-                <a:spcPts val="1000"/>
-              </a:spcBef>
-              <a:defRPr sz="1200">
-                <a:solidFill>
-                  <a:srgbClr val="E8E0D0"/>
-                </a:solidFill>
-                <a:latin typeface="Calibri"/>
-              </a:defRPr>
-            </a:pPr>
-          </a:p>
-          <a:p>
-            <a:pPr>
-              <a:spcBef>
-                <a:spcPts val="1000"/>
+                <a:spcPts val="800"/>
+              </a:spcBef>
+              <a:defRPr sz="1200">
+                <a:solidFill>
+                  <a:srgbClr val="E8E0D0"/>
+                </a:solidFill>
+                <a:latin typeface="Calibri"/>
+              </a:defRPr>
+            </a:pPr>
+            <a:r>
+              <a:t>Карл I в гражданской одежде у лошади.</a:t>
+            </a:r>
+          </a:p>
+          <a:p>
+            <a:pPr>
+              <a:spcBef>
+                <a:spcPts val="800"/>
+              </a:spcBef>
+              <a:defRPr sz="1200">
+                <a:solidFill>
+                  <a:srgbClr val="E8E0D0"/>
+                </a:solidFill>
+                <a:latin typeface="Calibri"/>
+              </a:defRPr>
+            </a:pPr>
+          </a:p>
+          <a:p>
+            <a:pPr>
+              <a:spcBef>
+                <a:spcPts val="800"/>
               </a:spcBef>
               <a:defRPr sz="1200">
                 <a:solidFill>
@@ -8267,7 +8121,7 @@
           <a:p>
             <a:pPr>
               <a:spcBef>
-                <a:spcPts val="1000"/>
+                <a:spcPts val="800"/>
               </a:spcBef>
               <a:defRPr sz="1200">
                 <a:solidFill>
@@ -8283,36 +8137,20 @@
           <a:p>
             <a:pPr>
               <a:spcBef>
-                <a:spcPts val="1000"/>
-              </a:spcBef>
-              <a:defRPr sz="1200">
-                <a:solidFill>
-                  <a:srgbClr val="E8E0D0"/>
-                </a:solidFill>
-                <a:latin typeface="Calibri"/>
-              </a:defRPr>
-            </a:pPr>
-            <a:r>
-              <a:t>— описание Лувра.</a:t>
-            </a:r>
-          </a:p>
-          <a:p>
-            <a:pPr>
-              <a:spcBef>
-                <a:spcPts val="1000"/>
-              </a:spcBef>
-              <a:defRPr sz="1200">
-                <a:solidFill>
-                  <a:srgbClr val="E8E0D0"/>
-                </a:solidFill>
-                <a:latin typeface="Calibri"/>
-              </a:defRPr>
-            </a:pPr>
-          </a:p>
-          <a:p>
-            <a:pPr>
-              <a:spcBef>
-                <a:spcPts val="1000"/>
+                <a:spcPts val="800"/>
+              </a:spcBef>
+              <a:defRPr sz="1200">
+                <a:solidFill>
+                  <a:srgbClr val="E8E0D0"/>
+                </a:solidFill>
+                <a:latin typeface="Calibri"/>
+              </a:defRPr>
+            </a:pPr>
+          </a:p>
+          <a:p>
+            <a:pPr>
+              <a:spcBef>
+                <a:spcPts val="800"/>
               </a:spcBef>
               <a:defRPr sz="1200">
                 <a:solidFill>
@@ -8328,7 +8166,7 @@
           <a:p>
             <a:pPr>
               <a:spcBef>
-                <a:spcPts val="1000"/>
+                <a:spcPts val="800"/>
               </a:spcBef>
               <a:defRPr sz="1200">
                 <a:solidFill>
@@ -8344,33 +8182,17 @@
           <a:p>
             <a:pPr>
               <a:spcBef>
-                <a:spcPts val="1000"/>
-              </a:spcBef>
-              <a:defRPr sz="1200">
-                <a:solidFill>
-                  <a:srgbClr val="E8E0D0"/>
-                </a:solidFill>
-                <a:latin typeface="Calibri"/>
-              </a:defRPr>
-            </a:pPr>
-            <a:r>
-              <a:t>величественной фигуры. Лошадь словно</a:t>
-            </a:r>
-          </a:p>
-          <a:p>
-            <a:pPr>
-              <a:spcBef>
-                <a:spcPts val="1000"/>
-              </a:spcBef>
-              <a:defRPr sz="1200">
-                <a:solidFill>
-                  <a:srgbClr val="E8E0D0"/>
-                </a:solidFill>
-                <a:latin typeface="Calibri"/>
-              </a:defRPr>
-            </a:pPr>
-            <a:r>
-              <a:t>кланяется, подчёркивая статус монарха.</a:t>
+                <a:spcPts val="800"/>
+              </a:spcBef>
+              <a:defRPr sz="1200">
+                <a:solidFill>
+                  <a:srgbClr val="E8E0D0"/>
+                </a:solidFill>
+                <a:latin typeface="Calibri"/>
+              </a:defRPr>
+            </a:pPr>
+            <a:r>
+              <a:t>величественной фигуры.</a:t>
             </a:r>
           </a:p>
         </p:txBody>
